--- a/docs/slides/software-workshop.pptx
+++ b/docs/slides/software-workshop.pptx
@@ -4,33 +4,36 @@
   <p:sldMasterIdLst>
     <p:sldMasterId id="2147483648" r:id="rId1"/>
   </p:sldMasterIdLst>
+  <p:notesMasterIdLst>
+    <p:notesMasterId r:id="rId26"/>
+  </p:notesMasterIdLst>
   <p:sldIdLst>
-    <p:sldId id="256" r:id="rId7"/>
-    <p:sldId id="257" r:id="rId9"/>
-    <p:sldId id="258" r:id="rId10"/>
-    <p:sldId id="259" r:id="rId11"/>
-    <p:sldId id="260" r:id="rId12"/>
-    <p:sldId id="261" r:id="rId13"/>
-    <p:sldId id="262" r:id="rId14"/>
-    <p:sldId id="263" r:id="rId15"/>
-    <p:sldId id="264" r:id="rId16"/>
-    <p:sldId id="265" r:id="rId17"/>
-    <p:sldId id="266" r:id="rId18"/>
-    <p:sldId id="267" r:id="rId19"/>
-    <p:sldId id="268" r:id="rId20"/>
-    <p:sldId id="269" r:id="rId21"/>
-    <p:sldId id="270" r:id="rId22"/>
-    <p:sldId id="271" r:id="rId23"/>
-    <p:sldId id="272" r:id="rId24"/>
-    <p:sldId id="273" r:id="rId25"/>
-    <p:sldId id="274" r:id="rId26"/>
-    <p:sldId id="275" r:id="rId27"/>
-    <p:sldId id="276" r:id="rId28"/>
-    <p:sldId id="277" r:id="rId29"/>
-    <p:sldId id="278" r:id="rId30"/>
-    <p:sldId id="279" r:id="rId31"/>
+    <p:sldId id="256" r:id="rId2"/>
+    <p:sldId id="257" r:id="rId3"/>
+    <p:sldId id="258" r:id="rId4"/>
+    <p:sldId id="259" r:id="rId5"/>
+    <p:sldId id="260" r:id="rId6"/>
+    <p:sldId id="261" r:id="rId7"/>
+    <p:sldId id="262" r:id="rId8"/>
+    <p:sldId id="263" r:id="rId9"/>
+    <p:sldId id="264" r:id="rId10"/>
+    <p:sldId id="265" r:id="rId11"/>
+    <p:sldId id="266" r:id="rId12"/>
+    <p:sldId id="267" r:id="rId13"/>
+    <p:sldId id="268" r:id="rId14"/>
+    <p:sldId id="269" r:id="rId15"/>
+    <p:sldId id="270" r:id="rId16"/>
+    <p:sldId id="271" r:id="rId17"/>
+    <p:sldId id="272" r:id="rId18"/>
+    <p:sldId id="273" r:id="rId19"/>
+    <p:sldId id="274" r:id="rId20"/>
+    <p:sldId id="275" r:id="rId21"/>
+    <p:sldId id="276" r:id="rId22"/>
+    <p:sldId id="277" r:id="rId23"/>
+    <p:sldId id="278" r:id="rId24"/>
+    <p:sldId id="279" r:id="rId25"/>
   </p:sldIdLst>
-  <p:sldSz cx="12191695" cy="6858000" type="screen4x3"/>
+  <p:sldSz cx="12192000" cy="6858000"/>
   <p:notesSz cx="6858000" cy="9144000"/>
   <p:defaultTextStyle>
     <a:defPPr>
@@ -127,11 +130,27 @@
       </a:defRPr>
     </a:lvl9pPr>
   </p:defaultTextStyle>
+  <p:extLst>
+    <p:ext uri="{EFAFB233-063F-42B5-8137-9DF3F51BA10A}">
+      <p15:sldGuideLst xmlns:p15="http://schemas.microsoft.com/office/powerpoint/2012/main">
+        <p15:guide id="1" orient="horz" pos="2160">
+          <p15:clr>
+            <a:srgbClr val="A4A3A4"/>
+          </p15:clr>
+        </p15:guide>
+        <p15:guide id="2" pos="2880">
+          <p15:clr>
+            <a:srgbClr val="A4A3A4"/>
+          </p15:clr>
+        </p15:guide>
+      </p15:sldGuideLst>
+    </p:ext>
+  </p:extLst>
 </p:presentation>
 </file>
 
 <file path=ppt/notesMasters/notesMaster1.xml><?xml version="1.0" encoding="utf-8"?>
-<p:notesMaster xmlns:a="http://schemas.openxmlformats.org/drawingml/2006/main" xmlns:p="http://schemas.openxmlformats.org/presentationml/2006/main" xmlns:r="http://schemas.openxmlformats.org/officeDocument/2006/relationships">
+<p:notesMaster xmlns:a="http://schemas.openxmlformats.org/drawingml/2006/main" xmlns:r="http://schemas.openxmlformats.org/officeDocument/2006/relationships" xmlns:p="http://schemas.openxmlformats.org/presentationml/2006/main">
   <p:cSld>
     <p:bg>
       <p:bgRef idx="1001">
@@ -152,241 +171,16 @@
           <a:chExt cx="0" cy="0"/>
         </a:xfrm>
       </p:grpSpPr>
-      <p:sp>
-        <p:nvSpPr>
-          <p:cNvPr id="2" name="Header Placeholder 1"/>
-          <p:cNvSpPr>
-            <a:spLocks noGrp="1"/>
-          </p:cNvSpPr>
-          <p:nvPr>
-            <p:ph type="hdr" sz="quarter"/>
-          </p:nvPr>
-        </p:nvSpPr>
-        <p:spPr>
-          <a:xfrm>
-            <a:off x="0" y="0"/>
-            <a:ext cx="2971800" cy="457200"/>
-          </a:xfrm>
-          <a:prstGeom prst="rect">
-            <a:avLst/>
-          </a:prstGeom>
-        </p:spPr>
-        <p:txBody>
-          <a:bodyPr vert="horz" lIns="91440" tIns="45720" rIns="91440" bIns="45720" rtlCol="0"/>
-          <a:lstStyle>
-            <a:lvl1pPr algn="l">
-              <a:defRPr sz="1200"/>
-            </a:lvl1pPr>
-          </a:lstStyle>
-          <a:p>
-            <a:endParaRPr lang="en-US"/>
-          </a:p>
-        </p:txBody>
-      </p:sp>
-      <p:sp>
-        <p:nvSpPr>
-          <p:cNvPr id="3" name="Date Placeholder 2"/>
-          <p:cNvSpPr>
-            <a:spLocks noGrp="1"/>
-          </p:cNvSpPr>
-          <p:nvPr>
-            <p:ph type="dt" idx="1"/>
-          </p:nvPr>
-        </p:nvSpPr>
-        <p:spPr>
-          <a:xfrm>
-            <a:off x="3884613" y="0"/>
-            <a:ext cx="2971800" cy="457200"/>
-          </a:xfrm>
-          <a:prstGeom prst="rect">
-            <a:avLst/>
-          </a:prstGeom>
-        </p:spPr>
-        <p:txBody>
-          <a:bodyPr vert="horz" lIns="91440" tIns="45720" rIns="91440" bIns="45720" rtlCol="0"/>
-          <a:lstStyle>
-            <a:lvl1pPr algn="r">
-              <a:defRPr sz="1200"/>
-            </a:lvl1pPr>
-          </a:lstStyle>
-          <a:p>
-            <a:fld id="{0F89C1C7-3DCD-1040-A9CF-14679D8B5DDD}" type="datetimeFigureOut">
-              <a:rPr lang="en-US" smtClean="0"/>
-              <a:t>10/17/16</a:t>
-            </a:fld>
-            <a:endParaRPr lang="en-US"/>
-          </a:p>
-        </p:txBody>
-      </p:sp>
-      <p:sp>
-        <p:nvSpPr>
-          <p:cNvPr id="4" name="Slide Image Placeholder 3"/>
-          <p:cNvSpPr>
-            <a:spLocks noGrp="1" noRot="1" noChangeAspect="1"/>
-          </p:cNvSpPr>
-          <p:nvPr>
-            <p:ph type="sldImg" idx="2"/>
-          </p:nvPr>
-        </p:nvSpPr>
-        <p:spPr>
-          <a:xfrm>
-            <a:off x="1143000" y="685800"/>
-            <a:ext cx="4572000" cy="3429000"/>
-          </a:xfrm>
-          <a:prstGeom prst="rect">
-            <a:avLst/>
-          </a:prstGeom>
-          <a:noFill/>
-          <a:ln w="12700">
-            <a:solidFill>
-              <a:prstClr val="black"/>
-            </a:solidFill>
-          </a:ln>
-        </p:spPr>
-        <p:txBody>
-          <a:bodyPr vert="horz" lIns="91440" tIns="45720" rIns="91440" bIns="45720" rtlCol="0" anchor="ctr"/>
-          <a:lstStyle/>
-          <a:p>
-            <a:endParaRPr lang="en-US"/>
-          </a:p>
-        </p:txBody>
-      </p:sp>
-      <p:sp>
-        <p:nvSpPr>
-          <p:cNvPr id="5" name="Notes Placeholder 4"/>
-          <p:cNvSpPr>
-            <a:spLocks noGrp="1"/>
-          </p:cNvSpPr>
-          <p:nvPr>
-            <p:ph type="body" sz="quarter" idx="3"/>
-          </p:nvPr>
-        </p:nvSpPr>
-        <p:spPr>
-          <a:xfrm>
-            <a:off x="685800" y="4343400"/>
-            <a:ext cx="5486400" cy="4114800"/>
-          </a:xfrm>
-          <a:prstGeom prst="rect">
-            <a:avLst/>
-          </a:prstGeom>
-        </p:spPr>
-        <p:txBody>
-          <a:bodyPr vert="horz" lIns="91440" tIns="45720" rIns="91440" bIns="45720" rtlCol="0"/>
-          <a:lstStyle/>
-          <a:p>
-            <a:pPr lvl="0"/>
-            <a:r>
-              <a:rPr lang="en-US" smtClean="0"/>
-              <a:t>Click to edit Master text styles</a:t>
-            </a:r>
-          </a:p>
-          <a:p>
-            <a:pPr lvl="1"/>
-            <a:r>
-              <a:rPr lang="en-US" smtClean="0"/>
-              <a:t>Second level</a:t>
-            </a:r>
-          </a:p>
-          <a:p>
-            <a:pPr lvl="2"/>
-            <a:r>
-              <a:rPr lang="en-US" smtClean="0"/>
-              <a:t>Third level</a:t>
-            </a:r>
-          </a:p>
-          <a:p>
-            <a:pPr lvl="3"/>
-            <a:r>
-              <a:rPr lang="en-US" smtClean="0"/>
-              <a:t>Fourth level</a:t>
-            </a:r>
-          </a:p>
-          <a:p>
-            <a:pPr lvl="4"/>
-            <a:r>
-              <a:rPr lang="en-US" smtClean="0"/>
-              <a:t>Fifth level</a:t>
-            </a:r>
-            <a:endParaRPr lang="en-US"/>
-          </a:p>
-        </p:txBody>
-      </p:sp>
-      <p:sp>
-        <p:nvSpPr>
-          <p:cNvPr id="6" name="Footer Placeholder 5"/>
-          <p:cNvSpPr>
-            <a:spLocks noGrp="1"/>
-          </p:cNvSpPr>
-          <p:nvPr>
-            <p:ph type="ftr" sz="quarter" idx="4"/>
-          </p:nvPr>
-        </p:nvSpPr>
-        <p:spPr>
-          <a:xfrm>
-            <a:off x="0" y="8685213"/>
-            <a:ext cx="2971800" cy="457200"/>
-          </a:xfrm>
-          <a:prstGeom prst="rect">
-            <a:avLst/>
-          </a:prstGeom>
-        </p:spPr>
-        <p:txBody>
-          <a:bodyPr vert="horz" lIns="91440" tIns="45720" rIns="91440" bIns="45720" rtlCol="0" anchor="b"/>
-          <a:lstStyle>
-            <a:lvl1pPr algn="l">
-              <a:defRPr sz="1200"/>
-            </a:lvl1pPr>
-          </a:lstStyle>
-          <a:p>
-            <a:endParaRPr lang="en-US"/>
-          </a:p>
-        </p:txBody>
-      </p:sp>
-      <p:sp>
-        <p:nvSpPr>
-          <p:cNvPr id="7" name="Slide Number Placeholder 6"/>
-          <p:cNvSpPr>
-            <a:spLocks noGrp="1"/>
-          </p:cNvSpPr>
-          <p:nvPr>
-            <p:ph type="sldNum" sz="quarter" idx="5"/>
-          </p:nvPr>
-        </p:nvSpPr>
-        <p:spPr>
-          <a:xfrm>
-            <a:off x="3884613" y="8685213"/>
-            <a:ext cx="2971800" cy="457200"/>
-          </a:xfrm>
-          <a:prstGeom prst="rect">
-            <a:avLst/>
-          </a:prstGeom>
-        </p:spPr>
-        <p:txBody>
-          <a:bodyPr vert="horz" lIns="91440" tIns="45720" rIns="91440" bIns="45720" rtlCol="0" anchor="b"/>
-          <a:lstStyle>
-            <a:lvl1pPr algn="r">
-              <a:defRPr sz="1200"/>
-            </a:lvl1pPr>
-          </a:lstStyle>
-          <a:p>
-            <a:fld id="{BB5E49A5-4136-284D-997B-48E1D791AD67}" type="slidenum">
-              <a:rPr lang="en-US" smtClean="0"/>
-              <a:t>‹#›</a:t>
-            </a:fld>
-            <a:endParaRPr lang="en-US"/>
-          </a:p>
-        </p:txBody>
-      </p:sp>
     </p:spTree>
     <p:extLst>
       <p:ext uri="{BB962C8B-B14F-4D97-AF65-F5344CB8AC3E}">
-        <p14:creationId xmlns:p14="http://schemas.microsoft.com/office/powerpoint/2010/main" val="2623252185"/>
+        <p14:creationId xmlns:p14="http://schemas.microsoft.com/office/powerpoint/2010/main" val="2532675282"/>
       </p:ext>
     </p:extLst>
   </p:cSld>
   <p:clrMap bg1="lt1" tx1="dk1" bg2="lt2" tx2="dk2" accent1="accent1" accent2="accent2" accent3="accent3" accent4="accent4" accent5="accent5" accent6="accent6" hlink="hlink" folHlink="folHlink"/>
   <p:notesStyle>
-    <a:lvl1pPr marL="0" algn="l" defTabSz="457200" rtl="0" eaLnBrk="1" latinLnBrk="0" hangingPunct="1">
+    <a:lvl1pPr marL="0" algn="l" defTabSz="914400" rtl="0" eaLnBrk="1" latinLnBrk="0" hangingPunct="1">
       <a:defRPr sz="1200" kern="1200">
         <a:solidFill>
           <a:schemeClr val="tx1"/>
@@ -396,7 +190,7 @@
         <a:cs typeface="+mn-cs"/>
       </a:defRPr>
     </a:lvl1pPr>
-    <a:lvl2pPr marL="457200" algn="l" defTabSz="457200" rtl="0" eaLnBrk="1" latinLnBrk="0" hangingPunct="1">
+    <a:lvl2pPr marL="457200" algn="l" defTabSz="914400" rtl="0" eaLnBrk="1" latinLnBrk="0" hangingPunct="1">
       <a:defRPr sz="1200" kern="1200">
         <a:solidFill>
           <a:schemeClr val="tx1"/>
@@ -406,7 +200,7 @@
         <a:cs typeface="+mn-cs"/>
       </a:defRPr>
     </a:lvl2pPr>
-    <a:lvl3pPr marL="914400" algn="l" defTabSz="457200" rtl="0" eaLnBrk="1" latinLnBrk="0" hangingPunct="1">
+    <a:lvl3pPr marL="914400" algn="l" defTabSz="914400" rtl="0" eaLnBrk="1" latinLnBrk="0" hangingPunct="1">
       <a:defRPr sz="1200" kern="1200">
         <a:solidFill>
           <a:schemeClr val="tx1"/>
@@ -416,7 +210,7 @@
         <a:cs typeface="+mn-cs"/>
       </a:defRPr>
     </a:lvl3pPr>
-    <a:lvl4pPr marL="1371600" algn="l" defTabSz="457200" rtl="0" eaLnBrk="1" latinLnBrk="0" hangingPunct="1">
+    <a:lvl4pPr marL="1371600" algn="l" defTabSz="914400" rtl="0" eaLnBrk="1" latinLnBrk="0" hangingPunct="1">
       <a:defRPr sz="1200" kern="1200">
         <a:solidFill>
           <a:schemeClr val="tx1"/>
@@ -426,7 +220,7 @@
         <a:cs typeface="+mn-cs"/>
       </a:defRPr>
     </a:lvl4pPr>
-    <a:lvl5pPr marL="1828800" algn="l" defTabSz="457200" rtl="0" eaLnBrk="1" latinLnBrk="0" hangingPunct="1">
+    <a:lvl5pPr marL="1828800" algn="l" defTabSz="914400" rtl="0" eaLnBrk="1" latinLnBrk="0" hangingPunct="1">
       <a:defRPr sz="1200" kern="1200">
         <a:solidFill>
           <a:schemeClr val="tx1"/>
@@ -436,7 +230,7 @@
         <a:cs typeface="+mn-cs"/>
       </a:defRPr>
     </a:lvl5pPr>
-    <a:lvl6pPr marL="2286000" algn="l" defTabSz="457200" rtl="0" eaLnBrk="1" latinLnBrk="0" hangingPunct="1">
+    <a:lvl6pPr marL="2286000" algn="l" defTabSz="914400" rtl="0" eaLnBrk="1" latinLnBrk="0" hangingPunct="1">
       <a:defRPr sz="1200" kern="1200">
         <a:solidFill>
           <a:schemeClr val="tx1"/>
@@ -446,7 +240,7 @@
         <a:cs typeface="+mn-cs"/>
       </a:defRPr>
     </a:lvl6pPr>
-    <a:lvl7pPr marL="2743200" algn="l" defTabSz="457200" rtl="0" eaLnBrk="1" latinLnBrk="0" hangingPunct="1">
+    <a:lvl7pPr marL="2743200" algn="l" defTabSz="914400" rtl="0" eaLnBrk="1" latinLnBrk="0" hangingPunct="1">
       <a:defRPr sz="1200" kern="1200">
         <a:solidFill>
           <a:schemeClr val="tx1"/>
@@ -456,7 +250,7 @@
         <a:cs typeface="+mn-cs"/>
       </a:defRPr>
     </a:lvl7pPr>
-    <a:lvl8pPr marL="3200400" algn="l" defTabSz="457200" rtl="0" eaLnBrk="1" latinLnBrk="0" hangingPunct="1">
+    <a:lvl8pPr marL="3200400" algn="l" defTabSz="914400" rtl="0" eaLnBrk="1" latinLnBrk="0" hangingPunct="1">
       <a:defRPr sz="1200" kern="1200">
         <a:solidFill>
           <a:schemeClr val="tx1"/>
@@ -466,7 +260,7 @@
         <a:cs typeface="+mn-cs"/>
       </a:defRPr>
     </a:lvl8pPr>
-    <a:lvl9pPr marL="3657600" algn="l" defTabSz="457200" rtl="0" eaLnBrk="1" latinLnBrk="0" hangingPunct="1">
+    <a:lvl9pPr marL="3657600" algn="l" defTabSz="914400" rtl="0" eaLnBrk="1" latinLnBrk="0" hangingPunct="1">
       <a:defRPr sz="1200" kern="1200">
         <a:solidFill>
           <a:schemeClr val="tx1"/>
@@ -481,7 +275,7 @@
 </file>
 
 <file path=ppt/notesSlides/notesSlide1.xml><?xml version="1.0" encoding="utf-8"?>
-<p:notes xmlns:a="http://schemas.openxmlformats.org/drawingml/2006/main" xmlns:p="http://schemas.openxmlformats.org/presentationml/2006/main" xmlns:r="http://schemas.openxmlformats.org/officeDocument/2006/relationships">
+<p:notes xmlns:a="http://schemas.openxmlformats.org/drawingml/2006/main" xmlns:r="http://schemas.openxmlformats.org/officeDocument/2006/relationships" xmlns:p="http://schemas.openxmlformats.org/presentationml/2006/main">
   <p:cSld>
     <p:spTree>
       <p:nvGrpSpPr>
@@ -501,7 +295,7 @@
         <p:nvSpPr>
           <p:cNvPr id="2" name="Slide Image Placeholder 1"/>
           <p:cNvSpPr>
-            <a:spLocks noGrp="1"/>
+            <a:spLocks noGrp="1" noRot="1" noChangeAspect="1"/>
           </p:cNvSpPr>
           <p:nvPr>
             <p:ph type="sldImg" idx="2"/>
@@ -516,14 +310,16 @@
             <a:spLocks noGrp="1"/>
           </p:cNvSpPr>
           <p:nvPr>
-            <p:ph type="body" idx="3" sz="quarter"/>
+            <p:ph type="body" sz="quarter" idx="3"/>
           </p:nvPr>
         </p:nvSpPr>
         <p:spPr/>
         <p:txBody>
           <a:bodyPr/>
           <a:lstStyle/>
-          <a:p/>
+          <a:p>
+            <a:endParaRPr/>
+          </a:p>
         </p:txBody>
       </p:sp>
       <p:sp>
@@ -533,7 +329,7 @@
             <a:spLocks noGrp="1"/>
           </p:cNvSpPr>
           <p:nvPr>
-            <p:ph type="sldNum" idx="5" sz="quarter"/>
+            <p:ph type="sldNum" sz="quarter" idx="5"/>
           </p:nvPr>
         </p:nvSpPr>
         <p:spPr/>
@@ -547,7 +343,7 @@
 </file>
 
 <file path=ppt/notesSlides/notesSlide10.xml><?xml version="1.0" encoding="utf-8"?>
-<p:notes xmlns:a="http://schemas.openxmlformats.org/drawingml/2006/main" xmlns:p="http://schemas.openxmlformats.org/presentationml/2006/main" xmlns:r="http://schemas.openxmlformats.org/officeDocument/2006/relationships">
+<p:notes xmlns:a="http://schemas.openxmlformats.org/drawingml/2006/main" xmlns:r="http://schemas.openxmlformats.org/officeDocument/2006/relationships" xmlns:p="http://schemas.openxmlformats.org/presentationml/2006/main">
   <p:cSld>
     <p:spTree>
       <p:nvGrpSpPr>
@@ -567,7 +363,7 @@
         <p:nvSpPr>
           <p:cNvPr id="2" name="Slide Image Placeholder 1"/>
           <p:cNvSpPr>
-            <a:spLocks noGrp="1"/>
+            <a:spLocks noGrp="1" noRot="1" noChangeAspect="1"/>
           </p:cNvSpPr>
           <p:nvPr>
             <p:ph type="sldImg" idx="2"/>
@@ -582,14 +378,16 @@
             <a:spLocks noGrp="1"/>
           </p:cNvSpPr>
           <p:nvPr>
-            <p:ph type="body" idx="3" sz="quarter"/>
+            <p:ph type="body" sz="quarter" idx="3"/>
           </p:nvPr>
         </p:nvSpPr>
         <p:spPr/>
         <p:txBody>
           <a:bodyPr/>
           <a:lstStyle/>
-          <a:p/>
+          <a:p>
+            <a:endParaRPr/>
+          </a:p>
         </p:txBody>
       </p:sp>
       <p:sp>
@@ -599,7 +397,7 @@
             <a:spLocks noGrp="1"/>
           </p:cNvSpPr>
           <p:nvPr>
-            <p:ph type="sldNum" idx="5" sz="quarter"/>
+            <p:ph type="sldNum" sz="quarter" idx="5"/>
           </p:nvPr>
         </p:nvSpPr>
         <p:spPr/>
@@ -613,7 +411,7 @@
 </file>
 
 <file path=ppt/notesSlides/notesSlide11.xml><?xml version="1.0" encoding="utf-8"?>
-<p:notes xmlns:a="http://schemas.openxmlformats.org/drawingml/2006/main" xmlns:p="http://schemas.openxmlformats.org/presentationml/2006/main" xmlns:r="http://schemas.openxmlformats.org/officeDocument/2006/relationships">
+<p:notes xmlns:a="http://schemas.openxmlformats.org/drawingml/2006/main" xmlns:r="http://schemas.openxmlformats.org/officeDocument/2006/relationships" xmlns:p="http://schemas.openxmlformats.org/presentationml/2006/main">
   <p:cSld>
     <p:spTree>
       <p:nvGrpSpPr>
@@ -633,7 +431,7 @@
         <p:nvSpPr>
           <p:cNvPr id="2" name="Slide Image Placeholder 1"/>
           <p:cNvSpPr>
-            <a:spLocks noGrp="1"/>
+            <a:spLocks noGrp="1" noRot="1" noChangeAspect="1"/>
           </p:cNvSpPr>
           <p:nvPr>
             <p:ph type="sldImg" idx="2"/>
@@ -648,14 +446,16 @@
             <a:spLocks noGrp="1"/>
           </p:cNvSpPr>
           <p:nvPr>
-            <p:ph type="body" idx="3" sz="quarter"/>
+            <p:ph type="body" sz="quarter" idx="3"/>
           </p:nvPr>
         </p:nvSpPr>
         <p:spPr/>
         <p:txBody>
           <a:bodyPr/>
           <a:lstStyle/>
-          <a:p/>
+          <a:p>
+            <a:endParaRPr/>
+          </a:p>
         </p:txBody>
       </p:sp>
       <p:sp>
@@ -665,7 +465,7 @@
             <a:spLocks noGrp="1"/>
           </p:cNvSpPr>
           <p:nvPr>
-            <p:ph type="sldNum" idx="5" sz="quarter"/>
+            <p:ph type="sldNum" sz="quarter" idx="5"/>
           </p:nvPr>
         </p:nvSpPr>
         <p:spPr/>
@@ -679,7 +479,7 @@
 </file>
 
 <file path=ppt/notesSlides/notesSlide12.xml><?xml version="1.0" encoding="utf-8"?>
-<p:notes xmlns:a="http://schemas.openxmlformats.org/drawingml/2006/main" xmlns:p="http://schemas.openxmlformats.org/presentationml/2006/main" xmlns:r="http://schemas.openxmlformats.org/officeDocument/2006/relationships">
+<p:notes xmlns:a="http://schemas.openxmlformats.org/drawingml/2006/main" xmlns:r="http://schemas.openxmlformats.org/officeDocument/2006/relationships" xmlns:p="http://schemas.openxmlformats.org/presentationml/2006/main">
   <p:cSld>
     <p:spTree>
       <p:nvGrpSpPr>
@@ -699,7 +499,7 @@
         <p:nvSpPr>
           <p:cNvPr id="2" name="Slide Image Placeholder 1"/>
           <p:cNvSpPr>
-            <a:spLocks noGrp="1"/>
+            <a:spLocks noGrp="1" noRot="1" noChangeAspect="1"/>
           </p:cNvSpPr>
           <p:nvPr>
             <p:ph type="sldImg" idx="2"/>
@@ -714,14 +514,16 @@
             <a:spLocks noGrp="1"/>
           </p:cNvSpPr>
           <p:nvPr>
-            <p:ph type="body" idx="3" sz="quarter"/>
+            <p:ph type="body" sz="quarter" idx="3"/>
           </p:nvPr>
         </p:nvSpPr>
         <p:spPr/>
         <p:txBody>
           <a:bodyPr/>
           <a:lstStyle/>
-          <a:p/>
+          <a:p>
+            <a:endParaRPr/>
+          </a:p>
         </p:txBody>
       </p:sp>
       <p:sp>
@@ -731,7 +533,7 @@
             <a:spLocks noGrp="1"/>
           </p:cNvSpPr>
           <p:nvPr>
-            <p:ph type="sldNum" idx="5" sz="quarter"/>
+            <p:ph type="sldNum" sz="quarter" idx="5"/>
           </p:nvPr>
         </p:nvSpPr>
         <p:spPr/>
@@ -745,7 +547,7 @@
 </file>
 
 <file path=ppt/notesSlides/notesSlide13.xml><?xml version="1.0" encoding="utf-8"?>
-<p:notes xmlns:a="http://schemas.openxmlformats.org/drawingml/2006/main" xmlns:p="http://schemas.openxmlformats.org/presentationml/2006/main" xmlns:r="http://schemas.openxmlformats.org/officeDocument/2006/relationships">
+<p:notes xmlns:a="http://schemas.openxmlformats.org/drawingml/2006/main" xmlns:r="http://schemas.openxmlformats.org/officeDocument/2006/relationships" xmlns:p="http://schemas.openxmlformats.org/presentationml/2006/main">
   <p:cSld>
     <p:spTree>
       <p:nvGrpSpPr>
@@ -765,7 +567,7 @@
         <p:nvSpPr>
           <p:cNvPr id="2" name="Slide Image Placeholder 1"/>
           <p:cNvSpPr>
-            <a:spLocks noGrp="1"/>
+            <a:spLocks noGrp="1" noRot="1" noChangeAspect="1"/>
           </p:cNvSpPr>
           <p:nvPr>
             <p:ph type="sldImg" idx="2"/>
@@ -780,14 +582,16 @@
             <a:spLocks noGrp="1"/>
           </p:cNvSpPr>
           <p:nvPr>
-            <p:ph type="body" idx="3" sz="quarter"/>
+            <p:ph type="body" sz="quarter" idx="3"/>
           </p:nvPr>
         </p:nvSpPr>
         <p:spPr/>
         <p:txBody>
           <a:bodyPr/>
           <a:lstStyle/>
-          <a:p/>
+          <a:p>
+            <a:endParaRPr/>
+          </a:p>
         </p:txBody>
       </p:sp>
       <p:sp>
@@ -797,7 +601,7 @@
             <a:spLocks noGrp="1"/>
           </p:cNvSpPr>
           <p:nvPr>
-            <p:ph type="sldNum" idx="5" sz="quarter"/>
+            <p:ph type="sldNum" sz="quarter" idx="5"/>
           </p:nvPr>
         </p:nvSpPr>
         <p:spPr/>
@@ -811,7 +615,7 @@
 </file>
 
 <file path=ppt/notesSlides/notesSlide14.xml><?xml version="1.0" encoding="utf-8"?>
-<p:notes xmlns:a="http://schemas.openxmlformats.org/drawingml/2006/main" xmlns:p="http://schemas.openxmlformats.org/presentationml/2006/main" xmlns:r="http://schemas.openxmlformats.org/officeDocument/2006/relationships">
+<p:notes xmlns:a="http://schemas.openxmlformats.org/drawingml/2006/main" xmlns:r="http://schemas.openxmlformats.org/officeDocument/2006/relationships" xmlns:p="http://schemas.openxmlformats.org/presentationml/2006/main">
   <p:cSld>
     <p:spTree>
       <p:nvGrpSpPr>
@@ -831,7 +635,7 @@
         <p:nvSpPr>
           <p:cNvPr id="2" name="Slide Image Placeholder 1"/>
           <p:cNvSpPr>
-            <a:spLocks noGrp="1"/>
+            <a:spLocks noGrp="1" noRot="1" noChangeAspect="1"/>
           </p:cNvSpPr>
           <p:nvPr>
             <p:ph type="sldImg" idx="2"/>
@@ -846,14 +650,16 @@
             <a:spLocks noGrp="1"/>
           </p:cNvSpPr>
           <p:nvPr>
-            <p:ph type="body" idx="3" sz="quarter"/>
+            <p:ph type="body" sz="quarter" idx="3"/>
           </p:nvPr>
         </p:nvSpPr>
         <p:spPr/>
         <p:txBody>
           <a:bodyPr/>
           <a:lstStyle/>
-          <a:p/>
+          <a:p>
+            <a:endParaRPr/>
+          </a:p>
         </p:txBody>
       </p:sp>
       <p:sp>
@@ -863,7 +669,7 @@
             <a:spLocks noGrp="1"/>
           </p:cNvSpPr>
           <p:nvPr>
-            <p:ph type="sldNum" idx="5" sz="quarter"/>
+            <p:ph type="sldNum" sz="quarter" idx="5"/>
           </p:nvPr>
         </p:nvSpPr>
         <p:spPr/>
@@ -877,7 +683,7 @@
 </file>
 
 <file path=ppt/notesSlides/notesSlide15.xml><?xml version="1.0" encoding="utf-8"?>
-<p:notes xmlns:a="http://schemas.openxmlformats.org/drawingml/2006/main" xmlns:p="http://schemas.openxmlformats.org/presentationml/2006/main" xmlns:r="http://schemas.openxmlformats.org/officeDocument/2006/relationships">
+<p:notes xmlns:a="http://schemas.openxmlformats.org/drawingml/2006/main" xmlns:r="http://schemas.openxmlformats.org/officeDocument/2006/relationships" xmlns:p="http://schemas.openxmlformats.org/presentationml/2006/main">
   <p:cSld>
     <p:spTree>
       <p:nvGrpSpPr>
@@ -897,7 +703,7 @@
         <p:nvSpPr>
           <p:cNvPr id="2" name="Slide Image Placeholder 1"/>
           <p:cNvSpPr>
-            <a:spLocks noGrp="1"/>
+            <a:spLocks noGrp="1" noRot="1" noChangeAspect="1"/>
           </p:cNvSpPr>
           <p:nvPr>
             <p:ph type="sldImg" idx="2"/>
@@ -912,14 +718,16 @@
             <a:spLocks noGrp="1"/>
           </p:cNvSpPr>
           <p:nvPr>
-            <p:ph type="body" idx="3" sz="quarter"/>
+            <p:ph type="body" sz="quarter" idx="3"/>
           </p:nvPr>
         </p:nvSpPr>
         <p:spPr/>
         <p:txBody>
           <a:bodyPr/>
           <a:lstStyle/>
-          <a:p/>
+          <a:p>
+            <a:endParaRPr/>
+          </a:p>
         </p:txBody>
       </p:sp>
       <p:sp>
@@ -929,7 +737,7 @@
             <a:spLocks noGrp="1"/>
           </p:cNvSpPr>
           <p:nvPr>
-            <p:ph type="sldNum" idx="5" sz="quarter"/>
+            <p:ph type="sldNum" sz="quarter" idx="5"/>
           </p:nvPr>
         </p:nvSpPr>
         <p:spPr/>
@@ -943,7 +751,7 @@
 </file>
 
 <file path=ppt/notesSlides/notesSlide16.xml><?xml version="1.0" encoding="utf-8"?>
-<p:notes xmlns:a="http://schemas.openxmlformats.org/drawingml/2006/main" xmlns:p="http://schemas.openxmlformats.org/presentationml/2006/main" xmlns:r="http://schemas.openxmlformats.org/officeDocument/2006/relationships">
+<p:notes xmlns:a="http://schemas.openxmlformats.org/drawingml/2006/main" xmlns:r="http://schemas.openxmlformats.org/officeDocument/2006/relationships" xmlns:p="http://schemas.openxmlformats.org/presentationml/2006/main">
   <p:cSld>
     <p:spTree>
       <p:nvGrpSpPr>
@@ -963,7 +771,7 @@
         <p:nvSpPr>
           <p:cNvPr id="2" name="Slide Image Placeholder 1"/>
           <p:cNvSpPr>
-            <a:spLocks noGrp="1"/>
+            <a:spLocks noGrp="1" noRot="1" noChangeAspect="1"/>
           </p:cNvSpPr>
           <p:nvPr>
             <p:ph type="sldImg" idx="2"/>
@@ -978,14 +786,16 @@
             <a:spLocks noGrp="1"/>
           </p:cNvSpPr>
           <p:nvPr>
-            <p:ph type="body" idx="3" sz="quarter"/>
+            <p:ph type="body" sz="quarter" idx="3"/>
           </p:nvPr>
         </p:nvSpPr>
         <p:spPr/>
         <p:txBody>
           <a:bodyPr/>
           <a:lstStyle/>
-          <a:p/>
+          <a:p>
+            <a:endParaRPr/>
+          </a:p>
         </p:txBody>
       </p:sp>
       <p:sp>
@@ -995,7 +805,7 @@
             <a:spLocks noGrp="1"/>
           </p:cNvSpPr>
           <p:nvPr>
-            <p:ph type="sldNum" idx="5" sz="quarter"/>
+            <p:ph type="sldNum" sz="quarter" idx="5"/>
           </p:nvPr>
         </p:nvSpPr>
         <p:spPr/>
@@ -1009,7 +819,7 @@
 </file>
 
 <file path=ppt/notesSlides/notesSlide17.xml><?xml version="1.0" encoding="utf-8"?>
-<p:notes xmlns:a="http://schemas.openxmlformats.org/drawingml/2006/main" xmlns:p="http://schemas.openxmlformats.org/presentationml/2006/main" xmlns:r="http://schemas.openxmlformats.org/officeDocument/2006/relationships">
+<p:notes xmlns:a="http://schemas.openxmlformats.org/drawingml/2006/main" xmlns:r="http://schemas.openxmlformats.org/officeDocument/2006/relationships" xmlns:p="http://schemas.openxmlformats.org/presentationml/2006/main">
   <p:cSld>
     <p:spTree>
       <p:nvGrpSpPr>
@@ -1029,7 +839,7 @@
         <p:nvSpPr>
           <p:cNvPr id="2" name="Slide Image Placeholder 1"/>
           <p:cNvSpPr>
-            <a:spLocks noGrp="1"/>
+            <a:spLocks noGrp="1" noRot="1" noChangeAspect="1"/>
           </p:cNvSpPr>
           <p:nvPr>
             <p:ph type="sldImg" idx="2"/>
@@ -1044,14 +854,16 @@
             <a:spLocks noGrp="1"/>
           </p:cNvSpPr>
           <p:nvPr>
-            <p:ph type="body" idx="3" sz="quarter"/>
+            <p:ph type="body" sz="quarter" idx="3"/>
           </p:nvPr>
         </p:nvSpPr>
         <p:spPr/>
         <p:txBody>
           <a:bodyPr/>
           <a:lstStyle/>
-          <a:p/>
+          <a:p>
+            <a:endParaRPr/>
+          </a:p>
         </p:txBody>
       </p:sp>
       <p:sp>
@@ -1061,7 +873,7 @@
             <a:spLocks noGrp="1"/>
           </p:cNvSpPr>
           <p:nvPr>
-            <p:ph type="sldNum" idx="5" sz="quarter"/>
+            <p:ph type="sldNum" sz="quarter" idx="5"/>
           </p:nvPr>
         </p:nvSpPr>
         <p:spPr/>
@@ -1075,7 +887,7 @@
 </file>
 
 <file path=ppt/notesSlides/notesSlide18.xml><?xml version="1.0" encoding="utf-8"?>
-<p:notes xmlns:a="http://schemas.openxmlformats.org/drawingml/2006/main" xmlns:p="http://schemas.openxmlformats.org/presentationml/2006/main" xmlns:r="http://schemas.openxmlformats.org/officeDocument/2006/relationships">
+<p:notes xmlns:a="http://schemas.openxmlformats.org/drawingml/2006/main" xmlns:r="http://schemas.openxmlformats.org/officeDocument/2006/relationships" xmlns:p="http://schemas.openxmlformats.org/presentationml/2006/main">
   <p:cSld>
     <p:spTree>
       <p:nvGrpSpPr>
@@ -1095,7 +907,7 @@
         <p:nvSpPr>
           <p:cNvPr id="2" name="Slide Image Placeholder 1"/>
           <p:cNvSpPr>
-            <a:spLocks noGrp="1"/>
+            <a:spLocks noGrp="1" noRot="1" noChangeAspect="1"/>
           </p:cNvSpPr>
           <p:nvPr>
             <p:ph type="sldImg" idx="2"/>
@@ -1110,14 +922,16 @@
             <a:spLocks noGrp="1"/>
           </p:cNvSpPr>
           <p:nvPr>
-            <p:ph type="body" idx="3" sz="quarter"/>
+            <p:ph type="body" sz="quarter" idx="3"/>
           </p:nvPr>
         </p:nvSpPr>
         <p:spPr/>
         <p:txBody>
           <a:bodyPr/>
           <a:lstStyle/>
-          <a:p/>
+          <a:p>
+            <a:endParaRPr/>
+          </a:p>
         </p:txBody>
       </p:sp>
       <p:sp>
@@ -1127,7 +941,7 @@
             <a:spLocks noGrp="1"/>
           </p:cNvSpPr>
           <p:nvPr>
-            <p:ph type="sldNum" idx="5" sz="quarter"/>
+            <p:ph type="sldNum" sz="quarter" idx="5"/>
           </p:nvPr>
         </p:nvSpPr>
         <p:spPr/>
@@ -1141,7 +955,7 @@
 </file>
 
 <file path=ppt/notesSlides/notesSlide19.xml><?xml version="1.0" encoding="utf-8"?>
-<p:notes xmlns:a="http://schemas.openxmlformats.org/drawingml/2006/main" xmlns:p="http://schemas.openxmlformats.org/presentationml/2006/main" xmlns:r="http://schemas.openxmlformats.org/officeDocument/2006/relationships">
+<p:notes xmlns:a="http://schemas.openxmlformats.org/drawingml/2006/main" xmlns:r="http://schemas.openxmlformats.org/officeDocument/2006/relationships" xmlns:p="http://schemas.openxmlformats.org/presentationml/2006/main">
   <p:cSld>
     <p:spTree>
       <p:nvGrpSpPr>
@@ -1161,7 +975,7 @@
         <p:nvSpPr>
           <p:cNvPr id="2" name="Slide Image Placeholder 1"/>
           <p:cNvSpPr>
-            <a:spLocks noGrp="1"/>
+            <a:spLocks noGrp="1" noRot="1" noChangeAspect="1"/>
           </p:cNvSpPr>
           <p:nvPr>
             <p:ph type="sldImg" idx="2"/>
@@ -1176,14 +990,16 @@
             <a:spLocks noGrp="1"/>
           </p:cNvSpPr>
           <p:nvPr>
-            <p:ph type="body" idx="3" sz="quarter"/>
+            <p:ph type="body" sz="quarter" idx="3"/>
           </p:nvPr>
         </p:nvSpPr>
         <p:spPr/>
         <p:txBody>
           <a:bodyPr/>
           <a:lstStyle/>
-          <a:p/>
+          <a:p>
+            <a:endParaRPr/>
+          </a:p>
         </p:txBody>
       </p:sp>
       <p:sp>
@@ -1193,7 +1009,7 @@
             <a:spLocks noGrp="1"/>
           </p:cNvSpPr>
           <p:nvPr>
-            <p:ph type="sldNum" idx="5" sz="quarter"/>
+            <p:ph type="sldNum" sz="quarter" idx="5"/>
           </p:nvPr>
         </p:nvSpPr>
         <p:spPr/>
@@ -1207,7 +1023,7 @@
 </file>
 
 <file path=ppt/notesSlides/notesSlide2.xml><?xml version="1.0" encoding="utf-8"?>
-<p:notes xmlns:a="http://schemas.openxmlformats.org/drawingml/2006/main" xmlns:p="http://schemas.openxmlformats.org/presentationml/2006/main" xmlns:r="http://schemas.openxmlformats.org/officeDocument/2006/relationships">
+<p:notes xmlns:a="http://schemas.openxmlformats.org/drawingml/2006/main" xmlns:r="http://schemas.openxmlformats.org/officeDocument/2006/relationships" xmlns:p="http://schemas.openxmlformats.org/presentationml/2006/main">
   <p:cSld>
     <p:spTree>
       <p:nvGrpSpPr>
@@ -1227,7 +1043,7 @@
         <p:nvSpPr>
           <p:cNvPr id="2" name="Slide Image Placeholder 1"/>
           <p:cNvSpPr>
-            <a:spLocks noGrp="1"/>
+            <a:spLocks noGrp="1" noRot="1" noChangeAspect="1"/>
           </p:cNvSpPr>
           <p:nvPr>
             <p:ph type="sldImg" idx="2"/>
@@ -1242,14 +1058,16 @@
             <a:spLocks noGrp="1"/>
           </p:cNvSpPr>
           <p:nvPr>
-            <p:ph type="body" idx="3" sz="quarter"/>
+            <p:ph type="body" sz="quarter" idx="3"/>
           </p:nvPr>
         </p:nvSpPr>
         <p:spPr/>
         <p:txBody>
           <a:bodyPr/>
           <a:lstStyle/>
-          <a:p/>
+          <a:p>
+            <a:endParaRPr/>
+          </a:p>
         </p:txBody>
       </p:sp>
       <p:sp>
@@ -1259,7 +1077,7 @@
             <a:spLocks noGrp="1"/>
           </p:cNvSpPr>
           <p:nvPr>
-            <p:ph type="sldNum" idx="5" sz="quarter"/>
+            <p:ph type="sldNum" sz="quarter" idx="5"/>
           </p:nvPr>
         </p:nvSpPr>
         <p:spPr/>
@@ -1273,7 +1091,7 @@
 </file>
 
 <file path=ppt/notesSlides/notesSlide20.xml><?xml version="1.0" encoding="utf-8"?>
-<p:notes xmlns:a="http://schemas.openxmlformats.org/drawingml/2006/main" xmlns:p="http://schemas.openxmlformats.org/presentationml/2006/main" xmlns:r="http://schemas.openxmlformats.org/officeDocument/2006/relationships">
+<p:notes xmlns:a="http://schemas.openxmlformats.org/drawingml/2006/main" xmlns:r="http://schemas.openxmlformats.org/officeDocument/2006/relationships" xmlns:p="http://schemas.openxmlformats.org/presentationml/2006/main">
   <p:cSld>
     <p:spTree>
       <p:nvGrpSpPr>
@@ -1293,7 +1111,7 @@
         <p:nvSpPr>
           <p:cNvPr id="2" name="Slide Image Placeholder 1"/>
           <p:cNvSpPr>
-            <a:spLocks noGrp="1"/>
+            <a:spLocks noGrp="1" noRot="1" noChangeAspect="1"/>
           </p:cNvSpPr>
           <p:nvPr>
             <p:ph type="sldImg" idx="2"/>
@@ -1308,14 +1126,16 @@
             <a:spLocks noGrp="1"/>
           </p:cNvSpPr>
           <p:nvPr>
-            <p:ph type="body" idx="3" sz="quarter"/>
+            <p:ph type="body" sz="quarter" idx="3"/>
           </p:nvPr>
         </p:nvSpPr>
         <p:spPr/>
         <p:txBody>
           <a:bodyPr/>
           <a:lstStyle/>
-          <a:p/>
+          <a:p>
+            <a:endParaRPr/>
+          </a:p>
         </p:txBody>
       </p:sp>
       <p:sp>
@@ -1325,7 +1145,7 @@
             <a:spLocks noGrp="1"/>
           </p:cNvSpPr>
           <p:nvPr>
-            <p:ph type="sldNum" idx="5" sz="quarter"/>
+            <p:ph type="sldNum" sz="quarter" idx="5"/>
           </p:nvPr>
         </p:nvSpPr>
         <p:spPr/>
@@ -1339,7 +1159,7 @@
 </file>
 
 <file path=ppt/notesSlides/notesSlide21.xml><?xml version="1.0" encoding="utf-8"?>
-<p:notes xmlns:a="http://schemas.openxmlformats.org/drawingml/2006/main" xmlns:p="http://schemas.openxmlformats.org/presentationml/2006/main" xmlns:r="http://schemas.openxmlformats.org/officeDocument/2006/relationships">
+<p:notes xmlns:a="http://schemas.openxmlformats.org/drawingml/2006/main" xmlns:r="http://schemas.openxmlformats.org/officeDocument/2006/relationships" xmlns:p="http://schemas.openxmlformats.org/presentationml/2006/main">
   <p:cSld>
     <p:spTree>
       <p:nvGrpSpPr>
@@ -1359,7 +1179,7 @@
         <p:nvSpPr>
           <p:cNvPr id="2" name="Slide Image Placeholder 1"/>
           <p:cNvSpPr>
-            <a:spLocks noGrp="1"/>
+            <a:spLocks noGrp="1" noRot="1" noChangeAspect="1"/>
           </p:cNvSpPr>
           <p:nvPr>
             <p:ph type="sldImg" idx="2"/>
@@ -1374,14 +1194,16 @@
             <a:spLocks noGrp="1"/>
           </p:cNvSpPr>
           <p:nvPr>
-            <p:ph type="body" idx="3" sz="quarter"/>
+            <p:ph type="body" sz="quarter" idx="3"/>
           </p:nvPr>
         </p:nvSpPr>
         <p:spPr/>
         <p:txBody>
           <a:bodyPr/>
           <a:lstStyle/>
-          <a:p/>
+          <a:p>
+            <a:endParaRPr/>
+          </a:p>
         </p:txBody>
       </p:sp>
       <p:sp>
@@ -1391,7 +1213,7 @@
             <a:spLocks noGrp="1"/>
           </p:cNvSpPr>
           <p:nvPr>
-            <p:ph type="sldNum" idx="5" sz="quarter"/>
+            <p:ph type="sldNum" sz="quarter" idx="5"/>
           </p:nvPr>
         </p:nvSpPr>
         <p:spPr/>
@@ -1405,7 +1227,7 @@
 </file>
 
 <file path=ppt/notesSlides/notesSlide22.xml><?xml version="1.0" encoding="utf-8"?>
-<p:notes xmlns:a="http://schemas.openxmlformats.org/drawingml/2006/main" xmlns:p="http://schemas.openxmlformats.org/presentationml/2006/main" xmlns:r="http://schemas.openxmlformats.org/officeDocument/2006/relationships">
+<p:notes xmlns:a="http://schemas.openxmlformats.org/drawingml/2006/main" xmlns:r="http://schemas.openxmlformats.org/officeDocument/2006/relationships" xmlns:p="http://schemas.openxmlformats.org/presentationml/2006/main">
   <p:cSld>
     <p:spTree>
       <p:nvGrpSpPr>
@@ -1425,7 +1247,7 @@
         <p:nvSpPr>
           <p:cNvPr id="2" name="Slide Image Placeholder 1"/>
           <p:cNvSpPr>
-            <a:spLocks noGrp="1"/>
+            <a:spLocks noGrp="1" noRot="1" noChangeAspect="1"/>
           </p:cNvSpPr>
           <p:nvPr>
             <p:ph type="sldImg" idx="2"/>
@@ -1440,14 +1262,16 @@
             <a:spLocks noGrp="1"/>
           </p:cNvSpPr>
           <p:nvPr>
-            <p:ph type="body" idx="3" sz="quarter"/>
+            <p:ph type="body" sz="quarter" idx="3"/>
           </p:nvPr>
         </p:nvSpPr>
         <p:spPr/>
         <p:txBody>
           <a:bodyPr/>
           <a:lstStyle/>
-          <a:p/>
+          <a:p>
+            <a:endParaRPr/>
+          </a:p>
         </p:txBody>
       </p:sp>
       <p:sp>
@@ -1457,7 +1281,7 @@
             <a:spLocks noGrp="1"/>
           </p:cNvSpPr>
           <p:nvPr>
-            <p:ph type="sldNum" idx="5" sz="quarter"/>
+            <p:ph type="sldNum" sz="quarter" idx="5"/>
           </p:nvPr>
         </p:nvSpPr>
         <p:spPr/>
@@ -1471,7 +1295,7 @@
 </file>
 
 <file path=ppt/notesSlides/notesSlide23.xml><?xml version="1.0" encoding="utf-8"?>
-<p:notes xmlns:a="http://schemas.openxmlformats.org/drawingml/2006/main" xmlns:p="http://schemas.openxmlformats.org/presentationml/2006/main" xmlns:r="http://schemas.openxmlformats.org/officeDocument/2006/relationships">
+<p:notes xmlns:a="http://schemas.openxmlformats.org/drawingml/2006/main" xmlns:r="http://schemas.openxmlformats.org/officeDocument/2006/relationships" xmlns:p="http://schemas.openxmlformats.org/presentationml/2006/main">
   <p:cSld>
     <p:spTree>
       <p:nvGrpSpPr>
@@ -1491,7 +1315,7 @@
         <p:nvSpPr>
           <p:cNvPr id="2" name="Slide Image Placeholder 1"/>
           <p:cNvSpPr>
-            <a:spLocks noGrp="1"/>
+            <a:spLocks noGrp="1" noRot="1" noChangeAspect="1"/>
           </p:cNvSpPr>
           <p:nvPr>
             <p:ph type="sldImg" idx="2"/>
@@ -1506,14 +1330,16 @@
             <a:spLocks noGrp="1"/>
           </p:cNvSpPr>
           <p:nvPr>
-            <p:ph type="body" idx="3" sz="quarter"/>
+            <p:ph type="body" sz="quarter" idx="3"/>
           </p:nvPr>
         </p:nvSpPr>
         <p:spPr/>
         <p:txBody>
           <a:bodyPr/>
           <a:lstStyle/>
-          <a:p/>
+          <a:p>
+            <a:endParaRPr/>
+          </a:p>
         </p:txBody>
       </p:sp>
       <p:sp>
@@ -1523,7 +1349,7 @@
             <a:spLocks noGrp="1"/>
           </p:cNvSpPr>
           <p:nvPr>
-            <p:ph type="sldNum" idx="5" sz="quarter"/>
+            <p:ph type="sldNum" sz="quarter" idx="5"/>
           </p:nvPr>
         </p:nvSpPr>
         <p:spPr/>
@@ -1537,7 +1363,7 @@
 </file>
 
 <file path=ppt/notesSlides/notesSlide24.xml><?xml version="1.0" encoding="utf-8"?>
-<p:notes xmlns:a="http://schemas.openxmlformats.org/drawingml/2006/main" xmlns:p="http://schemas.openxmlformats.org/presentationml/2006/main" xmlns:r="http://schemas.openxmlformats.org/officeDocument/2006/relationships">
+<p:notes xmlns:a="http://schemas.openxmlformats.org/drawingml/2006/main" xmlns:r="http://schemas.openxmlformats.org/officeDocument/2006/relationships" xmlns:p="http://schemas.openxmlformats.org/presentationml/2006/main">
   <p:cSld>
     <p:spTree>
       <p:nvGrpSpPr>
@@ -1557,7 +1383,7 @@
         <p:nvSpPr>
           <p:cNvPr id="2" name="Slide Image Placeholder 1"/>
           <p:cNvSpPr>
-            <a:spLocks noGrp="1"/>
+            <a:spLocks noGrp="1" noRot="1" noChangeAspect="1"/>
           </p:cNvSpPr>
           <p:nvPr>
             <p:ph type="sldImg" idx="2"/>
@@ -1572,14 +1398,16 @@
             <a:spLocks noGrp="1"/>
           </p:cNvSpPr>
           <p:nvPr>
-            <p:ph type="body" idx="3" sz="quarter"/>
+            <p:ph type="body" sz="quarter" idx="3"/>
           </p:nvPr>
         </p:nvSpPr>
         <p:spPr/>
         <p:txBody>
           <a:bodyPr/>
           <a:lstStyle/>
-          <a:p/>
+          <a:p>
+            <a:endParaRPr/>
+          </a:p>
         </p:txBody>
       </p:sp>
       <p:sp>
@@ -1589,7 +1417,7 @@
             <a:spLocks noGrp="1"/>
           </p:cNvSpPr>
           <p:nvPr>
-            <p:ph type="sldNum" idx="5" sz="quarter"/>
+            <p:ph type="sldNum" sz="quarter" idx="5"/>
           </p:nvPr>
         </p:nvSpPr>
         <p:spPr/>
@@ -1603,7 +1431,7 @@
 </file>
 
 <file path=ppt/notesSlides/notesSlide3.xml><?xml version="1.0" encoding="utf-8"?>
-<p:notes xmlns:a="http://schemas.openxmlformats.org/drawingml/2006/main" xmlns:p="http://schemas.openxmlformats.org/presentationml/2006/main" xmlns:r="http://schemas.openxmlformats.org/officeDocument/2006/relationships">
+<p:notes xmlns:a="http://schemas.openxmlformats.org/drawingml/2006/main" xmlns:r="http://schemas.openxmlformats.org/officeDocument/2006/relationships" xmlns:p="http://schemas.openxmlformats.org/presentationml/2006/main">
   <p:cSld>
     <p:spTree>
       <p:nvGrpSpPr>
@@ -1623,7 +1451,7 @@
         <p:nvSpPr>
           <p:cNvPr id="2" name="Slide Image Placeholder 1"/>
           <p:cNvSpPr>
-            <a:spLocks noGrp="1"/>
+            <a:spLocks noGrp="1" noRot="1" noChangeAspect="1"/>
           </p:cNvSpPr>
           <p:nvPr>
             <p:ph type="sldImg" idx="2"/>
@@ -1638,14 +1466,16 @@
             <a:spLocks noGrp="1"/>
           </p:cNvSpPr>
           <p:nvPr>
-            <p:ph type="body" idx="3" sz="quarter"/>
+            <p:ph type="body" sz="quarter" idx="3"/>
           </p:nvPr>
         </p:nvSpPr>
         <p:spPr/>
         <p:txBody>
           <a:bodyPr/>
           <a:lstStyle/>
-          <a:p/>
+          <a:p>
+            <a:endParaRPr/>
+          </a:p>
         </p:txBody>
       </p:sp>
       <p:sp>
@@ -1655,7 +1485,7 @@
             <a:spLocks noGrp="1"/>
           </p:cNvSpPr>
           <p:nvPr>
-            <p:ph type="sldNum" idx="5" sz="quarter"/>
+            <p:ph type="sldNum" sz="quarter" idx="5"/>
           </p:nvPr>
         </p:nvSpPr>
         <p:spPr/>
@@ -1669,7 +1499,7 @@
 </file>
 
 <file path=ppt/notesSlides/notesSlide4.xml><?xml version="1.0" encoding="utf-8"?>
-<p:notes xmlns:a="http://schemas.openxmlformats.org/drawingml/2006/main" xmlns:p="http://schemas.openxmlformats.org/presentationml/2006/main" xmlns:r="http://schemas.openxmlformats.org/officeDocument/2006/relationships">
+<p:notes xmlns:a="http://schemas.openxmlformats.org/drawingml/2006/main" xmlns:r="http://schemas.openxmlformats.org/officeDocument/2006/relationships" xmlns:p="http://schemas.openxmlformats.org/presentationml/2006/main">
   <p:cSld>
     <p:spTree>
       <p:nvGrpSpPr>
@@ -1689,7 +1519,7 @@
         <p:nvSpPr>
           <p:cNvPr id="2" name="Slide Image Placeholder 1"/>
           <p:cNvSpPr>
-            <a:spLocks noGrp="1"/>
+            <a:spLocks noGrp="1" noRot="1" noChangeAspect="1"/>
           </p:cNvSpPr>
           <p:nvPr>
             <p:ph type="sldImg" idx="2"/>
@@ -1704,14 +1534,16 @@
             <a:spLocks noGrp="1"/>
           </p:cNvSpPr>
           <p:nvPr>
-            <p:ph type="body" idx="3" sz="quarter"/>
+            <p:ph type="body" sz="quarter" idx="3"/>
           </p:nvPr>
         </p:nvSpPr>
         <p:spPr/>
         <p:txBody>
           <a:bodyPr/>
           <a:lstStyle/>
-          <a:p/>
+          <a:p>
+            <a:endParaRPr/>
+          </a:p>
         </p:txBody>
       </p:sp>
       <p:sp>
@@ -1721,7 +1553,7 @@
             <a:spLocks noGrp="1"/>
           </p:cNvSpPr>
           <p:nvPr>
-            <p:ph type="sldNum" idx="5" sz="quarter"/>
+            <p:ph type="sldNum" sz="quarter" idx="5"/>
           </p:nvPr>
         </p:nvSpPr>
         <p:spPr/>
@@ -1735,7 +1567,7 @@
 </file>
 
 <file path=ppt/notesSlides/notesSlide5.xml><?xml version="1.0" encoding="utf-8"?>
-<p:notes xmlns:a="http://schemas.openxmlformats.org/drawingml/2006/main" xmlns:p="http://schemas.openxmlformats.org/presentationml/2006/main" xmlns:r="http://schemas.openxmlformats.org/officeDocument/2006/relationships">
+<p:notes xmlns:a="http://schemas.openxmlformats.org/drawingml/2006/main" xmlns:r="http://schemas.openxmlformats.org/officeDocument/2006/relationships" xmlns:p="http://schemas.openxmlformats.org/presentationml/2006/main">
   <p:cSld>
     <p:spTree>
       <p:nvGrpSpPr>
@@ -1755,7 +1587,7 @@
         <p:nvSpPr>
           <p:cNvPr id="2" name="Slide Image Placeholder 1"/>
           <p:cNvSpPr>
-            <a:spLocks noGrp="1"/>
+            <a:spLocks noGrp="1" noRot="1" noChangeAspect="1"/>
           </p:cNvSpPr>
           <p:nvPr>
             <p:ph type="sldImg" idx="2"/>
@@ -1770,14 +1602,16 @@
             <a:spLocks noGrp="1"/>
           </p:cNvSpPr>
           <p:nvPr>
-            <p:ph type="body" idx="3" sz="quarter"/>
+            <p:ph type="body" sz="quarter" idx="3"/>
           </p:nvPr>
         </p:nvSpPr>
         <p:spPr/>
         <p:txBody>
           <a:bodyPr/>
           <a:lstStyle/>
-          <a:p/>
+          <a:p>
+            <a:endParaRPr/>
+          </a:p>
         </p:txBody>
       </p:sp>
       <p:sp>
@@ -1787,7 +1621,7 @@
             <a:spLocks noGrp="1"/>
           </p:cNvSpPr>
           <p:nvPr>
-            <p:ph type="sldNum" idx="5" sz="quarter"/>
+            <p:ph type="sldNum" sz="quarter" idx="5"/>
           </p:nvPr>
         </p:nvSpPr>
         <p:spPr/>
@@ -1801,7 +1635,7 @@
 </file>
 
 <file path=ppt/notesSlides/notesSlide6.xml><?xml version="1.0" encoding="utf-8"?>
-<p:notes xmlns:a="http://schemas.openxmlformats.org/drawingml/2006/main" xmlns:p="http://schemas.openxmlformats.org/presentationml/2006/main" xmlns:r="http://schemas.openxmlformats.org/officeDocument/2006/relationships">
+<p:notes xmlns:a="http://schemas.openxmlformats.org/drawingml/2006/main" xmlns:r="http://schemas.openxmlformats.org/officeDocument/2006/relationships" xmlns:p="http://schemas.openxmlformats.org/presentationml/2006/main">
   <p:cSld>
     <p:spTree>
       <p:nvGrpSpPr>
@@ -1821,7 +1655,7 @@
         <p:nvSpPr>
           <p:cNvPr id="2" name="Slide Image Placeholder 1"/>
           <p:cNvSpPr>
-            <a:spLocks noGrp="1"/>
+            <a:spLocks noGrp="1" noRot="1" noChangeAspect="1"/>
           </p:cNvSpPr>
           <p:nvPr>
             <p:ph type="sldImg" idx="2"/>
@@ -1836,14 +1670,16 @@
             <a:spLocks noGrp="1"/>
           </p:cNvSpPr>
           <p:nvPr>
-            <p:ph type="body" idx="3" sz="quarter"/>
+            <p:ph type="body" sz="quarter" idx="3"/>
           </p:nvPr>
         </p:nvSpPr>
         <p:spPr/>
         <p:txBody>
           <a:bodyPr/>
           <a:lstStyle/>
-          <a:p/>
+          <a:p>
+            <a:endParaRPr/>
+          </a:p>
         </p:txBody>
       </p:sp>
       <p:sp>
@@ -1853,7 +1689,7 @@
             <a:spLocks noGrp="1"/>
           </p:cNvSpPr>
           <p:nvPr>
-            <p:ph type="sldNum" idx="5" sz="quarter"/>
+            <p:ph type="sldNum" sz="quarter" idx="5"/>
           </p:nvPr>
         </p:nvSpPr>
         <p:spPr/>
@@ -1867,7 +1703,7 @@
 </file>
 
 <file path=ppt/notesSlides/notesSlide7.xml><?xml version="1.0" encoding="utf-8"?>
-<p:notes xmlns:a="http://schemas.openxmlformats.org/drawingml/2006/main" xmlns:p="http://schemas.openxmlformats.org/presentationml/2006/main" xmlns:r="http://schemas.openxmlformats.org/officeDocument/2006/relationships">
+<p:notes xmlns:a="http://schemas.openxmlformats.org/drawingml/2006/main" xmlns:r="http://schemas.openxmlformats.org/officeDocument/2006/relationships" xmlns:p="http://schemas.openxmlformats.org/presentationml/2006/main">
   <p:cSld>
     <p:spTree>
       <p:nvGrpSpPr>
@@ -1887,7 +1723,7 @@
         <p:nvSpPr>
           <p:cNvPr id="2" name="Slide Image Placeholder 1"/>
           <p:cNvSpPr>
-            <a:spLocks noGrp="1"/>
+            <a:spLocks noGrp="1" noRot="1" noChangeAspect="1"/>
           </p:cNvSpPr>
           <p:nvPr>
             <p:ph type="sldImg" idx="2"/>
@@ -1902,14 +1738,16 @@
             <a:spLocks noGrp="1"/>
           </p:cNvSpPr>
           <p:nvPr>
-            <p:ph type="body" idx="3" sz="quarter"/>
+            <p:ph type="body" sz="quarter" idx="3"/>
           </p:nvPr>
         </p:nvSpPr>
         <p:spPr/>
         <p:txBody>
           <a:bodyPr/>
           <a:lstStyle/>
-          <a:p/>
+          <a:p>
+            <a:endParaRPr/>
+          </a:p>
         </p:txBody>
       </p:sp>
       <p:sp>
@@ -1919,7 +1757,7 @@
             <a:spLocks noGrp="1"/>
           </p:cNvSpPr>
           <p:nvPr>
-            <p:ph type="sldNum" idx="5" sz="quarter"/>
+            <p:ph type="sldNum" sz="quarter" idx="5"/>
           </p:nvPr>
         </p:nvSpPr>
         <p:spPr/>
@@ -1933,7 +1771,7 @@
 </file>
 
 <file path=ppt/notesSlides/notesSlide8.xml><?xml version="1.0" encoding="utf-8"?>
-<p:notes xmlns:a="http://schemas.openxmlformats.org/drawingml/2006/main" xmlns:p="http://schemas.openxmlformats.org/presentationml/2006/main" xmlns:r="http://schemas.openxmlformats.org/officeDocument/2006/relationships">
+<p:notes xmlns:a="http://schemas.openxmlformats.org/drawingml/2006/main" xmlns:r="http://schemas.openxmlformats.org/officeDocument/2006/relationships" xmlns:p="http://schemas.openxmlformats.org/presentationml/2006/main">
   <p:cSld>
     <p:spTree>
       <p:nvGrpSpPr>
@@ -1953,7 +1791,7 @@
         <p:nvSpPr>
           <p:cNvPr id="2" name="Slide Image Placeholder 1"/>
           <p:cNvSpPr>
-            <a:spLocks noGrp="1"/>
+            <a:spLocks noGrp="1" noRot="1" noChangeAspect="1"/>
           </p:cNvSpPr>
           <p:nvPr>
             <p:ph type="sldImg" idx="2"/>
@@ -1968,14 +1806,16 @@
             <a:spLocks noGrp="1"/>
           </p:cNvSpPr>
           <p:nvPr>
-            <p:ph type="body" idx="3" sz="quarter"/>
+            <p:ph type="body" sz="quarter" idx="3"/>
           </p:nvPr>
         </p:nvSpPr>
         <p:spPr/>
         <p:txBody>
           <a:bodyPr/>
           <a:lstStyle/>
-          <a:p/>
+          <a:p>
+            <a:endParaRPr/>
+          </a:p>
         </p:txBody>
       </p:sp>
       <p:sp>
@@ -1985,7 +1825,7 @@
             <a:spLocks noGrp="1"/>
           </p:cNvSpPr>
           <p:nvPr>
-            <p:ph type="sldNum" idx="5" sz="quarter"/>
+            <p:ph type="sldNum" sz="quarter" idx="5"/>
           </p:nvPr>
         </p:nvSpPr>
         <p:spPr/>
@@ -1999,7 +1839,7 @@
 </file>
 
 <file path=ppt/notesSlides/notesSlide9.xml><?xml version="1.0" encoding="utf-8"?>
-<p:notes xmlns:a="http://schemas.openxmlformats.org/drawingml/2006/main" xmlns:p="http://schemas.openxmlformats.org/presentationml/2006/main" xmlns:r="http://schemas.openxmlformats.org/officeDocument/2006/relationships">
+<p:notes xmlns:a="http://schemas.openxmlformats.org/drawingml/2006/main" xmlns:r="http://schemas.openxmlformats.org/officeDocument/2006/relationships" xmlns:p="http://schemas.openxmlformats.org/presentationml/2006/main">
   <p:cSld>
     <p:spTree>
       <p:nvGrpSpPr>
@@ -2019,7 +1859,7 @@
         <p:nvSpPr>
           <p:cNvPr id="2" name="Slide Image Placeholder 1"/>
           <p:cNvSpPr>
-            <a:spLocks noGrp="1"/>
+            <a:spLocks noGrp="1" noRot="1" noChangeAspect="1"/>
           </p:cNvSpPr>
           <p:nvPr>
             <p:ph type="sldImg" idx="2"/>
@@ -2034,14 +1874,16 @@
             <a:spLocks noGrp="1"/>
           </p:cNvSpPr>
           <p:nvPr>
-            <p:ph type="body" idx="3" sz="quarter"/>
+            <p:ph type="body" sz="quarter" idx="3"/>
           </p:nvPr>
         </p:nvSpPr>
         <p:spPr/>
         <p:txBody>
           <a:bodyPr/>
           <a:lstStyle/>
-          <a:p/>
+          <a:p>
+            <a:endParaRPr/>
+          </a:p>
         </p:txBody>
       </p:sp>
       <p:sp>
@@ -2051,7 +1893,7 @@
             <a:spLocks noGrp="1"/>
           </p:cNvSpPr>
           <p:nvPr>
-            <p:ph type="sldNum" idx="5" sz="quarter"/>
+            <p:ph type="sldNum" sz="quarter" idx="5"/>
           </p:nvPr>
         </p:nvSpPr>
         <p:spPr/>
@@ -2102,10 +1944,9 @@
           <a:lstStyle/>
           <a:p>
             <a:r>
-              <a:rPr lang="en-US" smtClean="0"/>
+              <a:rPr lang="en-US"/>
               <a:t>Click to edit Master title style</a:t>
             </a:r>
-            <a:endParaRPr lang="en-US"/>
           </a:p>
         </p:txBody>
       </p:sp>
@@ -2221,10 +2062,9 @@
           </a:lstStyle>
           <a:p>
             <a:r>
-              <a:rPr lang="en-US" smtClean="0"/>
+              <a:rPr lang="en-US"/>
               <a:t>Click to edit Master subtitle style</a:t>
             </a:r>
-            <a:endParaRPr lang="en-US"/>
           </a:p>
         </p:txBody>
       </p:sp>
@@ -2245,7 +2085,7 @@
           <a:p>
             <a:fld id="{5BCAD085-E8A6-8845-BD4E-CB4CCA059FC4}" type="datetimeFigureOut">
               <a:rPr lang="en-US" smtClean="0"/>
-              <a:t>1/27/13</a:t>
+              <a:t>5/29/2026</a:t>
             </a:fld>
             <a:endParaRPr lang="en-US"/>
           </a:p>
@@ -2339,10 +2179,9 @@
           <a:lstStyle/>
           <a:p>
             <a:r>
-              <a:rPr lang="en-US" smtClean="0"/>
+              <a:rPr lang="en-US"/>
               <a:t>Click to edit Master title style</a:t>
             </a:r>
-            <a:endParaRPr lang="en-US"/>
           </a:p>
         </p:txBody>
       </p:sp>
@@ -2363,38 +2202,37 @@
           <a:p>
             <a:pPr lvl="0"/>
             <a:r>
-              <a:rPr lang="en-US" smtClean="0"/>
+              <a:rPr lang="en-US"/>
               <a:t>Click to edit Master text styles</a:t>
             </a:r>
           </a:p>
           <a:p>
             <a:pPr lvl="1"/>
             <a:r>
-              <a:rPr lang="en-US" smtClean="0"/>
+              <a:rPr lang="en-US"/>
               <a:t>Second level</a:t>
             </a:r>
           </a:p>
           <a:p>
             <a:pPr lvl="2"/>
             <a:r>
-              <a:rPr lang="en-US" smtClean="0"/>
+              <a:rPr lang="en-US"/>
               <a:t>Third level</a:t>
             </a:r>
           </a:p>
           <a:p>
             <a:pPr lvl="3"/>
             <a:r>
-              <a:rPr lang="en-US" smtClean="0"/>
+              <a:rPr lang="en-US"/>
               <a:t>Fourth level</a:t>
             </a:r>
           </a:p>
           <a:p>
             <a:pPr lvl="4"/>
             <a:r>
-              <a:rPr lang="en-US" smtClean="0"/>
+              <a:rPr lang="en-US"/>
               <a:t>Fifth level</a:t>
             </a:r>
-            <a:endParaRPr lang="en-US"/>
           </a:p>
         </p:txBody>
       </p:sp>
@@ -2415,7 +2253,7 @@
           <a:p>
             <a:fld id="{5BCAD085-E8A6-8845-BD4E-CB4CCA059FC4}" type="datetimeFigureOut">
               <a:rPr lang="en-US" smtClean="0"/>
-              <a:t>1/27/13</a:t>
+              <a:t>5/29/2026</a:t>
             </a:fld>
             <a:endParaRPr lang="en-US"/>
           </a:p>
@@ -2514,10 +2352,9 @@
           <a:lstStyle/>
           <a:p>
             <a:r>
-              <a:rPr lang="en-US" smtClean="0"/>
+              <a:rPr lang="en-US"/>
               <a:t>Click to edit Master title style</a:t>
             </a:r>
-            <a:endParaRPr lang="en-US"/>
           </a:p>
         </p:txBody>
       </p:sp>
@@ -2543,38 +2380,37 @@
           <a:p>
             <a:pPr lvl="0"/>
             <a:r>
-              <a:rPr lang="en-US" smtClean="0"/>
+              <a:rPr lang="en-US"/>
               <a:t>Click to edit Master text styles</a:t>
             </a:r>
           </a:p>
           <a:p>
             <a:pPr lvl="1"/>
             <a:r>
-              <a:rPr lang="en-US" smtClean="0"/>
+              <a:rPr lang="en-US"/>
               <a:t>Second level</a:t>
             </a:r>
           </a:p>
           <a:p>
             <a:pPr lvl="2"/>
             <a:r>
-              <a:rPr lang="en-US" smtClean="0"/>
+              <a:rPr lang="en-US"/>
               <a:t>Third level</a:t>
             </a:r>
           </a:p>
           <a:p>
             <a:pPr lvl="3"/>
             <a:r>
-              <a:rPr lang="en-US" smtClean="0"/>
+              <a:rPr lang="en-US"/>
               <a:t>Fourth level</a:t>
             </a:r>
           </a:p>
           <a:p>
             <a:pPr lvl="4"/>
             <a:r>
-              <a:rPr lang="en-US" smtClean="0"/>
+              <a:rPr lang="en-US"/>
               <a:t>Fifth level</a:t>
             </a:r>
-            <a:endParaRPr lang="en-US"/>
           </a:p>
         </p:txBody>
       </p:sp>
@@ -2595,7 +2431,7 @@
           <a:p>
             <a:fld id="{5BCAD085-E8A6-8845-BD4E-CB4CCA059FC4}" type="datetimeFigureOut">
               <a:rPr lang="en-US" smtClean="0"/>
-              <a:t>1/27/13</a:t>
+              <a:t>5/29/2026</a:t>
             </a:fld>
             <a:endParaRPr lang="en-US"/>
           </a:p>
@@ -2689,10 +2525,9 @@
           <a:lstStyle/>
           <a:p>
             <a:r>
-              <a:rPr lang="en-US" smtClean="0"/>
+              <a:rPr lang="en-US"/>
               <a:t>Click to edit Master title style</a:t>
             </a:r>
-            <a:endParaRPr lang="en-US"/>
           </a:p>
         </p:txBody>
       </p:sp>
@@ -2713,38 +2548,37 @@
           <a:p>
             <a:pPr lvl="0"/>
             <a:r>
-              <a:rPr lang="en-US" smtClean="0"/>
+              <a:rPr lang="en-US"/>
               <a:t>Click to edit Master text styles</a:t>
             </a:r>
           </a:p>
           <a:p>
             <a:pPr lvl="1"/>
             <a:r>
-              <a:rPr lang="en-US" smtClean="0"/>
+              <a:rPr lang="en-US"/>
               <a:t>Second level</a:t>
             </a:r>
           </a:p>
           <a:p>
             <a:pPr lvl="2"/>
             <a:r>
-              <a:rPr lang="en-US" smtClean="0"/>
+              <a:rPr lang="en-US"/>
               <a:t>Third level</a:t>
             </a:r>
           </a:p>
           <a:p>
             <a:pPr lvl="3"/>
             <a:r>
-              <a:rPr lang="en-US" smtClean="0"/>
+              <a:rPr lang="en-US"/>
               <a:t>Fourth level</a:t>
             </a:r>
           </a:p>
           <a:p>
             <a:pPr lvl="4"/>
             <a:r>
-              <a:rPr lang="en-US" smtClean="0"/>
+              <a:rPr lang="en-US"/>
               <a:t>Fifth level</a:t>
             </a:r>
-            <a:endParaRPr lang="en-US"/>
           </a:p>
         </p:txBody>
       </p:sp>
@@ -2765,7 +2599,7 @@
           <a:p>
             <a:fld id="{5BCAD085-E8A6-8845-BD4E-CB4CCA059FC4}" type="datetimeFigureOut">
               <a:rPr lang="en-US" smtClean="0"/>
-              <a:t>1/27/13</a:t>
+              <a:t>5/29/2026</a:t>
             </a:fld>
             <a:endParaRPr lang="en-US"/>
           </a:p>
@@ -2868,10 +2702,9 @@
           </a:lstStyle>
           <a:p>
             <a:r>
-              <a:rPr lang="en-US" smtClean="0"/>
+              <a:rPr lang="en-US"/>
               <a:t>Click to edit Master title style</a:t>
             </a:r>
-            <a:endParaRPr lang="en-US"/>
           </a:p>
         </p:txBody>
       </p:sp>
@@ -2988,7 +2821,7 @@
           <a:p>
             <a:pPr lvl="0"/>
             <a:r>
-              <a:rPr lang="en-US" smtClean="0"/>
+              <a:rPr lang="en-US"/>
               <a:t>Click to edit Master text styles</a:t>
             </a:r>
           </a:p>
@@ -3011,7 +2844,7 @@
           <a:p>
             <a:fld id="{5BCAD085-E8A6-8845-BD4E-CB4CCA059FC4}" type="datetimeFigureOut">
               <a:rPr lang="en-US" smtClean="0"/>
-              <a:t>1/27/13</a:t>
+              <a:t>5/29/2026</a:t>
             </a:fld>
             <a:endParaRPr lang="en-US"/>
           </a:p>
@@ -3105,10 +2938,9 @@
           <a:lstStyle/>
           <a:p>
             <a:r>
-              <a:rPr lang="en-US" smtClean="0"/>
+              <a:rPr lang="en-US"/>
               <a:t>Click to edit Master title style</a:t>
             </a:r>
-            <a:endParaRPr lang="en-US"/>
           </a:p>
         </p:txBody>
       </p:sp>
@@ -3162,38 +2994,37 @@
           <a:p>
             <a:pPr lvl="0"/>
             <a:r>
-              <a:rPr lang="en-US" smtClean="0"/>
+              <a:rPr lang="en-US"/>
               <a:t>Click to edit Master text styles</a:t>
             </a:r>
           </a:p>
           <a:p>
             <a:pPr lvl="1"/>
             <a:r>
-              <a:rPr lang="en-US" smtClean="0"/>
+              <a:rPr lang="en-US"/>
               <a:t>Second level</a:t>
             </a:r>
           </a:p>
           <a:p>
             <a:pPr lvl="2"/>
             <a:r>
-              <a:rPr lang="en-US" smtClean="0"/>
+              <a:rPr lang="en-US"/>
               <a:t>Third level</a:t>
             </a:r>
           </a:p>
           <a:p>
             <a:pPr lvl="3"/>
             <a:r>
-              <a:rPr lang="en-US" smtClean="0"/>
+              <a:rPr lang="en-US"/>
               <a:t>Fourth level</a:t>
             </a:r>
           </a:p>
           <a:p>
             <a:pPr lvl="4"/>
             <a:r>
-              <a:rPr lang="en-US" smtClean="0"/>
+              <a:rPr lang="en-US"/>
               <a:t>Fifth level</a:t>
             </a:r>
-            <a:endParaRPr lang="en-US"/>
           </a:p>
         </p:txBody>
       </p:sp>
@@ -3247,38 +3078,37 @@
           <a:p>
             <a:pPr lvl="0"/>
             <a:r>
-              <a:rPr lang="en-US" smtClean="0"/>
+              <a:rPr lang="en-US"/>
               <a:t>Click to edit Master text styles</a:t>
             </a:r>
           </a:p>
           <a:p>
             <a:pPr lvl="1"/>
             <a:r>
-              <a:rPr lang="en-US" smtClean="0"/>
+              <a:rPr lang="en-US"/>
               <a:t>Second level</a:t>
             </a:r>
           </a:p>
           <a:p>
             <a:pPr lvl="2"/>
             <a:r>
-              <a:rPr lang="en-US" smtClean="0"/>
+              <a:rPr lang="en-US"/>
               <a:t>Third level</a:t>
             </a:r>
           </a:p>
           <a:p>
             <a:pPr lvl="3"/>
             <a:r>
-              <a:rPr lang="en-US" smtClean="0"/>
+              <a:rPr lang="en-US"/>
               <a:t>Fourth level</a:t>
             </a:r>
           </a:p>
           <a:p>
             <a:pPr lvl="4"/>
             <a:r>
-              <a:rPr lang="en-US" smtClean="0"/>
+              <a:rPr lang="en-US"/>
               <a:t>Fifth level</a:t>
             </a:r>
-            <a:endParaRPr lang="en-US"/>
           </a:p>
         </p:txBody>
       </p:sp>
@@ -3299,7 +3129,7 @@
           <a:p>
             <a:fld id="{5BCAD085-E8A6-8845-BD4E-CB4CCA059FC4}" type="datetimeFigureOut">
               <a:rPr lang="en-US" smtClean="0"/>
-              <a:t>1/27/13</a:t>
+              <a:t>5/29/2026</a:t>
             </a:fld>
             <a:endParaRPr lang="en-US"/>
           </a:p>
@@ -3397,10 +3227,9 @@
           </a:lstStyle>
           <a:p>
             <a:r>
-              <a:rPr lang="en-US" smtClean="0"/>
+              <a:rPr lang="en-US"/>
               <a:t>Click to edit Master title style</a:t>
             </a:r>
-            <a:endParaRPr lang="en-US"/>
           </a:p>
         </p:txBody>
       </p:sp>
@@ -3463,7 +3292,7 @@
           <a:p>
             <a:pPr lvl="0"/>
             <a:r>
-              <a:rPr lang="en-US" smtClean="0"/>
+              <a:rPr lang="en-US"/>
               <a:t>Click to edit Master text styles</a:t>
             </a:r>
           </a:p>
@@ -3519,38 +3348,37 @@
           <a:p>
             <a:pPr lvl="0"/>
             <a:r>
-              <a:rPr lang="en-US" smtClean="0"/>
+              <a:rPr lang="en-US"/>
               <a:t>Click to edit Master text styles</a:t>
             </a:r>
           </a:p>
           <a:p>
             <a:pPr lvl="1"/>
             <a:r>
-              <a:rPr lang="en-US" smtClean="0"/>
+              <a:rPr lang="en-US"/>
               <a:t>Second level</a:t>
             </a:r>
           </a:p>
           <a:p>
             <a:pPr lvl="2"/>
             <a:r>
-              <a:rPr lang="en-US" smtClean="0"/>
+              <a:rPr lang="en-US"/>
               <a:t>Third level</a:t>
             </a:r>
           </a:p>
           <a:p>
             <a:pPr lvl="3"/>
             <a:r>
-              <a:rPr lang="en-US" smtClean="0"/>
+              <a:rPr lang="en-US"/>
               <a:t>Fourth level</a:t>
             </a:r>
           </a:p>
           <a:p>
             <a:pPr lvl="4"/>
             <a:r>
-              <a:rPr lang="en-US" smtClean="0"/>
+              <a:rPr lang="en-US"/>
               <a:t>Fifth level</a:t>
             </a:r>
-            <a:endParaRPr lang="en-US"/>
           </a:p>
         </p:txBody>
       </p:sp>
@@ -3613,7 +3441,7 @@
           <a:p>
             <a:pPr lvl="0"/>
             <a:r>
-              <a:rPr lang="en-US" smtClean="0"/>
+              <a:rPr lang="en-US"/>
               <a:t>Click to edit Master text styles</a:t>
             </a:r>
           </a:p>
@@ -3669,38 +3497,37 @@
           <a:p>
             <a:pPr lvl="0"/>
             <a:r>
-              <a:rPr lang="en-US" smtClean="0"/>
+              <a:rPr lang="en-US"/>
               <a:t>Click to edit Master text styles</a:t>
             </a:r>
           </a:p>
           <a:p>
             <a:pPr lvl="1"/>
             <a:r>
-              <a:rPr lang="en-US" smtClean="0"/>
+              <a:rPr lang="en-US"/>
               <a:t>Second level</a:t>
             </a:r>
           </a:p>
           <a:p>
             <a:pPr lvl="2"/>
             <a:r>
-              <a:rPr lang="en-US" smtClean="0"/>
+              <a:rPr lang="en-US"/>
               <a:t>Third level</a:t>
             </a:r>
           </a:p>
           <a:p>
             <a:pPr lvl="3"/>
             <a:r>
-              <a:rPr lang="en-US" smtClean="0"/>
+              <a:rPr lang="en-US"/>
               <a:t>Fourth level</a:t>
             </a:r>
           </a:p>
           <a:p>
             <a:pPr lvl="4"/>
             <a:r>
-              <a:rPr lang="en-US" smtClean="0"/>
+              <a:rPr lang="en-US"/>
               <a:t>Fifth level</a:t>
             </a:r>
-            <a:endParaRPr lang="en-US"/>
           </a:p>
         </p:txBody>
       </p:sp>
@@ -3721,7 +3548,7 @@
           <a:p>
             <a:fld id="{5BCAD085-E8A6-8845-BD4E-CB4CCA059FC4}" type="datetimeFigureOut">
               <a:rPr lang="en-US" smtClean="0"/>
-              <a:t>1/27/13</a:t>
+              <a:t>5/29/2026</a:t>
             </a:fld>
             <a:endParaRPr lang="en-US"/>
           </a:p>
@@ -3815,10 +3642,9 @@
           <a:lstStyle/>
           <a:p>
             <a:r>
-              <a:rPr lang="en-US" smtClean="0"/>
+              <a:rPr lang="en-US"/>
               <a:t>Click to edit Master title style</a:t>
             </a:r>
-            <a:endParaRPr lang="en-US"/>
           </a:p>
         </p:txBody>
       </p:sp>
@@ -3839,7 +3665,7 @@
           <a:p>
             <a:fld id="{5BCAD085-E8A6-8845-BD4E-CB4CCA059FC4}" type="datetimeFigureOut">
               <a:rPr lang="en-US" smtClean="0"/>
-              <a:t>1/27/13</a:t>
+              <a:t>5/29/2026</a:t>
             </a:fld>
             <a:endParaRPr lang="en-US"/>
           </a:p>
@@ -3934,7 +3760,7 @@
           <a:p>
             <a:fld id="{5BCAD085-E8A6-8845-BD4E-CB4CCA059FC4}" type="datetimeFigureOut">
               <a:rPr lang="en-US" smtClean="0"/>
-              <a:t>1/27/13</a:t>
+              <a:t>5/29/2026</a:t>
             </a:fld>
             <a:endParaRPr lang="en-US"/>
           </a:p>
@@ -4037,10 +3863,9 @@
           </a:lstStyle>
           <a:p>
             <a:r>
-              <a:rPr lang="en-US" smtClean="0"/>
+              <a:rPr lang="en-US"/>
               <a:t>Click to edit Master title style</a:t>
             </a:r>
-            <a:endParaRPr lang="en-US"/>
           </a:p>
         </p:txBody>
       </p:sp>
@@ -4094,38 +3919,37 @@
           <a:p>
             <a:pPr lvl="0"/>
             <a:r>
-              <a:rPr lang="en-US" smtClean="0"/>
+              <a:rPr lang="en-US"/>
               <a:t>Click to edit Master text styles</a:t>
             </a:r>
           </a:p>
           <a:p>
             <a:pPr lvl="1"/>
             <a:r>
-              <a:rPr lang="en-US" smtClean="0"/>
+              <a:rPr lang="en-US"/>
               <a:t>Second level</a:t>
             </a:r>
           </a:p>
           <a:p>
             <a:pPr lvl="2"/>
             <a:r>
-              <a:rPr lang="en-US" smtClean="0"/>
+              <a:rPr lang="en-US"/>
               <a:t>Third level</a:t>
             </a:r>
           </a:p>
           <a:p>
             <a:pPr lvl="3"/>
             <a:r>
-              <a:rPr lang="en-US" smtClean="0"/>
+              <a:rPr lang="en-US"/>
               <a:t>Fourth level</a:t>
             </a:r>
           </a:p>
           <a:p>
             <a:pPr lvl="4"/>
             <a:r>
-              <a:rPr lang="en-US" smtClean="0"/>
+              <a:rPr lang="en-US"/>
               <a:t>Fifth level</a:t>
             </a:r>
-            <a:endParaRPr lang="en-US"/>
           </a:p>
         </p:txBody>
       </p:sp>
@@ -4188,7 +4012,7 @@
           <a:p>
             <a:pPr lvl="0"/>
             <a:r>
-              <a:rPr lang="en-US" smtClean="0"/>
+              <a:rPr lang="en-US"/>
               <a:t>Click to edit Master text styles</a:t>
             </a:r>
           </a:p>
@@ -4211,7 +4035,7 @@
           <a:p>
             <a:fld id="{5BCAD085-E8A6-8845-BD4E-CB4CCA059FC4}" type="datetimeFigureOut">
               <a:rPr lang="en-US" smtClean="0"/>
-              <a:t>1/27/13</a:t>
+              <a:t>5/29/2026</a:t>
             </a:fld>
             <a:endParaRPr lang="en-US"/>
           </a:p>
@@ -4314,10 +4138,9 @@
           </a:lstStyle>
           <a:p>
             <a:r>
-              <a:rPr lang="en-US" smtClean="0"/>
+              <a:rPr lang="en-US"/>
               <a:t>Click to edit Master title style</a:t>
             </a:r>
-            <a:endParaRPr lang="en-US"/>
           </a:p>
         </p:txBody>
       </p:sp>
@@ -4441,7 +4264,7 @@
           <a:p>
             <a:pPr lvl="0"/>
             <a:r>
-              <a:rPr lang="en-US" smtClean="0"/>
+              <a:rPr lang="en-US"/>
               <a:t>Click to edit Master text styles</a:t>
             </a:r>
           </a:p>
@@ -4464,7 +4287,7 @@
           <a:p>
             <a:fld id="{5BCAD085-E8A6-8845-BD4E-CB4CCA059FC4}" type="datetimeFigureOut">
               <a:rPr lang="en-US" smtClean="0"/>
-              <a:t>1/27/13</a:t>
+              <a:t>5/29/2026</a:t>
             </a:fld>
             <a:endParaRPr lang="en-US"/>
           </a:p>
@@ -4573,10 +4396,9 @@
           <a:lstStyle/>
           <a:p>
             <a:r>
-              <a:rPr lang="en-US" smtClean="0"/>
+              <a:rPr lang="en-US"/>
               <a:t>Click to edit Master title style</a:t>
             </a:r>
-            <a:endParaRPr lang="en-US"/>
           </a:p>
         </p:txBody>
       </p:sp>
@@ -4607,38 +4429,37 @@
           <a:p>
             <a:pPr lvl="0"/>
             <a:r>
-              <a:rPr lang="en-US" smtClean="0"/>
+              <a:rPr lang="en-US"/>
               <a:t>Click to edit Master text styles</a:t>
             </a:r>
           </a:p>
           <a:p>
             <a:pPr lvl="1"/>
             <a:r>
-              <a:rPr lang="en-US" smtClean="0"/>
+              <a:rPr lang="en-US"/>
               <a:t>Second level</a:t>
             </a:r>
           </a:p>
           <a:p>
             <a:pPr lvl="2"/>
             <a:r>
-              <a:rPr lang="en-US" smtClean="0"/>
+              <a:rPr lang="en-US"/>
               <a:t>Third level</a:t>
             </a:r>
           </a:p>
           <a:p>
             <a:pPr lvl="3"/>
             <a:r>
-              <a:rPr lang="en-US" smtClean="0"/>
+              <a:rPr lang="en-US"/>
               <a:t>Fourth level</a:t>
             </a:r>
           </a:p>
           <a:p>
             <a:pPr lvl="4"/>
             <a:r>
-              <a:rPr lang="en-US" smtClean="0"/>
+              <a:rPr lang="en-US"/>
               <a:t>Fifth level</a:t>
             </a:r>
-            <a:endParaRPr lang="en-US"/>
           </a:p>
         </p:txBody>
       </p:sp>
@@ -4677,7 +4498,7 @@
           <a:p>
             <a:fld id="{5BCAD085-E8A6-8845-BD4E-CB4CCA059FC4}" type="datetimeFigureOut">
               <a:rPr lang="en-US" smtClean="0"/>
-              <a:t>1/27/13</a:t>
+              <a:t>5/29/2026</a:t>
             </a:fld>
             <a:endParaRPr lang="en-US"/>
           </a:p>
@@ -5036,7 +4857,7 @@
 </file>
 
 <file path=ppt/slides/slide1.xml><?xml version="1.0" encoding="utf-8"?>
-<p:sld xmlns:a="http://schemas.openxmlformats.org/drawingml/2006/main" xmlns:p="http://schemas.openxmlformats.org/presentationml/2006/main" xmlns:r="http://schemas.openxmlformats.org/officeDocument/2006/relationships">
+<p:sld xmlns:a="http://schemas.openxmlformats.org/drawingml/2006/main" xmlns:r="http://schemas.openxmlformats.org/officeDocument/2006/relationships" xmlns:p="http://schemas.openxmlformats.org/presentationml/2006/main">
   <p:cSld>
     <p:spTree>
       <p:nvGrpSpPr>
@@ -5044,7 +4865,14 @@
         <p:cNvGrpSpPr/>
         <p:nvPr/>
       </p:nvGrpSpPr>
-      <p:grpSpPr/>
+      <p:grpSpPr>
+        <a:xfrm>
+          <a:off x="0" y="0"/>
+          <a:ext cx="0" cy="0"/>
+          <a:chOff x="0" y="0"/>
+          <a:chExt cx="0" cy="0"/>
+        </a:xfrm>
+      </p:grpSpPr>
       <p:sp>
         <p:nvSpPr>
           <p:cNvPr id="2" name="Rectangle 1"/>
@@ -5086,6 +4914,7 @@
           <a:lstStyle/>
           <a:p>
             <a:pPr algn="ctr"/>
+            <a:endParaRPr/>
           </a:p>
         </p:txBody>
       </p:sp>
@@ -5106,7 +4935,7 @@
           <a:noFill/>
         </p:spPr>
         <p:txBody>
-          <a:bodyPr wrap="square" lIns="0" rIns="0" tIns="0" bIns="0" anchor="t">
+          <a:bodyPr wrap="square" lIns="0" tIns="0" rIns="0" bIns="0" anchor="t">
             <a:spAutoFit/>
           </a:bodyPr>
           <a:lstStyle/>
@@ -5141,7 +4970,7 @@
           <a:noFill/>
         </p:spPr>
         <p:txBody>
-          <a:bodyPr wrap="square" lIns="0" rIns="0" tIns="0" bIns="0" anchor="t">
+          <a:bodyPr wrap="square" lIns="0" tIns="0" rIns="0" bIns="0" anchor="t">
             <a:spAutoFit/>
           </a:bodyPr>
           <a:lstStyle/>
@@ -5176,7 +5005,7 @@
           <a:noFill/>
         </p:spPr>
         <p:txBody>
-          <a:bodyPr wrap="square" lIns="0" rIns="0" tIns="0" bIns="0" anchor="t">
+          <a:bodyPr wrap="square" lIns="0" tIns="0" rIns="0" bIns="0" anchor="t">
             <a:spAutoFit/>
           </a:bodyPr>
           <a:lstStyle/>
@@ -5211,7 +5040,7 @@
           <a:noFill/>
         </p:spPr>
         <p:txBody>
-          <a:bodyPr wrap="square" lIns="0" rIns="0" tIns="0" bIns="0" anchor="t">
+          <a:bodyPr wrap="square" lIns="0" tIns="0" rIns="0" bIns="0" anchor="t">
             <a:spAutoFit/>
           </a:bodyPr>
           <a:lstStyle/>
@@ -5272,6 +5101,7 @@
           <a:lstStyle/>
           <a:p>
             <a:pPr algn="ctr"/>
+            <a:endParaRPr/>
           </a:p>
         </p:txBody>
       </p:sp>
@@ -5292,7 +5122,7 @@
           <a:noFill/>
         </p:spPr>
         <p:txBody>
-          <a:bodyPr wrap="square" lIns="0" rIns="0" tIns="0" bIns="0" anchor="t">
+          <a:bodyPr wrap="square" lIns="0" tIns="0" rIns="0" bIns="0" anchor="t">
             <a:spAutoFit/>
           </a:bodyPr>
           <a:lstStyle/>
@@ -5319,29 +5149,80 @@
         <p:spPr>
           <a:xfrm>
             <a:off x="914400" y="5285232"/>
-            <a:ext cx="6583680" cy="640080"/>
-          </a:xfrm>
-          <a:prstGeom prst="rect">
-            <a:avLst/>
-          </a:prstGeom>
-          <a:noFill/>
-        </p:spPr>
-        <p:txBody>
-          <a:bodyPr wrap="square" lIns="0" rIns="0" tIns="0" bIns="0" anchor="t">
-            <a:spAutoFit/>
-          </a:bodyPr>
-          <a:lstStyle/>
-          <a:p>
-            <a:pPr algn="l"/>
-            <a:r>
-              <a:rPr sz="1300" b="0" i="0">
+            <a:ext cx="6583680" cy="200055"/>
+          </a:xfrm>
+          <a:prstGeom prst="rect">
+            <a:avLst/>
+          </a:prstGeom>
+          <a:noFill/>
+        </p:spPr>
+        <p:txBody>
+          <a:bodyPr wrap="square" lIns="0" tIns="0" rIns="0" bIns="0" anchor="t">
+            <a:spAutoFit/>
+          </a:bodyPr>
+          <a:lstStyle/>
+          <a:p>
+            <a:pPr algn="l"/>
+            <a:r>
+              <a:rPr sz="1300" b="0" i="0" dirty="0">
                 <a:solidFill>
                   <a:srgbClr val="8B949E"/>
                 </a:solidFill>
                 <a:latin typeface="Calibri"/>
               </a:rPr>
-              <a:t>Sandy — original PoC.   Kirk — hardware.   Nick — firmware.</a:t>
-            </a:r>
+              <a:t>Sandy — original </a:t>
+            </a:r>
+            <a:r>
+              <a:rPr lang="en-US" sz="1300" dirty="0">
+                <a:solidFill>
+                  <a:srgbClr val="8B949E"/>
+                </a:solidFill>
+                <a:latin typeface="Calibri"/>
+              </a:rPr>
+              <a:t>design and firmware </a:t>
+            </a:r>
+            <a:r>
+              <a:rPr sz="1300" b="0" i="0" dirty="0">
+                <a:solidFill>
+                  <a:srgbClr val="8B949E"/>
+                </a:solidFill>
+                <a:latin typeface="Calibri"/>
+              </a:rPr>
+              <a:t>PoC.   Kirk — hardware</a:t>
+            </a:r>
+            <a:r>
+              <a:rPr lang="en-US" sz="1300" b="0" i="0" dirty="0">
+                <a:solidFill>
+                  <a:srgbClr val="8B949E"/>
+                </a:solidFill>
+                <a:latin typeface="Calibri"/>
+              </a:rPr>
+              <a:t> engineering</a:t>
+            </a:r>
+            <a:r>
+              <a:rPr sz="1300" b="0" i="0" dirty="0">
+                <a:solidFill>
+                  <a:srgbClr val="8B949E"/>
+                </a:solidFill>
+                <a:latin typeface="Calibri"/>
+              </a:rPr>
+              <a:t>.   Nick — firmware</a:t>
+            </a:r>
+            <a:r>
+              <a:rPr lang="en-US" sz="1300" b="0" i="0" dirty="0">
+                <a:solidFill>
+                  <a:srgbClr val="8B949E"/>
+                </a:solidFill>
+                <a:latin typeface="Calibri"/>
+              </a:rPr>
+              <a:t> 2.0.</a:t>
+            </a:r>
+            <a:endParaRPr sz="1300" b="0" i="0" dirty="0">
+              <a:solidFill>
+                <a:srgbClr val="8B949E"/>
+              </a:solidFill>
+              <a:latin typeface="Calibri"/>
+            </a:endParaRPr>
           </a:p>
         </p:txBody>
       </p:sp>
@@ -5388,6 +5269,7 @@
           <a:lstStyle/>
           <a:p>
             <a:pPr algn="ctr"/>
+            <a:endParaRPr/>
           </a:p>
         </p:txBody>
       </p:sp>
@@ -5408,7 +5290,7 @@
           <a:noFill/>
         </p:spPr>
         <p:txBody>
-          <a:bodyPr wrap="square" lIns="0" rIns="0" tIns="0" bIns="0" anchor="t">
+          <a:bodyPr wrap="square" lIns="0" tIns="0" rIns="0" bIns="0" anchor="t">
             <a:spAutoFit/>
           </a:bodyPr>
           <a:lstStyle/>
@@ -5443,7 +5325,7 @@
           <a:noFill/>
         </p:spPr>
         <p:txBody>
-          <a:bodyPr wrap="square" lIns="0" rIns="0" tIns="0" bIns="0" anchor="t">
+          <a:bodyPr wrap="square" lIns="0" tIns="0" rIns="0" bIns="0" anchor="t">
             <a:spAutoFit/>
           </a:bodyPr>
           <a:lstStyle/>
@@ -5478,7 +5360,7 @@
           <a:noFill/>
         </p:spPr>
         <p:txBody>
-          <a:bodyPr wrap="square" lIns="0" rIns="0" tIns="0" bIns="0" anchor="t">
+          <a:bodyPr wrap="square" lIns="0" tIns="0" rIns="0" bIns="0" anchor="t">
             <a:spAutoFit/>
           </a:bodyPr>
           <a:lstStyle/>
@@ -5505,7 +5387,7 @@
 </file>
 
 <file path=ppt/slides/slide10.xml><?xml version="1.0" encoding="utf-8"?>
-<p:sld xmlns:a="http://schemas.openxmlformats.org/drawingml/2006/main" xmlns:p="http://schemas.openxmlformats.org/presentationml/2006/main" xmlns:r="http://schemas.openxmlformats.org/officeDocument/2006/relationships">
+<p:sld xmlns:a="http://schemas.openxmlformats.org/drawingml/2006/main" xmlns:r="http://schemas.openxmlformats.org/officeDocument/2006/relationships" xmlns:p="http://schemas.openxmlformats.org/presentationml/2006/main">
   <p:cSld>
     <p:spTree>
       <p:nvGrpSpPr>
@@ -5513,7 +5395,14 @@
         <p:cNvGrpSpPr/>
         <p:nvPr/>
       </p:nvGrpSpPr>
-      <p:grpSpPr/>
+      <p:grpSpPr>
+        <a:xfrm>
+          <a:off x="0" y="0"/>
+          <a:ext cx="0" cy="0"/>
+          <a:chOff x="0" y="0"/>
+          <a:chExt cx="0" cy="0"/>
+        </a:xfrm>
+      </p:grpSpPr>
       <p:sp>
         <p:nvSpPr>
           <p:cNvPr id="2" name="Rectangle 1"/>
@@ -5555,6 +5444,7 @@
           <a:lstStyle/>
           <a:p>
             <a:pPr algn="ctr"/>
+            <a:endParaRPr/>
           </a:p>
         </p:txBody>
       </p:sp>
@@ -5575,7 +5465,7 @@
           <a:noFill/>
         </p:spPr>
         <p:txBody>
-          <a:bodyPr wrap="square" lIns="0" rIns="0" tIns="0" bIns="0" anchor="t">
+          <a:bodyPr wrap="square" lIns="0" tIns="0" rIns="0" bIns="0" anchor="t">
             <a:spAutoFit/>
           </a:bodyPr>
           <a:lstStyle/>
@@ -5634,6 +5524,7 @@
           <a:lstStyle/>
           <a:p>
             <a:pPr algn="ctr"/>
+            <a:endParaRPr/>
           </a:p>
         </p:txBody>
       </p:sp>
@@ -5680,6 +5571,7 @@
           <a:lstStyle/>
           <a:p>
             <a:pPr algn="ctr"/>
+            <a:endParaRPr/>
           </a:p>
         </p:txBody>
       </p:sp>
@@ -5700,7 +5592,7 @@
           <a:noFill/>
         </p:spPr>
         <p:txBody>
-          <a:bodyPr wrap="square" lIns="0" rIns="0" tIns="0" bIns="0" anchor="t">
+          <a:bodyPr wrap="square" lIns="0" tIns="0" rIns="0" bIns="0" anchor="t">
             <a:spAutoFit/>
           </a:bodyPr>
           <a:lstStyle/>
@@ -5845,6 +5737,7 @@
           <a:lstStyle/>
           <a:p>
             <a:pPr algn="ctr"/>
+            <a:endParaRPr/>
           </a:p>
         </p:txBody>
       </p:sp>
@@ -5865,7 +5758,7 @@
           <a:noFill/>
         </p:spPr>
         <p:txBody>
-          <a:bodyPr wrap="square" lIns="0" rIns="0" tIns="0" bIns="0" anchor="ctr">
+          <a:bodyPr wrap="square" lIns="0" tIns="0" rIns="0" bIns="0" anchor="ctr">
             <a:spAutoFit/>
           </a:bodyPr>
           <a:lstStyle/>
@@ -5926,6 +5819,7 @@
           <a:lstStyle/>
           <a:p>
             <a:pPr algn="ctr"/>
+            <a:endParaRPr/>
           </a:p>
         </p:txBody>
       </p:sp>
@@ -5946,7 +5840,7 @@
           <a:noFill/>
         </p:spPr>
         <p:txBody>
-          <a:bodyPr wrap="square" lIns="0" rIns="0" tIns="0" bIns="0" anchor="ctr">
+          <a:bodyPr wrap="square" lIns="0" tIns="0" rIns="0" bIns="0" anchor="ctr">
             <a:spAutoFit/>
           </a:bodyPr>
           <a:lstStyle/>
@@ -5981,7 +5875,7 @@
           <a:noFill/>
         </p:spPr>
         <p:txBody>
-          <a:bodyPr wrap="square" lIns="0" rIns="0" tIns="0" bIns="0" anchor="t">
+          <a:bodyPr wrap="square" lIns="0" tIns="0" rIns="0" bIns="0" anchor="t">
             <a:spAutoFit/>
           </a:bodyPr>
           <a:lstStyle/>
@@ -6016,7 +5910,7 @@
           <a:noFill/>
         </p:spPr>
         <p:txBody>
-          <a:bodyPr wrap="square" lIns="0" rIns="0" tIns="0" bIns="0" anchor="t">
+          <a:bodyPr wrap="square" lIns="0" tIns="0" rIns="0" bIns="0" anchor="t">
             <a:spAutoFit/>
           </a:bodyPr>
           <a:lstStyle/>
@@ -6043,7 +5937,7 @@
 </file>
 
 <file path=ppt/slides/slide11.xml><?xml version="1.0" encoding="utf-8"?>
-<p:sld xmlns:a="http://schemas.openxmlformats.org/drawingml/2006/main" xmlns:p="http://schemas.openxmlformats.org/presentationml/2006/main" xmlns:r="http://schemas.openxmlformats.org/officeDocument/2006/relationships">
+<p:sld xmlns:a="http://schemas.openxmlformats.org/drawingml/2006/main" xmlns:r="http://schemas.openxmlformats.org/officeDocument/2006/relationships" xmlns:p="http://schemas.openxmlformats.org/presentationml/2006/main">
   <p:cSld>
     <p:spTree>
       <p:nvGrpSpPr>
@@ -6051,7 +5945,14 @@
         <p:cNvGrpSpPr/>
         <p:nvPr/>
       </p:nvGrpSpPr>
-      <p:grpSpPr/>
+      <p:grpSpPr>
+        <a:xfrm>
+          <a:off x="0" y="0"/>
+          <a:ext cx="0" cy="0"/>
+          <a:chOff x="0" y="0"/>
+          <a:chExt cx="0" cy="0"/>
+        </a:xfrm>
+      </p:grpSpPr>
       <p:sp>
         <p:nvSpPr>
           <p:cNvPr id="2" name="Rectangle 1"/>
@@ -6093,6 +5994,7 @@
           <a:lstStyle/>
           <a:p>
             <a:pPr algn="ctr"/>
+            <a:endParaRPr/>
           </a:p>
         </p:txBody>
       </p:sp>
@@ -6137,6 +6039,7 @@
           <a:lstStyle/>
           <a:p>
             <a:pPr algn="ctr"/>
+            <a:endParaRPr/>
           </a:p>
         </p:txBody>
       </p:sp>
@@ -6192,7 +6095,7 @@
           <a:noFill/>
         </p:spPr>
         <p:txBody>
-          <a:bodyPr wrap="square" lIns="0" rIns="0" tIns="0" bIns="0" anchor="t">
+          <a:bodyPr wrap="square" lIns="0" tIns="0" rIns="0" bIns="0" anchor="t">
             <a:spAutoFit/>
           </a:bodyPr>
           <a:lstStyle/>
@@ -6227,7 +6130,7 @@
           <a:noFill/>
         </p:spPr>
         <p:txBody>
-          <a:bodyPr wrap="square" lIns="0" rIns="0" tIns="0" bIns="0" anchor="t">
+          <a:bodyPr wrap="square" lIns="0" tIns="0" rIns="0" bIns="0" anchor="t">
             <a:spAutoFit/>
           </a:bodyPr>
           <a:lstStyle/>
@@ -6288,6 +6191,7 @@
           <a:lstStyle/>
           <a:p>
             <a:pPr algn="ctr"/>
+            <a:endParaRPr/>
           </a:p>
         </p:txBody>
       </p:sp>
@@ -6308,7 +6212,7 @@
           <a:noFill/>
         </p:spPr>
         <p:txBody>
-          <a:bodyPr wrap="square" lIns="0" rIns="0" tIns="0" bIns="0" anchor="t">
+          <a:bodyPr wrap="square" lIns="0" tIns="0" rIns="0" bIns="0" anchor="t">
             <a:spAutoFit/>
           </a:bodyPr>
           <a:lstStyle/>
@@ -6369,6 +6273,7 @@
           <a:lstStyle/>
           <a:p>
             <a:pPr algn="ctr"/>
+            <a:endParaRPr/>
           </a:p>
         </p:txBody>
       </p:sp>
@@ -6389,7 +6294,7 @@
           <a:noFill/>
         </p:spPr>
         <p:txBody>
-          <a:bodyPr wrap="square" lIns="0" rIns="0" tIns="0" bIns="0" anchor="t">
+          <a:bodyPr wrap="square" lIns="0" tIns="0" rIns="0" bIns="0" anchor="t">
             <a:spAutoFit/>
           </a:bodyPr>
           <a:lstStyle/>
@@ -6522,6 +6427,7 @@
           <a:lstStyle/>
           <a:p>
             <a:pPr algn="ctr"/>
+            <a:endParaRPr/>
           </a:p>
         </p:txBody>
       </p:sp>
@@ -6542,7 +6448,7 @@
           <a:noFill/>
         </p:spPr>
         <p:txBody>
-          <a:bodyPr wrap="square" lIns="0" rIns="0" tIns="0" bIns="0" anchor="t">
+          <a:bodyPr wrap="square" lIns="0" tIns="0" rIns="0" bIns="0" anchor="t">
             <a:spAutoFit/>
           </a:bodyPr>
           <a:lstStyle/>
@@ -6577,7 +6483,7 @@
           <a:noFill/>
         </p:spPr>
         <p:txBody>
-          <a:bodyPr wrap="square" lIns="0" rIns="0" tIns="0" bIns="0" anchor="t">
+          <a:bodyPr wrap="square" lIns="0" tIns="0" rIns="0" bIns="0" anchor="t">
             <a:spAutoFit/>
           </a:bodyPr>
           <a:lstStyle/>
@@ -6618,7 +6524,7 @@
           <a:noFill/>
         </p:spPr>
         <p:txBody>
-          <a:bodyPr wrap="square" lIns="0" rIns="0" tIns="0" bIns="0" anchor="t">
+          <a:bodyPr wrap="square" lIns="0" tIns="0" rIns="0" bIns="0" anchor="t">
             <a:spAutoFit/>
           </a:bodyPr>
           <a:lstStyle/>
@@ -6653,7 +6559,7 @@
           <a:noFill/>
         </p:spPr>
         <p:txBody>
-          <a:bodyPr wrap="square" lIns="0" rIns="0" tIns="0" bIns="0" anchor="t">
+          <a:bodyPr wrap="square" lIns="0" tIns="0" rIns="0" bIns="0" anchor="t">
             <a:spAutoFit/>
           </a:bodyPr>
           <a:lstStyle/>
@@ -6680,7 +6586,7 @@
 </file>
 
 <file path=ppt/slides/slide12.xml><?xml version="1.0" encoding="utf-8"?>
-<p:sld xmlns:a="http://schemas.openxmlformats.org/drawingml/2006/main" xmlns:p="http://schemas.openxmlformats.org/presentationml/2006/main" xmlns:r="http://schemas.openxmlformats.org/officeDocument/2006/relationships">
+<p:sld xmlns:a="http://schemas.openxmlformats.org/drawingml/2006/main" xmlns:r="http://schemas.openxmlformats.org/officeDocument/2006/relationships" xmlns:p="http://schemas.openxmlformats.org/presentationml/2006/main">
   <p:cSld>
     <p:spTree>
       <p:nvGrpSpPr>
@@ -6688,7 +6594,14 @@
         <p:cNvGrpSpPr/>
         <p:nvPr/>
       </p:nvGrpSpPr>
-      <p:grpSpPr/>
+      <p:grpSpPr>
+        <a:xfrm>
+          <a:off x="0" y="0"/>
+          <a:ext cx="0" cy="0"/>
+          <a:chOff x="0" y="0"/>
+          <a:chExt cx="0" cy="0"/>
+        </a:xfrm>
+      </p:grpSpPr>
       <p:sp>
         <p:nvSpPr>
           <p:cNvPr id="2" name="Rectangle 1"/>
@@ -6730,6 +6643,7 @@
           <a:lstStyle/>
           <a:p>
             <a:pPr algn="ctr"/>
+            <a:endParaRPr/>
           </a:p>
         </p:txBody>
       </p:sp>
@@ -6774,6 +6688,7 @@
           <a:lstStyle/>
           <a:p>
             <a:pPr algn="ctr"/>
+            <a:endParaRPr/>
           </a:p>
         </p:txBody>
       </p:sp>
@@ -6829,7 +6744,7 @@
           <a:noFill/>
         </p:spPr>
         <p:txBody>
-          <a:bodyPr wrap="square" lIns="0" rIns="0" tIns="0" bIns="0" anchor="t">
+          <a:bodyPr wrap="square" lIns="0" tIns="0" rIns="0" bIns="0" anchor="t">
             <a:spAutoFit/>
           </a:bodyPr>
           <a:lstStyle/>
@@ -6864,7 +6779,7 @@
           <a:noFill/>
         </p:spPr>
         <p:txBody>
-          <a:bodyPr wrap="square" lIns="0" rIns="0" tIns="0" bIns="0" anchor="t">
+          <a:bodyPr wrap="square" lIns="0" tIns="0" rIns="0" bIns="0" anchor="t">
             <a:spAutoFit/>
           </a:bodyPr>
           <a:lstStyle/>
@@ -6899,7 +6814,7 @@
           <a:noFill/>
         </p:spPr>
         <p:txBody>
-          <a:bodyPr wrap="square" lIns="0" rIns="0" tIns="0" bIns="0" anchor="t">
+          <a:bodyPr wrap="square" lIns="0" tIns="0" rIns="0" bIns="0" anchor="t">
             <a:spAutoFit/>
           </a:bodyPr>
           <a:lstStyle/>
@@ -6960,6 +6875,7 @@
           <a:lstStyle/>
           <a:p>
             <a:pPr algn="ctr"/>
+            <a:endParaRPr/>
           </a:p>
         </p:txBody>
       </p:sp>
@@ -6980,7 +6896,7 @@
           <a:noFill/>
         </p:spPr>
         <p:txBody>
-          <a:bodyPr wrap="square" lIns="0" rIns="0" tIns="0" bIns="0" anchor="t">
+          <a:bodyPr wrap="square" lIns="0" tIns="0" rIns="0" bIns="0" anchor="t">
             <a:spAutoFit/>
           </a:bodyPr>
           <a:lstStyle/>
@@ -7051,7 +6967,7 @@
           <a:noFill/>
         </p:spPr>
         <p:txBody>
-          <a:bodyPr wrap="square" lIns="0" rIns="0" tIns="0" bIns="0" anchor="t">
+          <a:bodyPr wrap="square" lIns="0" tIns="0" rIns="0" bIns="0" anchor="t">
             <a:spAutoFit/>
           </a:bodyPr>
           <a:lstStyle/>
@@ -7112,6 +7028,7 @@
           <a:lstStyle/>
           <a:p>
             <a:pPr algn="ctr"/>
+            <a:endParaRPr/>
           </a:p>
         </p:txBody>
       </p:sp>
@@ -7132,7 +7049,7 @@
           <a:noFill/>
         </p:spPr>
         <p:txBody>
-          <a:bodyPr wrap="square" lIns="0" rIns="0" tIns="0" bIns="0" anchor="t">
+          <a:bodyPr wrap="square" lIns="0" tIns="0" rIns="0" bIns="0" anchor="t">
             <a:spAutoFit/>
           </a:bodyPr>
           <a:lstStyle/>
@@ -7203,7 +7120,7 @@
           <a:noFill/>
         </p:spPr>
         <p:txBody>
-          <a:bodyPr wrap="square" lIns="0" rIns="0" tIns="0" bIns="0" anchor="t">
+          <a:bodyPr wrap="square" lIns="0" tIns="0" rIns="0" bIns="0" anchor="t">
             <a:spAutoFit/>
           </a:bodyPr>
           <a:lstStyle/>
@@ -7264,6 +7181,7 @@
           <a:lstStyle/>
           <a:p>
             <a:pPr algn="ctr"/>
+            <a:endParaRPr/>
           </a:p>
         </p:txBody>
       </p:sp>
@@ -7284,7 +7202,7 @@
           <a:noFill/>
         </p:spPr>
         <p:txBody>
-          <a:bodyPr wrap="square" lIns="0" rIns="0" tIns="0" bIns="0" anchor="t">
+          <a:bodyPr wrap="square" lIns="0" tIns="0" rIns="0" bIns="0" anchor="t">
             <a:spAutoFit/>
           </a:bodyPr>
           <a:lstStyle/>
@@ -7331,7 +7249,7 @@
           <a:noFill/>
         </p:spPr>
         <p:txBody>
-          <a:bodyPr wrap="square" lIns="0" rIns="0" tIns="0" bIns="0" anchor="t">
+          <a:bodyPr wrap="square" lIns="0" tIns="0" rIns="0" bIns="0" anchor="t">
             <a:spAutoFit/>
           </a:bodyPr>
           <a:lstStyle/>
@@ -7366,7 +7284,7 @@
           <a:noFill/>
         </p:spPr>
         <p:txBody>
-          <a:bodyPr wrap="square" lIns="0" rIns="0" tIns="0" bIns="0" anchor="t">
+          <a:bodyPr wrap="square" lIns="0" tIns="0" rIns="0" bIns="0" anchor="t">
             <a:spAutoFit/>
           </a:bodyPr>
           <a:lstStyle/>
@@ -7393,7 +7311,7 @@
 </file>
 
 <file path=ppt/slides/slide13.xml><?xml version="1.0" encoding="utf-8"?>
-<p:sld xmlns:a="http://schemas.openxmlformats.org/drawingml/2006/main" xmlns:p="http://schemas.openxmlformats.org/presentationml/2006/main" xmlns:r="http://schemas.openxmlformats.org/officeDocument/2006/relationships">
+<p:sld xmlns:a="http://schemas.openxmlformats.org/drawingml/2006/main" xmlns:r="http://schemas.openxmlformats.org/officeDocument/2006/relationships" xmlns:p="http://schemas.openxmlformats.org/presentationml/2006/main">
   <p:cSld>
     <p:spTree>
       <p:nvGrpSpPr>
@@ -7401,7 +7319,14 @@
         <p:cNvGrpSpPr/>
         <p:nvPr/>
       </p:nvGrpSpPr>
-      <p:grpSpPr/>
+      <p:grpSpPr>
+        <a:xfrm>
+          <a:off x="0" y="0"/>
+          <a:ext cx="0" cy="0"/>
+          <a:chOff x="0" y="0"/>
+          <a:chExt cx="0" cy="0"/>
+        </a:xfrm>
+      </p:grpSpPr>
       <p:sp>
         <p:nvSpPr>
           <p:cNvPr id="2" name="Rectangle 1"/>
@@ -7443,6 +7368,7 @@
           <a:lstStyle/>
           <a:p>
             <a:pPr algn="ctr"/>
+            <a:endParaRPr/>
           </a:p>
         </p:txBody>
       </p:sp>
@@ -7487,6 +7413,7 @@
           <a:lstStyle/>
           <a:p>
             <a:pPr algn="ctr"/>
+            <a:endParaRPr/>
           </a:p>
         </p:txBody>
       </p:sp>
@@ -7542,7 +7469,7 @@
           <a:noFill/>
         </p:spPr>
         <p:txBody>
-          <a:bodyPr wrap="square" lIns="0" rIns="0" tIns="0" bIns="0" anchor="t">
+          <a:bodyPr wrap="square" lIns="0" tIns="0" rIns="0" bIns="0" anchor="t">
             <a:spAutoFit/>
           </a:bodyPr>
           <a:lstStyle/>
@@ -7577,7 +7504,7 @@
           <a:noFill/>
         </p:spPr>
         <p:txBody>
-          <a:bodyPr wrap="square" lIns="0" rIns="0" tIns="0" bIns="0" anchor="t">
+          <a:bodyPr wrap="square" lIns="0" tIns="0" rIns="0" bIns="0" anchor="t">
             <a:spAutoFit/>
           </a:bodyPr>
           <a:lstStyle/>
@@ -7636,6 +7563,7 @@
           <a:lstStyle/>
           <a:p>
             <a:pPr algn="ctr"/>
+            <a:endParaRPr/>
           </a:p>
         </p:txBody>
       </p:sp>
@@ -7656,7 +7584,7 @@
           <a:noFill/>
         </p:spPr>
         <p:txBody>
-          <a:bodyPr wrap="square" lIns="0" rIns="0" tIns="0" bIns="0" anchor="ctr">
+          <a:bodyPr wrap="square" lIns="0" tIns="0" rIns="0" bIns="0" anchor="ctr">
             <a:spAutoFit/>
           </a:bodyPr>
           <a:lstStyle/>
@@ -7691,7 +7619,7 @@
           <a:noFill/>
         </p:spPr>
         <p:txBody>
-          <a:bodyPr wrap="square" lIns="0" rIns="0" tIns="0" bIns="0" anchor="ctr">
+          <a:bodyPr wrap="square" lIns="0" tIns="0" rIns="0" bIns="0" anchor="ctr">
             <a:spAutoFit/>
           </a:bodyPr>
           <a:lstStyle/>
@@ -7752,6 +7680,7 @@
           <a:lstStyle/>
           <a:p>
             <a:pPr algn="ctr"/>
+            <a:endParaRPr/>
           </a:p>
         </p:txBody>
       </p:sp>
@@ -7772,7 +7701,7 @@
           <a:noFill/>
         </p:spPr>
         <p:txBody>
-          <a:bodyPr wrap="square" lIns="0" rIns="0" tIns="0" bIns="0" anchor="ctr">
+          <a:bodyPr wrap="square" lIns="0" tIns="0" rIns="0" bIns="0" anchor="ctr">
             <a:spAutoFit/>
           </a:bodyPr>
           <a:lstStyle/>
@@ -7807,7 +7736,7 @@
           <a:noFill/>
         </p:spPr>
         <p:txBody>
-          <a:bodyPr wrap="square" lIns="0" rIns="0" tIns="0" bIns="0" anchor="ctr">
+          <a:bodyPr wrap="square" lIns="0" tIns="0" rIns="0" bIns="0" anchor="ctr">
             <a:spAutoFit/>
           </a:bodyPr>
           <a:lstStyle/>
@@ -7868,6 +7797,7 @@
           <a:lstStyle/>
           <a:p>
             <a:pPr algn="ctr"/>
+            <a:endParaRPr/>
           </a:p>
         </p:txBody>
       </p:sp>
@@ -7888,7 +7818,7 @@
           <a:noFill/>
         </p:spPr>
         <p:txBody>
-          <a:bodyPr wrap="square" lIns="0" rIns="0" tIns="0" bIns="0" anchor="ctr">
+          <a:bodyPr wrap="square" lIns="0" tIns="0" rIns="0" bIns="0" anchor="ctr">
             <a:spAutoFit/>
           </a:bodyPr>
           <a:lstStyle/>
@@ -7923,7 +7853,7 @@
           <a:noFill/>
         </p:spPr>
         <p:txBody>
-          <a:bodyPr wrap="square" lIns="0" rIns="0" tIns="0" bIns="0" anchor="ctr">
+          <a:bodyPr wrap="square" lIns="0" tIns="0" rIns="0" bIns="0" anchor="ctr">
             <a:spAutoFit/>
           </a:bodyPr>
           <a:lstStyle/>
@@ -7984,6 +7914,7 @@
           <a:lstStyle/>
           <a:p>
             <a:pPr algn="ctr"/>
+            <a:endParaRPr/>
           </a:p>
         </p:txBody>
       </p:sp>
@@ -8004,7 +7935,7 @@
           <a:noFill/>
         </p:spPr>
         <p:txBody>
-          <a:bodyPr wrap="square" lIns="0" rIns="0" tIns="0" bIns="0" anchor="ctr">
+          <a:bodyPr wrap="square" lIns="0" tIns="0" rIns="0" bIns="0" anchor="ctr">
             <a:spAutoFit/>
           </a:bodyPr>
           <a:lstStyle/>
@@ -8039,7 +7970,7 @@
           <a:noFill/>
         </p:spPr>
         <p:txBody>
-          <a:bodyPr wrap="square" lIns="0" rIns="0" tIns="0" bIns="0" anchor="ctr">
+          <a:bodyPr wrap="square" lIns="0" tIns="0" rIns="0" bIns="0" anchor="ctr">
             <a:spAutoFit/>
           </a:bodyPr>
           <a:lstStyle/>
@@ -8100,6 +8031,7 @@
           <a:lstStyle/>
           <a:p>
             <a:pPr algn="ctr"/>
+            <a:endParaRPr/>
           </a:p>
         </p:txBody>
       </p:sp>
@@ -8120,7 +8052,7 @@
           <a:noFill/>
         </p:spPr>
         <p:txBody>
-          <a:bodyPr wrap="square" lIns="0" rIns="0" tIns="0" bIns="0" anchor="ctr">
+          <a:bodyPr wrap="square" lIns="0" tIns="0" rIns="0" bIns="0" anchor="ctr">
             <a:spAutoFit/>
           </a:bodyPr>
           <a:lstStyle/>
@@ -8155,7 +8087,7 @@
           <a:noFill/>
         </p:spPr>
         <p:txBody>
-          <a:bodyPr wrap="square" lIns="0" rIns="0" tIns="0" bIns="0" anchor="ctr">
+          <a:bodyPr wrap="square" lIns="0" tIns="0" rIns="0" bIns="0" anchor="ctr">
             <a:spAutoFit/>
           </a:bodyPr>
           <a:lstStyle/>
@@ -8190,7 +8122,7 @@
           <a:noFill/>
         </p:spPr>
         <p:txBody>
-          <a:bodyPr wrap="square" lIns="0" rIns="0" tIns="0" bIns="0" anchor="t">
+          <a:bodyPr wrap="square" lIns="0" tIns="0" rIns="0" bIns="0" anchor="t">
             <a:spAutoFit/>
           </a:bodyPr>
           <a:lstStyle/>
@@ -8225,7 +8157,7 @@
           <a:noFill/>
         </p:spPr>
         <p:txBody>
-          <a:bodyPr wrap="square" lIns="0" rIns="0" tIns="0" bIns="0" anchor="t">
+          <a:bodyPr wrap="square" lIns="0" tIns="0" rIns="0" bIns="0" anchor="t">
             <a:spAutoFit/>
           </a:bodyPr>
           <a:lstStyle/>
@@ -8260,7 +8192,7 @@
           <a:noFill/>
         </p:spPr>
         <p:txBody>
-          <a:bodyPr wrap="square" lIns="0" rIns="0" tIns="0" bIns="0" anchor="t">
+          <a:bodyPr wrap="square" lIns="0" tIns="0" rIns="0" bIns="0" anchor="t">
             <a:spAutoFit/>
           </a:bodyPr>
           <a:lstStyle/>
@@ -8287,7 +8219,7 @@
 </file>
 
 <file path=ppt/slides/slide14.xml><?xml version="1.0" encoding="utf-8"?>
-<p:sld xmlns:a="http://schemas.openxmlformats.org/drawingml/2006/main" xmlns:p="http://schemas.openxmlformats.org/presentationml/2006/main" xmlns:r="http://schemas.openxmlformats.org/officeDocument/2006/relationships">
+<p:sld xmlns:a="http://schemas.openxmlformats.org/drawingml/2006/main" xmlns:r="http://schemas.openxmlformats.org/officeDocument/2006/relationships" xmlns:p="http://schemas.openxmlformats.org/presentationml/2006/main">
   <p:cSld>
     <p:spTree>
       <p:nvGrpSpPr>
@@ -8295,7 +8227,14 @@
         <p:cNvGrpSpPr/>
         <p:nvPr/>
       </p:nvGrpSpPr>
-      <p:grpSpPr/>
+      <p:grpSpPr>
+        <a:xfrm>
+          <a:off x="0" y="0"/>
+          <a:ext cx="0" cy="0"/>
+          <a:chOff x="0" y="0"/>
+          <a:chExt cx="0" cy="0"/>
+        </a:xfrm>
+      </p:grpSpPr>
       <p:sp>
         <p:nvSpPr>
           <p:cNvPr id="2" name="Rectangle 1"/>
@@ -8337,6 +8276,7 @@
           <a:lstStyle/>
           <a:p>
             <a:pPr algn="ctr"/>
+            <a:endParaRPr/>
           </a:p>
         </p:txBody>
       </p:sp>
@@ -8381,6 +8321,7 @@
           <a:lstStyle/>
           <a:p>
             <a:pPr algn="ctr"/>
+            <a:endParaRPr/>
           </a:p>
         </p:txBody>
       </p:sp>
@@ -8436,7 +8377,7 @@
           <a:noFill/>
         </p:spPr>
         <p:txBody>
-          <a:bodyPr wrap="square" lIns="0" rIns="0" tIns="0" bIns="0" anchor="t">
+          <a:bodyPr wrap="square" lIns="0" tIns="0" rIns="0" bIns="0" anchor="t">
             <a:spAutoFit/>
           </a:bodyPr>
           <a:lstStyle/>
@@ -8471,7 +8412,7 @@
           <a:noFill/>
         </p:spPr>
         <p:txBody>
-          <a:bodyPr wrap="square" lIns="0" rIns="0" tIns="0" bIns="0" anchor="t">
+          <a:bodyPr wrap="square" lIns="0" tIns="0" rIns="0" bIns="0" anchor="t">
             <a:spAutoFit/>
           </a:bodyPr>
           <a:lstStyle/>
@@ -8532,6 +8473,7 @@
           <a:lstStyle/>
           <a:p>
             <a:pPr algn="ctr"/>
+            <a:endParaRPr/>
           </a:p>
         </p:txBody>
       </p:sp>
@@ -8552,7 +8494,7 @@
           <a:noFill/>
         </p:spPr>
         <p:txBody>
-          <a:bodyPr wrap="square" lIns="0" rIns="0" tIns="0" bIns="0" anchor="ctr">
+          <a:bodyPr wrap="square" lIns="0" tIns="0" rIns="0" bIns="0" anchor="ctr">
             <a:spAutoFit/>
           </a:bodyPr>
           <a:lstStyle/>
@@ -8587,7 +8529,7 @@
           <a:noFill/>
         </p:spPr>
         <p:txBody>
-          <a:bodyPr wrap="square" lIns="0" rIns="0" tIns="0" bIns="0" anchor="ctr">
+          <a:bodyPr wrap="square" lIns="0" tIns="0" rIns="0" bIns="0" anchor="ctr">
             <a:spAutoFit/>
           </a:bodyPr>
           <a:lstStyle/>
@@ -8622,7 +8564,7 @@
           <a:noFill/>
         </p:spPr>
         <p:txBody>
-          <a:bodyPr wrap="square" lIns="0" rIns="0" tIns="0" bIns="0" anchor="ctr">
+          <a:bodyPr wrap="square" lIns="0" tIns="0" rIns="0" bIns="0" anchor="ctr">
             <a:spAutoFit/>
           </a:bodyPr>
           <a:lstStyle/>
@@ -8683,6 +8625,7 @@
           <a:lstStyle/>
           <a:p>
             <a:pPr algn="ctr"/>
+            <a:endParaRPr/>
           </a:p>
         </p:txBody>
       </p:sp>
@@ -8703,7 +8646,7 @@
           <a:noFill/>
         </p:spPr>
         <p:txBody>
-          <a:bodyPr wrap="square" lIns="0" rIns="0" tIns="0" bIns="0" anchor="t">
+          <a:bodyPr wrap="square" lIns="0" tIns="0" rIns="0" bIns="0" anchor="t">
             <a:spAutoFit/>
           </a:bodyPr>
           <a:lstStyle/>
@@ -8750,7 +8693,7 @@
           <a:noFill/>
         </p:spPr>
         <p:txBody>
-          <a:bodyPr wrap="square" lIns="0" rIns="0" tIns="0" bIns="0" anchor="t">
+          <a:bodyPr wrap="square" lIns="0" tIns="0" rIns="0" bIns="0" anchor="t">
             <a:spAutoFit/>
           </a:bodyPr>
           <a:lstStyle/>
@@ -8785,7 +8728,7 @@
           <a:noFill/>
         </p:spPr>
         <p:txBody>
-          <a:bodyPr wrap="square" lIns="0" rIns="0" tIns="0" bIns="0" anchor="t">
+          <a:bodyPr wrap="square" lIns="0" tIns="0" rIns="0" bIns="0" anchor="t">
             <a:spAutoFit/>
           </a:bodyPr>
           <a:lstStyle/>
@@ -8812,7 +8755,7 @@
 </file>
 
 <file path=ppt/slides/slide15.xml><?xml version="1.0" encoding="utf-8"?>
-<p:sld xmlns:a="http://schemas.openxmlformats.org/drawingml/2006/main" xmlns:p="http://schemas.openxmlformats.org/presentationml/2006/main" xmlns:r="http://schemas.openxmlformats.org/officeDocument/2006/relationships">
+<p:sld xmlns:a="http://schemas.openxmlformats.org/drawingml/2006/main" xmlns:r="http://schemas.openxmlformats.org/officeDocument/2006/relationships" xmlns:p="http://schemas.openxmlformats.org/presentationml/2006/main">
   <p:cSld>
     <p:spTree>
       <p:nvGrpSpPr>
@@ -8820,7 +8763,14 @@
         <p:cNvGrpSpPr/>
         <p:nvPr/>
       </p:nvGrpSpPr>
-      <p:grpSpPr/>
+      <p:grpSpPr>
+        <a:xfrm>
+          <a:off x="0" y="0"/>
+          <a:ext cx="0" cy="0"/>
+          <a:chOff x="0" y="0"/>
+          <a:chExt cx="0" cy="0"/>
+        </a:xfrm>
+      </p:grpSpPr>
       <p:sp>
         <p:nvSpPr>
           <p:cNvPr id="2" name="Rectangle 1"/>
@@ -8862,6 +8812,7 @@
           <a:lstStyle/>
           <a:p>
             <a:pPr algn="ctr"/>
+            <a:endParaRPr/>
           </a:p>
         </p:txBody>
       </p:sp>
@@ -8906,6 +8857,7 @@
           <a:lstStyle/>
           <a:p>
             <a:pPr algn="ctr"/>
+            <a:endParaRPr/>
           </a:p>
         </p:txBody>
       </p:sp>
@@ -8961,7 +8913,7 @@
           <a:noFill/>
         </p:spPr>
         <p:txBody>
-          <a:bodyPr wrap="square" lIns="0" rIns="0" tIns="0" bIns="0" anchor="t">
+          <a:bodyPr wrap="square" lIns="0" tIns="0" rIns="0" bIns="0" anchor="t">
             <a:spAutoFit/>
           </a:bodyPr>
           <a:lstStyle/>
@@ -8996,7 +8948,7 @@
           <a:noFill/>
         </p:spPr>
         <p:txBody>
-          <a:bodyPr wrap="square" lIns="0" rIns="0" tIns="0" bIns="0" anchor="t">
+          <a:bodyPr wrap="square" lIns="0" tIns="0" rIns="0" bIns="0" anchor="t">
             <a:spAutoFit/>
           </a:bodyPr>
           <a:lstStyle/>
@@ -9057,6 +9009,7 @@
           <a:lstStyle/>
           <a:p>
             <a:pPr algn="ctr"/>
+            <a:endParaRPr/>
           </a:p>
         </p:txBody>
       </p:sp>
@@ -9101,6 +9054,7 @@
           <a:lstStyle/>
           <a:p>
             <a:pPr algn="ctr"/>
+            <a:endParaRPr/>
           </a:p>
         </p:txBody>
       </p:sp>
@@ -9121,7 +9075,7 @@
           <a:noFill/>
         </p:spPr>
         <p:txBody>
-          <a:bodyPr wrap="square" lIns="0" rIns="0" tIns="0" bIns="0" anchor="t">
+          <a:bodyPr wrap="square" lIns="0" tIns="0" rIns="0" bIns="0" anchor="t">
             <a:spAutoFit/>
           </a:bodyPr>
           <a:lstStyle/>
@@ -9156,7 +9110,7 @@
           <a:noFill/>
         </p:spPr>
         <p:txBody>
-          <a:bodyPr wrap="square" lIns="0" rIns="0" tIns="0" bIns="0" anchor="t">
+          <a:bodyPr wrap="square" lIns="0" tIns="0" rIns="0" bIns="0" anchor="t">
             <a:spAutoFit/>
           </a:bodyPr>
           <a:lstStyle/>
@@ -9217,6 +9171,7 @@
           <a:lstStyle/>
           <a:p>
             <a:pPr algn="ctr"/>
+            <a:endParaRPr/>
           </a:p>
         </p:txBody>
       </p:sp>
@@ -9261,6 +9216,7 @@
           <a:lstStyle/>
           <a:p>
             <a:pPr algn="ctr"/>
+            <a:endParaRPr/>
           </a:p>
         </p:txBody>
       </p:sp>
@@ -9281,7 +9237,7 @@
           <a:noFill/>
         </p:spPr>
         <p:txBody>
-          <a:bodyPr wrap="square" lIns="0" rIns="0" tIns="0" bIns="0" anchor="t">
+          <a:bodyPr wrap="square" lIns="0" tIns="0" rIns="0" bIns="0" anchor="t">
             <a:spAutoFit/>
           </a:bodyPr>
           <a:lstStyle/>
@@ -9316,7 +9272,7 @@
           <a:noFill/>
         </p:spPr>
         <p:txBody>
-          <a:bodyPr wrap="square" lIns="0" rIns="0" tIns="0" bIns="0" anchor="t">
+          <a:bodyPr wrap="square" lIns="0" tIns="0" rIns="0" bIns="0" anchor="t">
             <a:spAutoFit/>
           </a:bodyPr>
           <a:lstStyle/>
@@ -9377,6 +9333,7 @@
           <a:lstStyle/>
           <a:p>
             <a:pPr algn="ctr"/>
+            <a:endParaRPr/>
           </a:p>
         </p:txBody>
       </p:sp>
@@ -9421,6 +9378,7 @@
           <a:lstStyle/>
           <a:p>
             <a:pPr algn="ctr"/>
+            <a:endParaRPr/>
           </a:p>
         </p:txBody>
       </p:sp>
@@ -9441,7 +9399,7 @@
           <a:noFill/>
         </p:spPr>
         <p:txBody>
-          <a:bodyPr wrap="square" lIns="0" rIns="0" tIns="0" bIns="0" anchor="t">
+          <a:bodyPr wrap="square" lIns="0" tIns="0" rIns="0" bIns="0" anchor="t">
             <a:spAutoFit/>
           </a:bodyPr>
           <a:lstStyle/>
@@ -9476,7 +9434,7 @@
           <a:noFill/>
         </p:spPr>
         <p:txBody>
-          <a:bodyPr wrap="square" lIns="0" rIns="0" tIns="0" bIns="0" anchor="t">
+          <a:bodyPr wrap="square" lIns="0" tIns="0" rIns="0" bIns="0" anchor="t">
             <a:spAutoFit/>
           </a:bodyPr>
           <a:lstStyle/>
@@ -9537,6 +9495,7 @@
           <a:lstStyle/>
           <a:p>
             <a:pPr algn="ctr"/>
+            <a:endParaRPr/>
           </a:p>
         </p:txBody>
       </p:sp>
@@ -9557,7 +9516,7 @@
           <a:noFill/>
         </p:spPr>
         <p:txBody>
-          <a:bodyPr wrap="square" lIns="0" rIns="0" tIns="0" bIns="0" anchor="t">
+          <a:bodyPr wrap="square" lIns="0" tIns="0" rIns="0" bIns="0" anchor="t">
             <a:spAutoFit/>
           </a:bodyPr>
           <a:lstStyle/>
@@ -9592,7 +9551,7 @@
           <a:noFill/>
         </p:spPr>
         <p:txBody>
-          <a:bodyPr wrap="square" lIns="0" rIns="0" tIns="0" bIns="0" anchor="t">
+          <a:bodyPr wrap="square" lIns="0" tIns="0" rIns="0" bIns="0" anchor="t">
             <a:spAutoFit/>
           </a:bodyPr>
           <a:lstStyle/>
@@ -9629,7 +9588,7 @@
           <a:noFill/>
         </p:spPr>
         <p:txBody>
-          <a:bodyPr wrap="square" lIns="0" rIns="0" tIns="0" bIns="0" anchor="t">
+          <a:bodyPr wrap="square" lIns="0" tIns="0" rIns="0" bIns="0" anchor="t">
             <a:spAutoFit/>
           </a:bodyPr>
           <a:lstStyle/>
@@ -9664,7 +9623,7 @@
           <a:noFill/>
         </p:spPr>
         <p:txBody>
-          <a:bodyPr wrap="square" lIns="0" rIns="0" tIns="0" bIns="0" anchor="t">
+          <a:bodyPr wrap="square" lIns="0" tIns="0" rIns="0" bIns="0" anchor="t">
             <a:spAutoFit/>
           </a:bodyPr>
           <a:lstStyle/>
@@ -9691,7 +9650,7 @@
 </file>
 
 <file path=ppt/slides/slide16.xml><?xml version="1.0" encoding="utf-8"?>
-<p:sld xmlns:a="http://schemas.openxmlformats.org/drawingml/2006/main" xmlns:p="http://schemas.openxmlformats.org/presentationml/2006/main" xmlns:r="http://schemas.openxmlformats.org/officeDocument/2006/relationships">
+<p:sld xmlns:a="http://schemas.openxmlformats.org/drawingml/2006/main" xmlns:r="http://schemas.openxmlformats.org/officeDocument/2006/relationships" xmlns:p="http://schemas.openxmlformats.org/presentationml/2006/main">
   <p:cSld>
     <p:spTree>
       <p:nvGrpSpPr>
@@ -9699,7 +9658,14 @@
         <p:cNvGrpSpPr/>
         <p:nvPr/>
       </p:nvGrpSpPr>
-      <p:grpSpPr/>
+      <p:grpSpPr>
+        <a:xfrm>
+          <a:off x="0" y="0"/>
+          <a:ext cx="0" cy="0"/>
+          <a:chOff x="0" y="0"/>
+          <a:chExt cx="0" cy="0"/>
+        </a:xfrm>
+      </p:grpSpPr>
       <p:sp>
         <p:nvSpPr>
           <p:cNvPr id="2" name="Rectangle 1"/>
@@ -9741,6 +9707,7 @@
           <a:lstStyle/>
           <a:p>
             <a:pPr algn="ctr"/>
+            <a:endParaRPr/>
           </a:p>
         </p:txBody>
       </p:sp>
@@ -9785,6 +9752,7 @@
           <a:lstStyle/>
           <a:p>
             <a:pPr algn="ctr"/>
+            <a:endParaRPr/>
           </a:p>
         </p:txBody>
       </p:sp>
@@ -9840,7 +9808,7 @@
           <a:noFill/>
         </p:spPr>
         <p:txBody>
-          <a:bodyPr wrap="square" lIns="0" rIns="0" tIns="0" bIns="0" anchor="t">
+          <a:bodyPr wrap="square" lIns="0" tIns="0" rIns="0" bIns="0" anchor="t">
             <a:spAutoFit/>
           </a:bodyPr>
           <a:lstStyle/>
@@ -9875,7 +9843,7 @@
           <a:noFill/>
         </p:spPr>
         <p:txBody>
-          <a:bodyPr wrap="square" lIns="0" rIns="0" tIns="0" bIns="0" anchor="t">
+          <a:bodyPr wrap="square" lIns="0" tIns="0" rIns="0" bIns="0" anchor="t">
             <a:spAutoFit/>
           </a:bodyPr>
           <a:lstStyle/>
@@ -9936,6 +9904,7 @@
           <a:lstStyle/>
           <a:p>
             <a:pPr algn="ctr"/>
+            <a:endParaRPr/>
           </a:p>
         </p:txBody>
       </p:sp>
@@ -9956,7 +9925,7 @@
           <a:noFill/>
         </p:spPr>
         <p:txBody>
-          <a:bodyPr wrap="square" lIns="0" rIns="0" tIns="0" bIns="0" anchor="t">
+          <a:bodyPr wrap="square" lIns="0" tIns="0" rIns="0" bIns="0" anchor="t">
             <a:spAutoFit/>
           </a:bodyPr>
           <a:lstStyle/>
@@ -9991,7 +9960,7 @@
           <a:noFill/>
         </p:spPr>
         <p:txBody>
-          <a:bodyPr wrap="square" lIns="0" rIns="0" tIns="0" bIns="0" anchor="t">
+          <a:bodyPr wrap="square" lIns="0" tIns="0" rIns="0" bIns="0" anchor="t">
             <a:spAutoFit/>
           </a:bodyPr>
           <a:lstStyle/>
@@ -10030,7 +9999,7 @@
           <a:noFill/>
         </p:spPr>
         <p:txBody>
-          <a:bodyPr wrap="square" lIns="0" rIns="0" tIns="0" bIns="0" anchor="t">
+          <a:bodyPr wrap="square" lIns="0" tIns="0" rIns="0" bIns="0" anchor="t">
             <a:spAutoFit/>
           </a:bodyPr>
           <a:lstStyle/>
@@ -10091,6 +10060,7 @@
           <a:lstStyle/>
           <a:p>
             <a:pPr algn="ctr"/>
+            <a:endParaRPr/>
           </a:p>
         </p:txBody>
       </p:sp>
@@ -10111,7 +10081,7 @@
           <a:noFill/>
         </p:spPr>
         <p:txBody>
-          <a:bodyPr wrap="square" lIns="0" rIns="0" tIns="0" bIns="0" anchor="t">
+          <a:bodyPr wrap="square" lIns="0" tIns="0" rIns="0" bIns="0" anchor="t">
             <a:spAutoFit/>
           </a:bodyPr>
           <a:lstStyle/>
@@ -10254,7 +10224,7 @@
           <a:noFill/>
         </p:spPr>
         <p:txBody>
-          <a:bodyPr wrap="square" lIns="0" rIns="0" tIns="0" bIns="0" anchor="t">
+          <a:bodyPr wrap="square" lIns="0" tIns="0" rIns="0" bIns="0" anchor="t">
             <a:spAutoFit/>
           </a:bodyPr>
           <a:lstStyle/>
@@ -10289,7 +10259,7 @@
           <a:noFill/>
         </p:spPr>
         <p:txBody>
-          <a:bodyPr wrap="square" lIns="0" rIns="0" tIns="0" bIns="0" anchor="t">
+          <a:bodyPr wrap="square" lIns="0" tIns="0" rIns="0" bIns="0" anchor="t">
             <a:spAutoFit/>
           </a:bodyPr>
           <a:lstStyle/>
@@ -10316,7 +10286,7 @@
 </file>
 
 <file path=ppt/slides/slide17.xml><?xml version="1.0" encoding="utf-8"?>
-<p:sld xmlns:a="http://schemas.openxmlformats.org/drawingml/2006/main" xmlns:p="http://schemas.openxmlformats.org/presentationml/2006/main" xmlns:r="http://schemas.openxmlformats.org/officeDocument/2006/relationships">
+<p:sld xmlns:a="http://schemas.openxmlformats.org/drawingml/2006/main" xmlns:r="http://schemas.openxmlformats.org/officeDocument/2006/relationships" xmlns:p="http://schemas.openxmlformats.org/presentationml/2006/main">
   <p:cSld>
     <p:spTree>
       <p:nvGrpSpPr>
@@ -10324,7 +10294,14 @@
         <p:cNvGrpSpPr/>
         <p:nvPr/>
       </p:nvGrpSpPr>
-      <p:grpSpPr/>
+      <p:grpSpPr>
+        <a:xfrm>
+          <a:off x="0" y="0"/>
+          <a:ext cx="0" cy="0"/>
+          <a:chOff x="0" y="0"/>
+          <a:chExt cx="0" cy="0"/>
+        </a:xfrm>
+      </p:grpSpPr>
       <p:sp>
         <p:nvSpPr>
           <p:cNvPr id="2" name="Rectangle 1"/>
@@ -10366,6 +10343,7 @@
           <a:lstStyle/>
           <a:p>
             <a:pPr algn="ctr"/>
+            <a:endParaRPr/>
           </a:p>
         </p:txBody>
       </p:sp>
@@ -10410,6 +10388,7 @@
           <a:lstStyle/>
           <a:p>
             <a:pPr algn="ctr"/>
+            <a:endParaRPr/>
           </a:p>
         </p:txBody>
       </p:sp>
@@ -10465,7 +10444,7 @@
           <a:noFill/>
         </p:spPr>
         <p:txBody>
-          <a:bodyPr wrap="square" lIns="0" rIns="0" tIns="0" bIns="0" anchor="t">
+          <a:bodyPr wrap="square" lIns="0" tIns="0" rIns="0" bIns="0" anchor="t">
             <a:spAutoFit/>
           </a:bodyPr>
           <a:lstStyle/>
@@ -10500,7 +10479,7 @@
           <a:noFill/>
         </p:spPr>
         <p:txBody>
-          <a:bodyPr wrap="square" lIns="0" rIns="0" tIns="0" bIns="0" anchor="t">
+          <a:bodyPr wrap="square" lIns="0" tIns="0" rIns="0" bIns="0" anchor="t">
             <a:spAutoFit/>
           </a:bodyPr>
           <a:lstStyle/>
@@ -10561,6 +10540,7 @@
           <a:lstStyle/>
           <a:p>
             <a:pPr algn="ctr"/>
+            <a:endParaRPr/>
           </a:p>
         </p:txBody>
       </p:sp>
@@ -10616,7 +10596,7 @@
           <a:noFill/>
         </p:spPr>
         <p:txBody>
-          <a:bodyPr wrap="square" lIns="0" rIns="0" tIns="0" bIns="0" anchor="ctr">
+          <a:bodyPr wrap="square" lIns="0" tIns="0" rIns="0" bIns="0" anchor="ctr">
             <a:spAutoFit/>
           </a:bodyPr>
           <a:lstStyle/>
@@ -10677,6 +10657,7 @@
           <a:lstStyle/>
           <a:p>
             <a:pPr algn="ctr"/>
+            <a:endParaRPr/>
           </a:p>
         </p:txBody>
       </p:sp>
@@ -10733,7 +10714,7 @@
           <a:noFill/>
         </p:spPr>
         <p:txBody>
-          <a:bodyPr wrap="square" lIns="0" rIns="0" tIns="0" bIns="0" anchor="ctr">
+          <a:bodyPr wrap="square" lIns="0" tIns="0" rIns="0" bIns="0" anchor="ctr">
             <a:spAutoFit/>
           </a:bodyPr>
           <a:lstStyle/>
@@ -10794,6 +10775,7 @@
           <a:lstStyle/>
           <a:p>
             <a:pPr algn="ctr"/>
+            <a:endParaRPr/>
           </a:p>
         </p:txBody>
       </p:sp>
@@ -10850,7 +10832,7 @@
           <a:noFill/>
         </p:spPr>
         <p:txBody>
-          <a:bodyPr wrap="square" lIns="0" rIns="0" tIns="0" bIns="0" anchor="ctr">
+          <a:bodyPr wrap="square" lIns="0" tIns="0" rIns="0" bIns="0" anchor="ctr">
             <a:spAutoFit/>
           </a:bodyPr>
           <a:lstStyle/>
@@ -10911,6 +10893,7 @@
           <a:lstStyle/>
           <a:p>
             <a:pPr algn="ctr"/>
+            <a:endParaRPr/>
           </a:p>
         </p:txBody>
       </p:sp>
@@ -10967,7 +10950,7 @@
           <a:noFill/>
         </p:spPr>
         <p:txBody>
-          <a:bodyPr wrap="square" lIns="0" rIns="0" tIns="0" bIns="0" anchor="ctr">
+          <a:bodyPr wrap="square" lIns="0" tIns="0" rIns="0" bIns="0" anchor="ctr">
             <a:spAutoFit/>
           </a:bodyPr>
           <a:lstStyle/>
@@ -11028,6 +11011,7 @@
           <a:lstStyle/>
           <a:p>
             <a:pPr algn="ctr"/>
+            <a:endParaRPr/>
           </a:p>
         </p:txBody>
       </p:sp>
@@ -11084,7 +11068,7 @@
           <a:noFill/>
         </p:spPr>
         <p:txBody>
-          <a:bodyPr wrap="square" lIns="0" rIns="0" tIns="0" bIns="0" anchor="t">
+          <a:bodyPr wrap="square" lIns="0" tIns="0" rIns="0" bIns="0" anchor="t">
             <a:spAutoFit/>
           </a:bodyPr>
           <a:lstStyle/>
@@ -11145,6 +11129,7 @@
           <a:lstStyle/>
           <a:p>
             <a:pPr algn="ctr"/>
+            <a:endParaRPr/>
           </a:p>
         </p:txBody>
       </p:sp>
@@ -11165,7 +11150,7 @@
           <a:noFill/>
         </p:spPr>
         <p:txBody>
-          <a:bodyPr wrap="square" lIns="0" rIns="0" tIns="0" bIns="0" anchor="t">
+          <a:bodyPr wrap="square" lIns="0" tIns="0" rIns="0" bIns="0" anchor="t">
             <a:spAutoFit/>
           </a:bodyPr>
           <a:lstStyle/>
@@ -11200,7 +11185,7 @@
           <a:noFill/>
         </p:spPr>
         <p:txBody>
-          <a:bodyPr wrap="square" lIns="0" rIns="0" tIns="0" bIns="0" anchor="t">
+          <a:bodyPr wrap="square" lIns="0" tIns="0" rIns="0" bIns="0" anchor="t">
             <a:spAutoFit/>
           </a:bodyPr>
           <a:lstStyle/>
@@ -11238,7 +11223,7 @@
           <a:noFill/>
         </p:spPr>
         <p:txBody>
-          <a:bodyPr wrap="square" lIns="0" rIns="0" tIns="0" bIns="0" anchor="t">
+          <a:bodyPr wrap="square" lIns="0" tIns="0" rIns="0" bIns="0" anchor="t">
             <a:spAutoFit/>
           </a:bodyPr>
           <a:lstStyle/>
@@ -11273,7 +11258,7 @@
           <a:noFill/>
         </p:spPr>
         <p:txBody>
-          <a:bodyPr wrap="square" lIns="0" rIns="0" tIns="0" bIns="0" anchor="t">
+          <a:bodyPr wrap="square" lIns="0" tIns="0" rIns="0" bIns="0" anchor="t">
             <a:spAutoFit/>
           </a:bodyPr>
           <a:lstStyle/>
@@ -11300,7 +11285,7 @@
 </file>
 
 <file path=ppt/slides/slide18.xml><?xml version="1.0" encoding="utf-8"?>
-<p:sld xmlns:a="http://schemas.openxmlformats.org/drawingml/2006/main" xmlns:p="http://schemas.openxmlformats.org/presentationml/2006/main" xmlns:r="http://schemas.openxmlformats.org/officeDocument/2006/relationships">
+<p:sld xmlns:a="http://schemas.openxmlformats.org/drawingml/2006/main" xmlns:r="http://schemas.openxmlformats.org/officeDocument/2006/relationships" xmlns:p="http://schemas.openxmlformats.org/presentationml/2006/main">
   <p:cSld>
     <p:spTree>
       <p:nvGrpSpPr>
@@ -11308,7 +11293,14 @@
         <p:cNvGrpSpPr/>
         <p:nvPr/>
       </p:nvGrpSpPr>
-      <p:grpSpPr/>
+      <p:grpSpPr>
+        <a:xfrm>
+          <a:off x="0" y="0"/>
+          <a:ext cx="0" cy="0"/>
+          <a:chOff x="0" y="0"/>
+          <a:chExt cx="0" cy="0"/>
+        </a:xfrm>
+      </p:grpSpPr>
       <p:sp>
         <p:nvSpPr>
           <p:cNvPr id="2" name="Rectangle 1"/>
@@ -11350,6 +11342,7 @@
           <a:lstStyle/>
           <a:p>
             <a:pPr algn="ctr"/>
+            <a:endParaRPr/>
           </a:p>
         </p:txBody>
       </p:sp>
@@ -11394,6 +11387,7 @@
           <a:lstStyle/>
           <a:p>
             <a:pPr algn="ctr"/>
+            <a:endParaRPr/>
           </a:p>
         </p:txBody>
       </p:sp>
@@ -11449,7 +11443,7 @@
           <a:noFill/>
         </p:spPr>
         <p:txBody>
-          <a:bodyPr wrap="square" lIns="0" rIns="0" tIns="0" bIns="0" anchor="t">
+          <a:bodyPr wrap="square" lIns="0" tIns="0" rIns="0" bIns="0" anchor="t">
             <a:spAutoFit/>
           </a:bodyPr>
           <a:lstStyle/>
@@ -11484,7 +11478,7 @@
           <a:noFill/>
         </p:spPr>
         <p:txBody>
-          <a:bodyPr wrap="square" lIns="0" rIns="0" tIns="0" bIns="0" anchor="t">
+          <a:bodyPr wrap="square" lIns="0" tIns="0" rIns="0" bIns="0" anchor="t">
             <a:spAutoFit/>
           </a:bodyPr>
           <a:lstStyle/>
@@ -11545,6 +11539,7 @@
           <a:lstStyle/>
           <a:p>
             <a:pPr algn="ctr"/>
+            <a:endParaRPr/>
           </a:p>
         </p:txBody>
       </p:sp>
@@ -11565,7 +11560,7 @@
           <a:noFill/>
         </p:spPr>
         <p:txBody>
-          <a:bodyPr wrap="square" lIns="0" rIns="0" tIns="0" bIns="0" anchor="t">
+          <a:bodyPr wrap="square" lIns="0" tIns="0" rIns="0" bIns="0" anchor="t">
             <a:spAutoFit/>
           </a:bodyPr>
           <a:lstStyle/>
@@ -11734,6 +11729,7 @@
           <a:lstStyle/>
           <a:p>
             <a:pPr algn="ctr"/>
+            <a:endParaRPr/>
           </a:p>
         </p:txBody>
       </p:sp>
@@ -11754,7 +11750,7 @@
           <a:noFill/>
         </p:spPr>
         <p:txBody>
-          <a:bodyPr wrap="square" lIns="0" rIns="0" tIns="0" bIns="0" anchor="t">
+          <a:bodyPr wrap="square" lIns="0" tIns="0" rIns="0" bIns="0" anchor="t">
             <a:spAutoFit/>
           </a:bodyPr>
           <a:lstStyle/>
@@ -11789,7 +11785,7 @@
           <a:noFill/>
         </p:spPr>
         <p:txBody>
-          <a:bodyPr wrap="square" lIns="0" rIns="0" tIns="0" bIns="0" anchor="t">
+          <a:bodyPr wrap="square" lIns="0" tIns="0" rIns="0" bIns="0" anchor="t">
             <a:spAutoFit/>
           </a:bodyPr>
           <a:lstStyle/>
@@ -11852,6 +11848,7 @@
           <a:lstStyle/>
           <a:p>
             <a:pPr algn="ctr"/>
+            <a:endParaRPr/>
           </a:p>
         </p:txBody>
       </p:sp>
@@ -11872,7 +11869,7 @@
           <a:noFill/>
         </p:spPr>
         <p:txBody>
-          <a:bodyPr wrap="square" lIns="0" rIns="0" tIns="0" bIns="0" anchor="t">
+          <a:bodyPr wrap="square" lIns="0" tIns="0" rIns="0" bIns="0" anchor="t">
             <a:spAutoFit/>
           </a:bodyPr>
           <a:lstStyle/>
@@ -11907,7 +11904,7 @@
           <a:noFill/>
         </p:spPr>
         <p:txBody>
-          <a:bodyPr wrap="square" lIns="0" rIns="0" tIns="0" bIns="0" anchor="t">
+          <a:bodyPr wrap="square" lIns="0" tIns="0" rIns="0" bIns="0" anchor="t">
             <a:spAutoFit/>
           </a:bodyPr>
           <a:lstStyle/>
@@ -11944,7 +11941,7 @@
           <a:noFill/>
         </p:spPr>
         <p:txBody>
-          <a:bodyPr wrap="square" lIns="0" rIns="0" tIns="0" bIns="0" anchor="t">
+          <a:bodyPr wrap="square" lIns="0" tIns="0" rIns="0" bIns="0" anchor="t">
             <a:spAutoFit/>
           </a:bodyPr>
           <a:lstStyle/>
@@ -11979,7 +11976,7 @@
           <a:noFill/>
         </p:spPr>
         <p:txBody>
-          <a:bodyPr wrap="square" lIns="0" rIns="0" tIns="0" bIns="0" anchor="t">
+          <a:bodyPr wrap="square" lIns="0" tIns="0" rIns="0" bIns="0" anchor="t">
             <a:spAutoFit/>
           </a:bodyPr>
           <a:lstStyle/>
@@ -12006,7 +12003,7 @@
 </file>
 
 <file path=ppt/slides/slide19.xml><?xml version="1.0" encoding="utf-8"?>
-<p:sld xmlns:a="http://schemas.openxmlformats.org/drawingml/2006/main" xmlns:p="http://schemas.openxmlformats.org/presentationml/2006/main" xmlns:r="http://schemas.openxmlformats.org/officeDocument/2006/relationships">
+<p:sld xmlns:a="http://schemas.openxmlformats.org/drawingml/2006/main" xmlns:r="http://schemas.openxmlformats.org/officeDocument/2006/relationships" xmlns:p="http://schemas.openxmlformats.org/presentationml/2006/main">
   <p:cSld>
     <p:spTree>
       <p:nvGrpSpPr>
@@ -12014,7 +12011,14 @@
         <p:cNvGrpSpPr/>
         <p:nvPr/>
       </p:nvGrpSpPr>
-      <p:grpSpPr/>
+      <p:grpSpPr>
+        <a:xfrm>
+          <a:off x="0" y="0"/>
+          <a:ext cx="0" cy="0"/>
+          <a:chOff x="0" y="0"/>
+          <a:chExt cx="0" cy="0"/>
+        </a:xfrm>
+      </p:grpSpPr>
       <p:sp>
         <p:nvSpPr>
           <p:cNvPr id="2" name="Rectangle 1"/>
@@ -12056,6 +12060,7 @@
           <a:lstStyle/>
           <a:p>
             <a:pPr algn="ctr"/>
+            <a:endParaRPr/>
           </a:p>
         </p:txBody>
       </p:sp>
@@ -12076,7 +12081,7 @@
           <a:noFill/>
         </p:spPr>
         <p:txBody>
-          <a:bodyPr wrap="square" lIns="0" rIns="0" tIns="0" bIns="0" anchor="t">
+          <a:bodyPr wrap="square" lIns="0" tIns="0" rIns="0" bIns="0" anchor="t">
             <a:spAutoFit/>
           </a:bodyPr>
           <a:lstStyle/>
@@ -12111,7 +12116,7 @@
           <a:noFill/>
         </p:spPr>
         <p:txBody>
-          <a:bodyPr wrap="square" lIns="0" rIns="0" tIns="0" bIns="0" anchor="t">
+          <a:bodyPr wrap="square" lIns="0" tIns="0" rIns="0" bIns="0" anchor="t">
             <a:spAutoFit/>
           </a:bodyPr>
           <a:lstStyle/>
@@ -12170,6 +12175,7 @@
           <a:lstStyle/>
           <a:p>
             <a:pPr algn="ctr"/>
+            <a:endParaRPr/>
           </a:p>
         </p:txBody>
       </p:sp>
@@ -12216,6 +12222,7 @@
           <a:lstStyle/>
           <a:p>
             <a:pPr algn="ctr"/>
+            <a:endParaRPr/>
           </a:p>
         </p:txBody>
       </p:sp>
@@ -12236,7 +12243,7 @@
           <a:noFill/>
         </p:spPr>
         <p:txBody>
-          <a:bodyPr wrap="square" lIns="0" rIns="0" tIns="0" bIns="0" anchor="ctr">
+          <a:bodyPr wrap="square" lIns="0" tIns="0" rIns="0" bIns="0" anchor="ctr">
             <a:spAutoFit/>
           </a:bodyPr>
           <a:lstStyle/>
@@ -12297,6 +12304,7 @@
           <a:lstStyle/>
           <a:p>
             <a:pPr algn="ctr"/>
+            <a:endParaRPr/>
           </a:p>
         </p:txBody>
       </p:sp>
@@ -12317,7 +12325,7 @@
           <a:noFill/>
         </p:spPr>
         <p:txBody>
-          <a:bodyPr wrap="square" lIns="0" rIns="0" tIns="0" bIns="0" anchor="ctr">
+          <a:bodyPr wrap="square" lIns="0" tIns="0" rIns="0" bIns="0" anchor="ctr">
             <a:spAutoFit/>
           </a:bodyPr>
           <a:lstStyle/>
@@ -12352,7 +12360,7 @@
           <a:noFill/>
         </p:spPr>
         <p:txBody>
-          <a:bodyPr wrap="square" lIns="0" rIns="0" tIns="0" bIns="0" anchor="ctr">
+          <a:bodyPr wrap="square" lIns="0" tIns="0" rIns="0" bIns="0" anchor="ctr">
             <a:spAutoFit/>
           </a:bodyPr>
           <a:lstStyle/>
@@ -12387,7 +12395,7 @@
           <a:noFill/>
         </p:spPr>
         <p:txBody>
-          <a:bodyPr wrap="square" lIns="0" rIns="0" tIns="0" bIns="0" anchor="ctr">
+          <a:bodyPr wrap="square" lIns="0" tIns="0" rIns="0" bIns="0" anchor="ctr">
             <a:spAutoFit/>
           </a:bodyPr>
           <a:lstStyle/>
@@ -12448,6 +12456,7 @@
           <a:lstStyle/>
           <a:p>
             <a:pPr algn="ctr"/>
+            <a:endParaRPr/>
           </a:p>
         </p:txBody>
       </p:sp>
@@ -12468,7 +12477,7 @@
           <a:noFill/>
         </p:spPr>
         <p:txBody>
-          <a:bodyPr wrap="square" lIns="0" rIns="0" tIns="0" bIns="0" anchor="ctr">
+          <a:bodyPr wrap="square" lIns="0" tIns="0" rIns="0" bIns="0" anchor="ctr">
             <a:spAutoFit/>
           </a:bodyPr>
           <a:lstStyle/>
@@ -12503,7 +12512,7 @@
           <a:noFill/>
         </p:spPr>
         <p:txBody>
-          <a:bodyPr wrap="square" lIns="0" rIns="0" tIns="0" bIns="0" anchor="ctr">
+          <a:bodyPr wrap="square" lIns="0" tIns="0" rIns="0" bIns="0" anchor="ctr">
             <a:spAutoFit/>
           </a:bodyPr>
           <a:lstStyle/>
@@ -12538,7 +12547,7 @@
           <a:noFill/>
         </p:spPr>
         <p:txBody>
-          <a:bodyPr wrap="square" lIns="0" rIns="0" tIns="0" bIns="0" anchor="ctr">
+          <a:bodyPr wrap="square" lIns="0" tIns="0" rIns="0" bIns="0" anchor="ctr">
             <a:spAutoFit/>
           </a:bodyPr>
           <a:lstStyle/>
@@ -12599,6 +12608,7 @@
           <a:lstStyle/>
           <a:p>
             <a:pPr algn="ctr"/>
+            <a:endParaRPr/>
           </a:p>
         </p:txBody>
       </p:sp>
@@ -12619,7 +12629,7 @@
           <a:noFill/>
         </p:spPr>
         <p:txBody>
-          <a:bodyPr wrap="square" lIns="0" rIns="0" tIns="0" bIns="0" anchor="ctr">
+          <a:bodyPr wrap="square" lIns="0" tIns="0" rIns="0" bIns="0" anchor="ctr">
             <a:spAutoFit/>
           </a:bodyPr>
           <a:lstStyle/>
@@ -12654,7 +12664,7 @@
           <a:noFill/>
         </p:spPr>
         <p:txBody>
-          <a:bodyPr wrap="square" lIns="0" rIns="0" tIns="0" bIns="0" anchor="ctr">
+          <a:bodyPr wrap="square" lIns="0" tIns="0" rIns="0" bIns="0" anchor="ctr">
             <a:spAutoFit/>
           </a:bodyPr>
           <a:lstStyle/>
@@ -12689,7 +12699,7 @@
           <a:noFill/>
         </p:spPr>
         <p:txBody>
-          <a:bodyPr wrap="square" lIns="0" rIns="0" tIns="0" bIns="0" anchor="ctr">
+          <a:bodyPr wrap="square" lIns="0" tIns="0" rIns="0" bIns="0" anchor="ctr">
             <a:spAutoFit/>
           </a:bodyPr>
           <a:lstStyle/>
@@ -12750,6 +12760,7 @@
           <a:lstStyle/>
           <a:p>
             <a:pPr algn="ctr"/>
+            <a:endParaRPr/>
           </a:p>
         </p:txBody>
       </p:sp>
@@ -12770,7 +12781,7 @@
           <a:noFill/>
         </p:spPr>
         <p:txBody>
-          <a:bodyPr wrap="square" lIns="0" rIns="0" tIns="0" bIns="0" anchor="ctr">
+          <a:bodyPr wrap="square" lIns="0" tIns="0" rIns="0" bIns="0" anchor="ctr">
             <a:spAutoFit/>
           </a:bodyPr>
           <a:lstStyle/>
@@ -12805,7 +12816,7 @@
           <a:noFill/>
         </p:spPr>
         <p:txBody>
-          <a:bodyPr wrap="square" lIns="0" rIns="0" tIns="0" bIns="0" anchor="ctr">
+          <a:bodyPr wrap="square" lIns="0" tIns="0" rIns="0" bIns="0" anchor="ctr">
             <a:spAutoFit/>
           </a:bodyPr>
           <a:lstStyle/>
@@ -12840,7 +12851,7 @@
           <a:noFill/>
         </p:spPr>
         <p:txBody>
-          <a:bodyPr wrap="square" lIns="0" rIns="0" tIns="0" bIns="0" anchor="ctr">
+          <a:bodyPr wrap="square" lIns="0" tIns="0" rIns="0" bIns="0" anchor="ctr">
             <a:spAutoFit/>
           </a:bodyPr>
           <a:lstStyle/>
@@ -12901,6 +12912,7 @@
           <a:lstStyle/>
           <a:p>
             <a:pPr algn="ctr"/>
+            <a:endParaRPr/>
           </a:p>
         </p:txBody>
       </p:sp>
@@ -12921,7 +12933,7 @@
           <a:noFill/>
         </p:spPr>
         <p:txBody>
-          <a:bodyPr wrap="square" lIns="0" rIns="0" tIns="0" bIns="0" anchor="ctr">
+          <a:bodyPr wrap="square" lIns="0" tIns="0" rIns="0" bIns="0" anchor="ctr">
             <a:spAutoFit/>
           </a:bodyPr>
           <a:lstStyle/>
@@ -12956,7 +12968,7 @@
           <a:noFill/>
         </p:spPr>
         <p:txBody>
-          <a:bodyPr wrap="square" lIns="0" rIns="0" tIns="0" bIns="0" anchor="ctr">
+          <a:bodyPr wrap="square" lIns="0" tIns="0" rIns="0" bIns="0" anchor="ctr">
             <a:spAutoFit/>
           </a:bodyPr>
           <a:lstStyle/>
@@ -12991,7 +13003,7 @@
           <a:noFill/>
         </p:spPr>
         <p:txBody>
-          <a:bodyPr wrap="square" lIns="0" rIns="0" tIns="0" bIns="0" anchor="ctr">
+          <a:bodyPr wrap="square" lIns="0" tIns="0" rIns="0" bIns="0" anchor="ctr">
             <a:spAutoFit/>
           </a:bodyPr>
           <a:lstStyle/>
@@ -13052,6 +13064,7 @@
           <a:lstStyle/>
           <a:p>
             <a:pPr algn="ctr"/>
+            <a:endParaRPr/>
           </a:p>
         </p:txBody>
       </p:sp>
@@ -13072,7 +13085,7 @@
           <a:noFill/>
         </p:spPr>
         <p:txBody>
-          <a:bodyPr wrap="square" lIns="0" rIns="0" tIns="0" bIns="0" anchor="ctr">
+          <a:bodyPr wrap="square" lIns="0" tIns="0" rIns="0" bIns="0" anchor="ctr">
             <a:spAutoFit/>
           </a:bodyPr>
           <a:lstStyle/>
@@ -13107,7 +13120,7 @@
           <a:noFill/>
         </p:spPr>
         <p:txBody>
-          <a:bodyPr wrap="square" lIns="0" rIns="0" tIns="0" bIns="0" anchor="ctr">
+          <a:bodyPr wrap="square" lIns="0" tIns="0" rIns="0" bIns="0" anchor="ctr">
             <a:spAutoFit/>
           </a:bodyPr>
           <a:lstStyle/>
@@ -13142,7 +13155,7 @@
           <a:noFill/>
         </p:spPr>
         <p:txBody>
-          <a:bodyPr wrap="square" lIns="0" rIns="0" tIns="0" bIns="0" anchor="ctr">
+          <a:bodyPr wrap="square" lIns="0" tIns="0" rIns="0" bIns="0" anchor="ctr">
             <a:spAutoFit/>
           </a:bodyPr>
           <a:lstStyle/>
@@ -13203,6 +13216,7 @@
           <a:lstStyle/>
           <a:p>
             <a:pPr algn="ctr"/>
+            <a:endParaRPr/>
           </a:p>
         </p:txBody>
       </p:sp>
@@ -13223,7 +13237,7 @@
           <a:noFill/>
         </p:spPr>
         <p:txBody>
-          <a:bodyPr wrap="square" lIns="0" rIns="0" tIns="0" bIns="0" anchor="ctr">
+          <a:bodyPr wrap="square" lIns="0" tIns="0" rIns="0" bIns="0" anchor="ctr">
             <a:spAutoFit/>
           </a:bodyPr>
           <a:lstStyle/>
@@ -13258,7 +13272,7 @@
           <a:noFill/>
         </p:spPr>
         <p:txBody>
-          <a:bodyPr wrap="square" lIns="0" rIns="0" tIns="0" bIns="0" anchor="ctr">
+          <a:bodyPr wrap="square" lIns="0" tIns="0" rIns="0" bIns="0" anchor="ctr">
             <a:spAutoFit/>
           </a:bodyPr>
           <a:lstStyle/>
@@ -13293,7 +13307,7 @@
           <a:noFill/>
         </p:spPr>
         <p:txBody>
-          <a:bodyPr wrap="square" lIns="0" rIns="0" tIns="0" bIns="0" anchor="ctr">
+          <a:bodyPr wrap="square" lIns="0" tIns="0" rIns="0" bIns="0" anchor="ctr">
             <a:spAutoFit/>
           </a:bodyPr>
           <a:lstStyle/>
@@ -13328,7 +13342,7 @@
           <a:noFill/>
         </p:spPr>
         <p:txBody>
-          <a:bodyPr wrap="square" lIns="0" rIns="0" tIns="0" bIns="0" anchor="t">
+          <a:bodyPr wrap="square" lIns="0" tIns="0" rIns="0" bIns="0" anchor="t">
             <a:spAutoFit/>
           </a:bodyPr>
           <a:lstStyle/>
@@ -13363,7 +13377,7 @@
           <a:noFill/>
         </p:spPr>
         <p:txBody>
-          <a:bodyPr wrap="square" lIns="0" rIns="0" tIns="0" bIns="0" anchor="t">
+          <a:bodyPr wrap="square" lIns="0" tIns="0" rIns="0" bIns="0" anchor="t">
             <a:spAutoFit/>
           </a:bodyPr>
           <a:lstStyle/>
@@ -13390,7 +13404,7 @@
 </file>
 
 <file path=ppt/slides/slide2.xml><?xml version="1.0" encoding="utf-8"?>
-<p:sld xmlns:a="http://schemas.openxmlformats.org/drawingml/2006/main" xmlns:p="http://schemas.openxmlformats.org/presentationml/2006/main" xmlns:r="http://schemas.openxmlformats.org/officeDocument/2006/relationships">
+<p:sld xmlns:a="http://schemas.openxmlformats.org/drawingml/2006/main" xmlns:r="http://schemas.openxmlformats.org/officeDocument/2006/relationships" xmlns:p="http://schemas.openxmlformats.org/presentationml/2006/main">
   <p:cSld>
     <p:spTree>
       <p:nvGrpSpPr>
@@ -13398,7 +13412,14 @@
         <p:cNvGrpSpPr/>
         <p:nvPr/>
       </p:nvGrpSpPr>
-      <p:grpSpPr/>
+      <p:grpSpPr>
+        <a:xfrm>
+          <a:off x="0" y="0"/>
+          <a:ext cx="0" cy="0"/>
+          <a:chOff x="0" y="0"/>
+          <a:chExt cx="0" cy="0"/>
+        </a:xfrm>
+      </p:grpSpPr>
       <p:sp>
         <p:nvSpPr>
           <p:cNvPr id="2" name="Rectangle 1"/>
@@ -13440,6 +13461,7 @@
           <a:lstStyle/>
           <a:p>
             <a:pPr algn="ctr"/>
+            <a:endParaRPr/>
           </a:p>
         </p:txBody>
       </p:sp>
@@ -13460,7 +13482,7 @@
           <a:noFill/>
         </p:spPr>
         <p:txBody>
-          <a:bodyPr wrap="square" lIns="0" rIns="0" tIns="0" bIns="0" anchor="t">
+          <a:bodyPr wrap="square" lIns="0" tIns="0" rIns="0" bIns="0" anchor="t">
             <a:spAutoFit/>
           </a:bodyPr>
           <a:lstStyle/>
@@ -13519,6 +13541,7 @@
           <a:lstStyle/>
           <a:p>
             <a:pPr algn="ctr"/>
+            <a:endParaRPr/>
           </a:p>
         </p:txBody>
       </p:sp>
@@ -13565,6 +13588,7 @@
           <a:lstStyle/>
           <a:p>
             <a:pPr algn="ctr"/>
+            <a:endParaRPr/>
           </a:p>
         </p:txBody>
       </p:sp>
@@ -13609,6 +13633,7 @@
           <a:lstStyle/>
           <a:p>
             <a:pPr algn="ctr"/>
+            <a:endParaRPr/>
           </a:p>
         </p:txBody>
       </p:sp>
@@ -13629,7 +13654,7 @@
           <a:noFill/>
         </p:spPr>
         <p:txBody>
-          <a:bodyPr wrap="square" lIns="0" rIns="0" tIns="0" bIns="0" anchor="ctr">
+          <a:bodyPr wrap="square" lIns="0" tIns="0" rIns="0" bIns="0" anchor="ctr">
             <a:spAutoFit/>
           </a:bodyPr>
           <a:lstStyle/>
@@ -13664,7 +13689,7 @@
           <a:noFill/>
         </p:spPr>
         <p:txBody>
-          <a:bodyPr wrap="square" lIns="0" rIns="0" tIns="0" bIns="0" anchor="t">
+          <a:bodyPr wrap="square" lIns="0" tIns="0" rIns="0" bIns="0" anchor="t">
             <a:spAutoFit/>
           </a:bodyPr>
           <a:lstStyle/>
@@ -13699,7 +13724,7 @@
           <a:noFill/>
         </p:spPr>
         <p:txBody>
-          <a:bodyPr wrap="square" lIns="0" rIns="0" tIns="0" bIns="0" anchor="t">
+          <a:bodyPr wrap="square" lIns="0" tIns="0" rIns="0" bIns="0" anchor="t">
             <a:spAutoFit/>
           </a:bodyPr>
           <a:lstStyle/>
@@ -13760,6 +13785,7 @@
           <a:lstStyle/>
           <a:p>
             <a:pPr algn="ctr"/>
+            <a:endParaRPr/>
           </a:p>
         </p:txBody>
       </p:sp>
@@ -13804,6 +13830,7 @@
           <a:lstStyle/>
           <a:p>
             <a:pPr algn="ctr"/>
+            <a:endParaRPr/>
           </a:p>
         </p:txBody>
       </p:sp>
@@ -13824,7 +13851,7 @@
           <a:noFill/>
         </p:spPr>
         <p:txBody>
-          <a:bodyPr wrap="square" lIns="0" rIns="0" tIns="0" bIns="0" anchor="ctr">
+          <a:bodyPr wrap="square" lIns="0" tIns="0" rIns="0" bIns="0" anchor="ctr">
             <a:spAutoFit/>
           </a:bodyPr>
           <a:lstStyle/>
@@ -13859,7 +13886,7 @@
           <a:noFill/>
         </p:spPr>
         <p:txBody>
-          <a:bodyPr wrap="square" lIns="0" rIns="0" tIns="0" bIns="0" anchor="t">
+          <a:bodyPr wrap="square" lIns="0" tIns="0" rIns="0" bIns="0" anchor="t">
             <a:spAutoFit/>
           </a:bodyPr>
           <a:lstStyle/>
@@ -13894,7 +13921,7 @@
           <a:noFill/>
         </p:spPr>
         <p:txBody>
-          <a:bodyPr wrap="square" lIns="0" rIns="0" tIns="0" bIns="0" anchor="t">
+          <a:bodyPr wrap="square" lIns="0" tIns="0" rIns="0" bIns="0" anchor="t">
             <a:spAutoFit/>
           </a:bodyPr>
           <a:lstStyle/>
@@ -13955,6 +13982,7 @@
           <a:lstStyle/>
           <a:p>
             <a:pPr algn="ctr"/>
+            <a:endParaRPr/>
           </a:p>
         </p:txBody>
       </p:sp>
@@ -13999,6 +14027,7 @@
           <a:lstStyle/>
           <a:p>
             <a:pPr algn="ctr"/>
+            <a:endParaRPr/>
           </a:p>
         </p:txBody>
       </p:sp>
@@ -14019,7 +14048,7 @@
           <a:noFill/>
         </p:spPr>
         <p:txBody>
-          <a:bodyPr wrap="square" lIns="0" rIns="0" tIns="0" bIns="0" anchor="ctr">
+          <a:bodyPr wrap="square" lIns="0" tIns="0" rIns="0" bIns="0" anchor="ctr">
             <a:spAutoFit/>
           </a:bodyPr>
           <a:lstStyle/>
@@ -14054,7 +14083,7 @@
           <a:noFill/>
         </p:spPr>
         <p:txBody>
-          <a:bodyPr wrap="square" lIns="0" rIns="0" tIns="0" bIns="0" anchor="t">
+          <a:bodyPr wrap="square" lIns="0" tIns="0" rIns="0" bIns="0" anchor="t">
             <a:spAutoFit/>
           </a:bodyPr>
           <a:lstStyle/>
@@ -14089,7 +14118,7 @@
           <a:noFill/>
         </p:spPr>
         <p:txBody>
-          <a:bodyPr wrap="square" lIns="0" rIns="0" tIns="0" bIns="0" anchor="t">
+          <a:bodyPr wrap="square" lIns="0" tIns="0" rIns="0" bIns="0" anchor="t">
             <a:spAutoFit/>
           </a:bodyPr>
           <a:lstStyle/>
@@ -14150,6 +14179,7 @@
           <a:lstStyle/>
           <a:p>
             <a:pPr algn="ctr"/>
+            <a:endParaRPr/>
           </a:p>
         </p:txBody>
       </p:sp>
@@ -14194,6 +14224,7 @@
           <a:lstStyle/>
           <a:p>
             <a:pPr algn="ctr"/>
+            <a:endParaRPr/>
           </a:p>
         </p:txBody>
       </p:sp>
@@ -14214,7 +14245,7 @@
           <a:noFill/>
         </p:spPr>
         <p:txBody>
-          <a:bodyPr wrap="square" lIns="0" rIns="0" tIns="0" bIns="0" anchor="ctr">
+          <a:bodyPr wrap="square" lIns="0" tIns="0" rIns="0" bIns="0" anchor="ctr">
             <a:spAutoFit/>
           </a:bodyPr>
           <a:lstStyle/>
@@ -14249,7 +14280,7 @@
           <a:noFill/>
         </p:spPr>
         <p:txBody>
-          <a:bodyPr wrap="square" lIns="0" rIns="0" tIns="0" bIns="0" anchor="t">
+          <a:bodyPr wrap="square" lIns="0" tIns="0" rIns="0" bIns="0" anchor="t">
             <a:spAutoFit/>
           </a:bodyPr>
           <a:lstStyle/>
@@ -14284,7 +14315,7 @@
           <a:noFill/>
         </p:spPr>
         <p:txBody>
-          <a:bodyPr wrap="square" lIns="0" rIns="0" tIns="0" bIns="0" anchor="t">
+          <a:bodyPr wrap="square" lIns="0" tIns="0" rIns="0" bIns="0" anchor="t">
             <a:spAutoFit/>
           </a:bodyPr>
           <a:lstStyle/>
@@ -14345,6 +14376,7 @@
           <a:lstStyle/>
           <a:p>
             <a:pPr algn="ctr"/>
+            <a:endParaRPr/>
           </a:p>
         </p:txBody>
       </p:sp>
@@ -14365,7 +14397,7 @@
           <a:noFill/>
         </p:spPr>
         <p:txBody>
-          <a:bodyPr wrap="square" lIns="0" rIns="0" tIns="0" bIns="0" anchor="ctr">
+          <a:bodyPr wrap="square" lIns="0" tIns="0" rIns="0" bIns="0" anchor="ctr">
             <a:spAutoFit/>
           </a:bodyPr>
           <a:lstStyle/>
@@ -14400,7 +14432,7 @@
           <a:noFill/>
         </p:spPr>
         <p:txBody>
-          <a:bodyPr wrap="square" lIns="0" rIns="0" tIns="0" bIns="0" anchor="t">
+          <a:bodyPr wrap="square" lIns="0" tIns="0" rIns="0" bIns="0" anchor="t">
             <a:spAutoFit/>
           </a:bodyPr>
           <a:lstStyle/>
@@ -14435,7 +14467,7 @@
           <a:noFill/>
         </p:spPr>
         <p:txBody>
-          <a:bodyPr wrap="square" lIns="0" rIns="0" tIns="0" bIns="0" anchor="t">
+          <a:bodyPr wrap="square" lIns="0" tIns="0" rIns="0" bIns="0" anchor="t">
             <a:spAutoFit/>
           </a:bodyPr>
           <a:lstStyle/>
@@ -14462,7 +14494,7 @@
 </file>
 
 <file path=ppt/slides/slide20.xml><?xml version="1.0" encoding="utf-8"?>
-<p:sld xmlns:a="http://schemas.openxmlformats.org/drawingml/2006/main" xmlns:p="http://schemas.openxmlformats.org/presentationml/2006/main" xmlns:r="http://schemas.openxmlformats.org/officeDocument/2006/relationships">
+<p:sld xmlns:a="http://schemas.openxmlformats.org/drawingml/2006/main" xmlns:r="http://schemas.openxmlformats.org/officeDocument/2006/relationships" xmlns:p="http://schemas.openxmlformats.org/presentationml/2006/main">
   <p:cSld>
     <p:spTree>
       <p:nvGrpSpPr>
@@ -14470,7 +14502,14 @@
         <p:cNvGrpSpPr/>
         <p:nvPr/>
       </p:nvGrpSpPr>
-      <p:grpSpPr/>
+      <p:grpSpPr>
+        <a:xfrm>
+          <a:off x="0" y="0"/>
+          <a:ext cx="0" cy="0"/>
+          <a:chOff x="0" y="0"/>
+          <a:chExt cx="0" cy="0"/>
+        </a:xfrm>
+      </p:grpSpPr>
       <p:sp>
         <p:nvSpPr>
           <p:cNvPr id="2" name="Rectangle 1"/>
@@ -14512,6 +14551,7 @@
           <a:lstStyle/>
           <a:p>
             <a:pPr algn="ctr"/>
+            <a:endParaRPr/>
           </a:p>
         </p:txBody>
       </p:sp>
@@ -14532,7 +14572,7 @@
           <a:noFill/>
         </p:spPr>
         <p:txBody>
-          <a:bodyPr wrap="square" lIns="0" rIns="0" tIns="0" bIns="0" anchor="t">
+          <a:bodyPr wrap="square" lIns="0" tIns="0" rIns="0" bIns="0" anchor="t">
             <a:spAutoFit/>
           </a:bodyPr>
           <a:lstStyle/>
@@ -14567,7 +14607,7 @@
           <a:noFill/>
         </p:spPr>
         <p:txBody>
-          <a:bodyPr wrap="square" lIns="0" rIns="0" tIns="0" bIns="0" anchor="t">
+          <a:bodyPr wrap="square" lIns="0" tIns="0" rIns="0" bIns="0" anchor="t">
             <a:spAutoFit/>
           </a:bodyPr>
           <a:lstStyle/>
@@ -14626,6 +14666,7 @@
           <a:lstStyle/>
           <a:p>
             <a:pPr algn="ctr"/>
+            <a:endParaRPr/>
           </a:p>
         </p:txBody>
       </p:sp>
@@ -14646,7 +14687,7 @@
           <a:noFill/>
         </p:spPr>
         <p:txBody>
-          <a:bodyPr wrap="square" lIns="0" rIns="0" tIns="0" bIns="0" anchor="t">
+          <a:bodyPr wrap="square" lIns="0" tIns="0" rIns="0" bIns="0" anchor="t">
             <a:spAutoFit/>
           </a:bodyPr>
           <a:lstStyle/>
@@ -14707,6 +14748,7 @@
           <a:lstStyle/>
           <a:p>
             <a:pPr algn="ctr"/>
+            <a:endParaRPr/>
           </a:p>
         </p:txBody>
       </p:sp>
@@ -14727,7 +14769,7 @@
           <a:noFill/>
         </p:spPr>
         <p:txBody>
-          <a:bodyPr wrap="square" lIns="0" rIns="0" tIns="0" bIns="0" anchor="t">
+          <a:bodyPr wrap="square" lIns="0" tIns="0" rIns="0" bIns="0" anchor="t">
             <a:spAutoFit/>
           </a:bodyPr>
           <a:lstStyle/>
@@ -14822,7 +14864,7 @@
           <a:noFill/>
         </p:spPr>
         <p:txBody>
-          <a:bodyPr wrap="square" lIns="0" rIns="0" tIns="0" bIns="0" anchor="t">
+          <a:bodyPr wrap="square" lIns="0" tIns="0" rIns="0" bIns="0" anchor="t">
             <a:spAutoFit/>
           </a:bodyPr>
           <a:lstStyle/>
@@ -14883,6 +14925,7 @@
           <a:lstStyle/>
           <a:p>
             <a:pPr algn="ctr"/>
+            <a:endParaRPr/>
           </a:p>
         </p:txBody>
       </p:sp>
@@ -14903,7 +14946,7 @@
           <a:noFill/>
         </p:spPr>
         <p:txBody>
-          <a:bodyPr wrap="square" lIns="0" rIns="0" tIns="0" bIns="0" anchor="t">
+          <a:bodyPr wrap="square" lIns="0" tIns="0" rIns="0" bIns="0" anchor="t">
             <a:spAutoFit/>
           </a:bodyPr>
           <a:lstStyle/>
@@ -15048,6 +15091,7 @@
           <a:lstStyle/>
           <a:p>
             <a:pPr algn="ctr"/>
+            <a:endParaRPr/>
           </a:p>
         </p:txBody>
       </p:sp>
@@ -15068,7 +15112,7 @@
           <a:noFill/>
         </p:spPr>
         <p:txBody>
-          <a:bodyPr wrap="square" lIns="0" rIns="0" tIns="0" bIns="0" anchor="t">
+          <a:bodyPr wrap="square" lIns="0" tIns="0" rIns="0" bIns="0" anchor="t">
             <a:spAutoFit/>
           </a:bodyPr>
           <a:lstStyle/>
@@ -15103,7 +15147,7 @@
           <a:noFill/>
         </p:spPr>
         <p:txBody>
-          <a:bodyPr wrap="square" lIns="0" rIns="0" tIns="0" bIns="0" anchor="ctr">
+          <a:bodyPr wrap="square" lIns="0" tIns="0" rIns="0" bIns="0" anchor="ctr">
             <a:spAutoFit/>
           </a:bodyPr>
           <a:lstStyle/>
@@ -15138,7 +15182,7 @@
           <a:noFill/>
         </p:spPr>
         <p:txBody>
-          <a:bodyPr wrap="square" lIns="0" rIns="0" tIns="0" bIns="0" anchor="t">
+          <a:bodyPr wrap="square" lIns="0" tIns="0" rIns="0" bIns="0" anchor="t">
             <a:spAutoFit/>
           </a:bodyPr>
           <a:lstStyle/>
@@ -15173,7 +15217,7 @@
           <a:noFill/>
         </p:spPr>
         <p:txBody>
-          <a:bodyPr wrap="square" lIns="0" rIns="0" tIns="0" bIns="0" anchor="t">
+          <a:bodyPr wrap="square" lIns="0" tIns="0" rIns="0" bIns="0" anchor="t">
             <a:spAutoFit/>
           </a:bodyPr>
           <a:lstStyle/>
@@ -15200,7 +15244,7 @@
 </file>
 
 <file path=ppt/slides/slide21.xml><?xml version="1.0" encoding="utf-8"?>
-<p:sld xmlns:a="http://schemas.openxmlformats.org/drawingml/2006/main" xmlns:p="http://schemas.openxmlformats.org/presentationml/2006/main" xmlns:r="http://schemas.openxmlformats.org/officeDocument/2006/relationships">
+<p:sld xmlns:a="http://schemas.openxmlformats.org/drawingml/2006/main" xmlns:r="http://schemas.openxmlformats.org/officeDocument/2006/relationships" xmlns:p="http://schemas.openxmlformats.org/presentationml/2006/main">
   <p:cSld>
     <p:spTree>
       <p:nvGrpSpPr>
@@ -15208,7 +15252,14 @@
         <p:cNvGrpSpPr/>
         <p:nvPr/>
       </p:nvGrpSpPr>
-      <p:grpSpPr/>
+      <p:grpSpPr>
+        <a:xfrm>
+          <a:off x="0" y="0"/>
+          <a:ext cx="0" cy="0"/>
+          <a:chOff x="0" y="0"/>
+          <a:chExt cx="0" cy="0"/>
+        </a:xfrm>
+      </p:grpSpPr>
       <p:sp>
         <p:nvSpPr>
           <p:cNvPr id="2" name="Rectangle 1"/>
@@ -15250,6 +15301,7 @@
           <a:lstStyle/>
           <a:p>
             <a:pPr algn="ctr"/>
+            <a:endParaRPr/>
           </a:p>
         </p:txBody>
       </p:sp>
@@ -15270,7 +15322,7 @@
           <a:noFill/>
         </p:spPr>
         <p:txBody>
-          <a:bodyPr wrap="square" lIns="0" rIns="0" tIns="0" bIns="0" anchor="t">
+          <a:bodyPr wrap="square" lIns="0" tIns="0" rIns="0" bIns="0" anchor="t">
             <a:spAutoFit/>
           </a:bodyPr>
           <a:lstStyle/>
@@ -15305,7 +15357,7 @@
           <a:noFill/>
         </p:spPr>
         <p:txBody>
-          <a:bodyPr wrap="square" lIns="0" rIns="0" tIns="0" bIns="0" anchor="t">
+          <a:bodyPr wrap="square" lIns="0" tIns="0" rIns="0" bIns="0" anchor="t">
             <a:spAutoFit/>
           </a:bodyPr>
           <a:lstStyle/>
@@ -15364,6 +15416,7 @@
           <a:lstStyle/>
           <a:p>
             <a:pPr algn="ctr"/>
+            <a:endParaRPr/>
           </a:p>
         </p:txBody>
       </p:sp>
@@ -15410,6 +15463,7 @@
           <a:lstStyle/>
           <a:p>
             <a:pPr algn="ctr"/>
+            <a:endParaRPr/>
           </a:p>
         </p:txBody>
       </p:sp>
@@ -15454,6 +15508,7 @@
           <a:lstStyle/>
           <a:p>
             <a:pPr algn="ctr"/>
+            <a:endParaRPr/>
           </a:p>
         </p:txBody>
       </p:sp>
@@ -15474,7 +15529,7 @@
           <a:noFill/>
         </p:spPr>
         <p:txBody>
-          <a:bodyPr wrap="square" lIns="0" rIns="0" tIns="0" bIns="0" anchor="ctr">
+          <a:bodyPr wrap="square" lIns="0" tIns="0" rIns="0" bIns="0" anchor="ctr">
             <a:spAutoFit/>
           </a:bodyPr>
           <a:lstStyle/>
@@ -15509,7 +15564,7 @@
           <a:noFill/>
         </p:spPr>
         <p:txBody>
-          <a:bodyPr wrap="square" lIns="0" rIns="0" tIns="0" bIns="0" anchor="t">
+          <a:bodyPr wrap="square" lIns="0" tIns="0" rIns="0" bIns="0" anchor="t">
             <a:spAutoFit/>
           </a:bodyPr>
           <a:lstStyle/>
@@ -15572,6 +15627,7 @@
           <a:lstStyle/>
           <a:p>
             <a:pPr algn="ctr"/>
+            <a:endParaRPr/>
           </a:p>
         </p:txBody>
       </p:sp>
@@ -15616,6 +15672,7 @@
           <a:lstStyle/>
           <a:p>
             <a:pPr algn="ctr"/>
+            <a:endParaRPr/>
           </a:p>
         </p:txBody>
       </p:sp>
@@ -15636,7 +15693,7 @@
           <a:noFill/>
         </p:spPr>
         <p:txBody>
-          <a:bodyPr wrap="square" lIns="0" rIns="0" tIns="0" bIns="0" anchor="ctr">
+          <a:bodyPr wrap="square" lIns="0" tIns="0" rIns="0" bIns="0" anchor="ctr">
             <a:spAutoFit/>
           </a:bodyPr>
           <a:lstStyle/>
@@ -15671,7 +15728,7 @@
           <a:noFill/>
         </p:spPr>
         <p:txBody>
-          <a:bodyPr wrap="square" lIns="0" rIns="0" tIns="0" bIns="0" anchor="t">
+          <a:bodyPr wrap="square" lIns="0" tIns="0" rIns="0" bIns="0" anchor="t">
             <a:spAutoFit/>
           </a:bodyPr>
           <a:lstStyle/>
@@ -15734,6 +15791,7 @@
           <a:lstStyle/>
           <a:p>
             <a:pPr algn="ctr"/>
+            <a:endParaRPr/>
           </a:p>
         </p:txBody>
       </p:sp>
@@ -15778,6 +15836,7 @@
           <a:lstStyle/>
           <a:p>
             <a:pPr algn="ctr"/>
+            <a:endParaRPr/>
           </a:p>
         </p:txBody>
       </p:sp>
@@ -15798,7 +15857,7 @@
           <a:noFill/>
         </p:spPr>
         <p:txBody>
-          <a:bodyPr wrap="square" lIns="0" rIns="0" tIns="0" bIns="0" anchor="ctr">
+          <a:bodyPr wrap="square" lIns="0" tIns="0" rIns="0" bIns="0" anchor="ctr">
             <a:spAutoFit/>
           </a:bodyPr>
           <a:lstStyle/>
@@ -15833,7 +15892,7 @@
           <a:noFill/>
         </p:spPr>
         <p:txBody>
-          <a:bodyPr wrap="square" lIns="0" rIns="0" tIns="0" bIns="0" anchor="t">
+          <a:bodyPr wrap="square" lIns="0" tIns="0" rIns="0" bIns="0" anchor="t">
             <a:spAutoFit/>
           </a:bodyPr>
           <a:lstStyle/>
@@ -15870,7 +15929,7 @@
           <a:noFill/>
         </p:spPr>
         <p:txBody>
-          <a:bodyPr wrap="square" lIns="0" rIns="0" tIns="0" bIns="0" anchor="t">
+          <a:bodyPr wrap="square" lIns="0" tIns="0" rIns="0" bIns="0" anchor="t">
             <a:spAutoFit/>
           </a:bodyPr>
           <a:lstStyle/>
@@ -15905,7 +15964,7 @@
           <a:noFill/>
         </p:spPr>
         <p:txBody>
-          <a:bodyPr wrap="square" lIns="0" rIns="0" tIns="0" bIns="0" anchor="t">
+          <a:bodyPr wrap="square" lIns="0" tIns="0" rIns="0" bIns="0" anchor="t">
             <a:spAutoFit/>
           </a:bodyPr>
           <a:lstStyle/>
@@ -15932,7 +15991,7 @@
 </file>
 
 <file path=ppt/slides/slide22.xml><?xml version="1.0" encoding="utf-8"?>
-<p:sld xmlns:a="http://schemas.openxmlformats.org/drawingml/2006/main" xmlns:p="http://schemas.openxmlformats.org/presentationml/2006/main" xmlns:r="http://schemas.openxmlformats.org/officeDocument/2006/relationships">
+<p:sld xmlns:a="http://schemas.openxmlformats.org/drawingml/2006/main" xmlns:r="http://schemas.openxmlformats.org/officeDocument/2006/relationships" xmlns:p="http://schemas.openxmlformats.org/presentationml/2006/main">
   <p:cSld>
     <p:spTree>
       <p:nvGrpSpPr>
@@ -15940,7 +15999,14 @@
         <p:cNvGrpSpPr/>
         <p:nvPr/>
       </p:nvGrpSpPr>
-      <p:grpSpPr/>
+      <p:grpSpPr>
+        <a:xfrm>
+          <a:off x="0" y="0"/>
+          <a:ext cx="0" cy="0"/>
+          <a:chOff x="0" y="0"/>
+          <a:chExt cx="0" cy="0"/>
+        </a:xfrm>
+      </p:grpSpPr>
       <p:sp>
         <p:nvSpPr>
           <p:cNvPr id="2" name="Rectangle 1"/>
@@ -15982,6 +16048,7 @@
           <a:lstStyle/>
           <a:p>
             <a:pPr algn="ctr"/>
+            <a:endParaRPr/>
           </a:p>
         </p:txBody>
       </p:sp>
@@ -16002,7 +16069,7 @@
           <a:noFill/>
         </p:spPr>
         <p:txBody>
-          <a:bodyPr wrap="square" lIns="0" rIns="0" tIns="0" bIns="0" anchor="t">
+          <a:bodyPr wrap="square" lIns="0" tIns="0" rIns="0" bIns="0" anchor="t">
             <a:spAutoFit/>
           </a:bodyPr>
           <a:lstStyle/>
@@ -16037,7 +16104,7 @@
           <a:noFill/>
         </p:spPr>
         <p:txBody>
-          <a:bodyPr wrap="square" lIns="0" rIns="0" tIns="0" bIns="0" anchor="t">
+          <a:bodyPr wrap="square" lIns="0" tIns="0" rIns="0" bIns="0" anchor="t">
             <a:spAutoFit/>
           </a:bodyPr>
           <a:lstStyle/>
@@ -16096,6 +16163,7 @@
           <a:lstStyle/>
           <a:p>
             <a:pPr algn="ctr"/>
+            <a:endParaRPr/>
           </a:p>
         </p:txBody>
       </p:sp>
@@ -16142,6 +16210,7 @@
           <a:lstStyle/>
           <a:p>
             <a:pPr algn="ctr"/>
+            <a:endParaRPr/>
           </a:p>
         </p:txBody>
       </p:sp>
@@ -16162,7 +16231,7 @@
           <a:noFill/>
         </p:spPr>
         <p:txBody>
-          <a:bodyPr wrap="square" lIns="0" rIns="0" tIns="0" bIns="0" anchor="t">
+          <a:bodyPr wrap="square" lIns="0" tIns="0" rIns="0" bIns="0" anchor="t">
             <a:spAutoFit/>
           </a:bodyPr>
           <a:lstStyle/>
@@ -16283,6 +16352,7 @@
           <a:lstStyle/>
           <a:p>
             <a:pPr algn="ctr"/>
+            <a:endParaRPr/>
           </a:p>
         </p:txBody>
       </p:sp>
@@ -16303,7 +16373,7 @@
           <a:noFill/>
         </p:spPr>
         <p:txBody>
-          <a:bodyPr wrap="square" lIns="0" rIns="0" tIns="0" bIns="0" anchor="t">
+          <a:bodyPr wrap="square" lIns="0" tIns="0" rIns="0" bIns="0" anchor="t">
             <a:spAutoFit/>
           </a:bodyPr>
           <a:lstStyle/>
@@ -16338,7 +16408,7 @@
           <a:noFill/>
         </p:spPr>
         <p:txBody>
-          <a:bodyPr wrap="square" lIns="0" rIns="0" tIns="0" bIns="0" anchor="t">
+          <a:bodyPr wrap="square" lIns="0" tIns="0" rIns="0" bIns="0" anchor="t">
             <a:spAutoFit/>
           </a:bodyPr>
           <a:lstStyle/>
@@ -16374,7 +16444,7 @@
           <a:noFill/>
         </p:spPr>
         <p:txBody>
-          <a:bodyPr wrap="square" lIns="0" rIns="0" tIns="0" bIns="0" anchor="t">
+          <a:bodyPr wrap="square" lIns="0" tIns="0" rIns="0" bIns="0" anchor="t">
             <a:spAutoFit/>
           </a:bodyPr>
           <a:lstStyle/>
@@ -16409,7 +16479,7 @@
           <a:noFill/>
         </p:spPr>
         <p:txBody>
-          <a:bodyPr wrap="square" lIns="0" rIns="0" tIns="0" bIns="0" anchor="t">
+          <a:bodyPr wrap="square" lIns="0" tIns="0" rIns="0" bIns="0" anchor="t">
             <a:spAutoFit/>
           </a:bodyPr>
           <a:lstStyle/>
@@ -16436,7 +16506,7 @@
 </file>
 
 <file path=ppt/slides/slide23.xml><?xml version="1.0" encoding="utf-8"?>
-<p:sld xmlns:a="http://schemas.openxmlformats.org/drawingml/2006/main" xmlns:p="http://schemas.openxmlformats.org/presentationml/2006/main" xmlns:r="http://schemas.openxmlformats.org/officeDocument/2006/relationships">
+<p:sld xmlns:a="http://schemas.openxmlformats.org/drawingml/2006/main" xmlns:r="http://schemas.openxmlformats.org/officeDocument/2006/relationships" xmlns:p="http://schemas.openxmlformats.org/presentationml/2006/main">
   <p:cSld>
     <p:spTree>
       <p:nvGrpSpPr>
@@ -16444,7 +16514,14 @@
         <p:cNvGrpSpPr/>
         <p:nvPr/>
       </p:nvGrpSpPr>
-      <p:grpSpPr/>
+      <p:grpSpPr>
+        <a:xfrm>
+          <a:off x="0" y="0"/>
+          <a:ext cx="0" cy="0"/>
+          <a:chOff x="0" y="0"/>
+          <a:chExt cx="0" cy="0"/>
+        </a:xfrm>
+      </p:grpSpPr>
       <p:sp>
         <p:nvSpPr>
           <p:cNvPr id="2" name="Rectangle 1"/>
@@ -16486,6 +16563,7 @@
           <a:lstStyle/>
           <a:p>
             <a:pPr algn="ctr"/>
+            <a:endParaRPr/>
           </a:p>
         </p:txBody>
       </p:sp>
@@ -16506,7 +16584,7 @@
           <a:noFill/>
         </p:spPr>
         <p:txBody>
-          <a:bodyPr wrap="square" lIns="0" rIns="0" tIns="0" bIns="0" anchor="t">
+          <a:bodyPr wrap="square" lIns="0" tIns="0" rIns="0" bIns="0" anchor="t">
             <a:spAutoFit/>
           </a:bodyPr>
           <a:lstStyle/>
@@ -16541,7 +16619,7 @@
           <a:noFill/>
         </p:spPr>
         <p:txBody>
-          <a:bodyPr wrap="square" lIns="0" rIns="0" tIns="0" bIns="0" anchor="t">
+          <a:bodyPr wrap="square" lIns="0" tIns="0" rIns="0" bIns="0" anchor="t">
             <a:spAutoFit/>
           </a:bodyPr>
           <a:lstStyle/>
@@ -16600,6 +16678,7 @@
           <a:lstStyle/>
           <a:p>
             <a:pPr algn="ctr"/>
+            <a:endParaRPr/>
           </a:p>
         </p:txBody>
       </p:sp>
@@ -16646,6 +16725,7 @@
           <a:lstStyle/>
           <a:p>
             <a:pPr algn="ctr"/>
+            <a:endParaRPr/>
           </a:p>
         </p:txBody>
       </p:sp>
@@ -16701,7 +16781,7 @@
           <a:noFill/>
         </p:spPr>
         <p:txBody>
-          <a:bodyPr wrap="square" lIns="0" rIns="0" tIns="0" bIns="0" anchor="ctr">
+          <a:bodyPr wrap="square" lIns="0" tIns="0" rIns="0" bIns="0" anchor="ctr">
             <a:spAutoFit/>
           </a:bodyPr>
           <a:lstStyle/>
@@ -16762,6 +16842,7 @@
           <a:lstStyle/>
           <a:p>
             <a:pPr algn="ctr"/>
+            <a:endParaRPr/>
           </a:p>
         </p:txBody>
       </p:sp>
@@ -16817,7 +16898,7 @@
           <a:noFill/>
         </p:spPr>
         <p:txBody>
-          <a:bodyPr wrap="square" lIns="0" rIns="0" tIns="0" bIns="0" anchor="ctr">
+          <a:bodyPr wrap="square" lIns="0" tIns="0" rIns="0" bIns="0" anchor="ctr">
             <a:spAutoFit/>
           </a:bodyPr>
           <a:lstStyle/>
@@ -16878,6 +16959,7 @@
           <a:lstStyle/>
           <a:p>
             <a:pPr algn="ctr"/>
+            <a:endParaRPr/>
           </a:p>
         </p:txBody>
       </p:sp>
@@ -16933,7 +17015,7 @@
           <a:noFill/>
         </p:spPr>
         <p:txBody>
-          <a:bodyPr wrap="square" lIns="0" rIns="0" tIns="0" bIns="0" anchor="ctr">
+          <a:bodyPr wrap="square" lIns="0" tIns="0" rIns="0" bIns="0" anchor="ctr">
             <a:spAutoFit/>
           </a:bodyPr>
           <a:lstStyle/>
@@ -16994,6 +17076,7 @@
           <a:lstStyle/>
           <a:p>
             <a:pPr algn="ctr"/>
+            <a:endParaRPr/>
           </a:p>
         </p:txBody>
       </p:sp>
@@ -17049,7 +17132,7 @@
           <a:noFill/>
         </p:spPr>
         <p:txBody>
-          <a:bodyPr wrap="square" lIns="0" rIns="0" tIns="0" bIns="0" anchor="ctr">
+          <a:bodyPr wrap="square" lIns="0" tIns="0" rIns="0" bIns="0" anchor="ctr">
             <a:spAutoFit/>
           </a:bodyPr>
           <a:lstStyle/>
@@ -17110,6 +17193,7 @@
           <a:lstStyle/>
           <a:p>
             <a:pPr algn="ctr"/>
+            <a:endParaRPr/>
           </a:p>
         </p:txBody>
       </p:sp>
@@ -17165,7 +17249,7 @@
           <a:noFill/>
         </p:spPr>
         <p:txBody>
-          <a:bodyPr wrap="square" lIns="0" rIns="0" tIns="0" bIns="0" anchor="ctr">
+          <a:bodyPr wrap="square" lIns="0" tIns="0" rIns="0" bIns="0" anchor="ctr">
             <a:spAutoFit/>
           </a:bodyPr>
           <a:lstStyle/>
@@ -17226,6 +17310,7 @@
           <a:lstStyle/>
           <a:p>
             <a:pPr algn="ctr"/>
+            <a:endParaRPr/>
           </a:p>
         </p:txBody>
       </p:sp>
@@ -17281,7 +17366,7 @@
           <a:noFill/>
         </p:spPr>
         <p:txBody>
-          <a:bodyPr wrap="square" lIns="0" rIns="0" tIns="0" bIns="0" anchor="ctr">
+          <a:bodyPr wrap="square" lIns="0" tIns="0" rIns="0" bIns="0" anchor="ctr">
             <a:spAutoFit/>
           </a:bodyPr>
           <a:lstStyle/>
@@ -17342,6 +17427,7 @@
           <a:lstStyle/>
           <a:p>
             <a:pPr algn="ctr"/>
+            <a:endParaRPr/>
           </a:p>
         </p:txBody>
       </p:sp>
@@ -17397,7 +17483,7 @@
           <a:noFill/>
         </p:spPr>
         <p:txBody>
-          <a:bodyPr wrap="square" lIns="0" rIns="0" tIns="0" bIns="0" anchor="ctr">
+          <a:bodyPr wrap="square" lIns="0" tIns="0" rIns="0" bIns="0" anchor="ctr">
             <a:spAutoFit/>
           </a:bodyPr>
           <a:lstStyle/>
@@ -17432,7 +17518,7 @@
           <a:noFill/>
         </p:spPr>
         <p:txBody>
-          <a:bodyPr wrap="square" lIns="0" rIns="0" tIns="0" bIns="0" anchor="t">
+          <a:bodyPr wrap="square" lIns="0" tIns="0" rIns="0" bIns="0" anchor="t">
             <a:spAutoFit/>
           </a:bodyPr>
           <a:lstStyle/>
@@ -17467,7 +17553,7 @@
           <a:noFill/>
         </p:spPr>
         <p:txBody>
-          <a:bodyPr wrap="square" lIns="0" rIns="0" tIns="0" bIns="0" anchor="t">
+          <a:bodyPr wrap="square" lIns="0" tIns="0" rIns="0" bIns="0" anchor="t">
             <a:spAutoFit/>
           </a:bodyPr>
           <a:lstStyle/>
@@ -17494,7 +17580,7 @@
 </file>
 
 <file path=ppt/slides/slide24.xml><?xml version="1.0" encoding="utf-8"?>
-<p:sld xmlns:a="http://schemas.openxmlformats.org/drawingml/2006/main" xmlns:p="http://schemas.openxmlformats.org/presentationml/2006/main" xmlns:r="http://schemas.openxmlformats.org/officeDocument/2006/relationships">
+<p:sld xmlns:a="http://schemas.openxmlformats.org/drawingml/2006/main" xmlns:r="http://schemas.openxmlformats.org/officeDocument/2006/relationships" xmlns:p="http://schemas.openxmlformats.org/presentationml/2006/main">
   <p:cSld>
     <p:spTree>
       <p:nvGrpSpPr>
@@ -17502,7 +17588,14 @@
         <p:cNvGrpSpPr/>
         <p:nvPr/>
       </p:nvGrpSpPr>
-      <p:grpSpPr/>
+      <p:grpSpPr>
+        <a:xfrm>
+          <a:off x="0" y="0"/>
+          <a:ext cx="0" cy="0"/>
+          <a:chOff x="0" y="0"/>
+          <a:chExt cx="0" cy="0"/>
+        </a:xfrm>
+      </p:grpSpPr>
       <p:sp>
         <p:nvSpPr>
           <p:cNvPr id="2" name="Rectangle 1"/>
@@ -17544,6 +17637,7 @@
           <a:lstStyle/>
           <a:p>
             <a:pPr algn="ctr"/>
+            <a:endParaRPr/>
           </a:p>
         </p:txBody>
       </p:sp>
@@ -17564,7 +17658,7 @@
           <a:noFill/>
         </p:spPr>
         <p:txBody>
-          <a:bodyPr wrap="square" lIns="0" rIns="0" tIns="0" bIns="0" anchor="t">
+          <a:bodyPr wrap="square" lIns="0" tIns="0" rIns="0" bIns="0" anchor="t">
             <a:spAutoFit/>
           </a:bodyPr>
           <a:lstStyle/>
@@ -17599,7 +17693,7 @@
           <a:noFill/>
         </p:spPr>
         <p:txBody>
-          <a:bodyPr wrap="square" lIns="0" rIns="0" tIns="0" bIns="0" anchor="t">
+          <a:bodyPr wrap="square" lIns="0" tIns="0" rIns="0" bIns="0" anchor="t">
             <a:spAutoFit/>
           </a:bodyPr>
           <a:lstStyle/>
@@ -17660,6 +17754,7 @@
           <a:lstStyle/>
           <a:p>
             <a:pPr algn="ctr"/>
+            <a:endParaRPr/>
           </a:p>
         </p:txBody>
       </p:sp>
@@ -17680,7 +17775,7 @@
           <a:noFill/>
         </p:spPr>
         <p:txBody>
-          <a:bodyPr wrap="square" lIns="0" rIns="0" tIns="0" bIns="0" anchor="ctr">
+          <a:bodyPr wrap="square" lIns="0" tIns="0" rIns="0" bIns="0" anchor="ctr">
             <a:spAutoFit/>
           </a:bodyPr>
           <a:lstStyle/>
@@ -17741,6 +17836,7 @@
           <a:lstStyle/>
           <a:p>
             <a:pPr algn="ctr"/>
+            <a:endParaRPr/>
           </a:p>
         </p:txBody>
       </p:sp>
@@ -17753,28 +17849,46 @@
         <p:spPr>
           <a:xfrm>
             <a:off x="548640" y="3794760"/>
-            <a:ext cx="3611880" cy="320040"/>
-          </a:xfrm>
-          <a:prstGeom prst="rect">
-            <a:avLst/>
-          </a:prstGeom>
-          <a:noFill/>
-        </p:spPr>
-        <p:txBody>
-          <a:bodyPr wrap="square" lIns="0" rIns="0" tIns="0" bIns="0" anchor="t">
+            <a:ext cx="3611880" cy="169277"/>
+          </a:xfrm>
+          <a:prstGeom prst="rect">
+            <a:avLst/>
+          </a:prstGeom>
+          <a:noFill/>
+        </p:spPr>
+        <p:txBody>
+          <a:bodyPr wrap="square" lIns="0" tIns="0" rIns="0" bIns="0" anchor="t">
             <a:spAutoFit/>
           </a:bodyPr>
           <a:lstStyle/>
           <a:p>
             <a:pPr algn="ctr"/>
             <a:r>
-              <a:rPr sz="1100" b="1" i="0">
+              <a:rPr sz="1100" b="1" i="0" dirty="0">
                 <a:solidFill>
                   <a:srgbClr val="58A6FF"/>
                 </a:solidFill>
                 <a:latin typeface="Consolas"/>
               </a:rPr>
-              <a:t>ORIGINAL POC</a:t>
+              <a:t>ORIGINAL</a:t>
+            </a:r>
+            <a:r>
+              <a:rPr lang="en-US" sz="1100" b="1" i="0" dirty="0">
+                <a:solidFill>
+                  <a:srgbClr val="58A6FF"/>
+                </a:solidFill>
+                <a:latin typeface="Consolas"/>
+              </a:rPr>
+              <a:t> DESIGN AND FIRMWARE</a:t>
+            </a:r>
+            <a:r>
+              <a:rPr sz="1100" b="1" i="0" dirty="0">
+                <a:solidFill>
+                  <a:srgbClr val="58A6FF"/>
+                </a:solidFill>
+                <a:latin typeface="Consolas"/>
+              </a:rPr>
+              <a:t> POC</a:t>
             </a:r>
           </a:p>
         </p:txBody>
@@ -17796,7 +17910,7 @@
           <a:noFill/>
         </p:spPr>
         <p:txBody>
-          <a:bodyPr wrap="square" lIns="0" rIns="0" tIns="0" bIns="0" anchor="ctr">
+          <a:bodyPr wrap="square" lIns="0" tIns="0" rIns="0" bIns="0" anchor="ctr">
             <a:spAutoFit/>
           </a:bodyPr>
           <a:lstStyle/>
@@ -17831,21 +17945,13 @@
           <a:noFill/>
         </p:spPr>
         <p:txBody>
-          <a:bodyPr wrap="square" lIns="0" rIns="0" tIns="0" bIns="0" anchor="t">
+          <a:bodyPr wrap="square" lIns="0" tIns="0" rIns="0" bIns="0" anchor="t">
             <a:spAutoFit/>
           </a:bodyPr>
           <a:lstStyle/>
           <a:p>
             <a:pPr algn="ctr"/>
-            <a:r>
-              <a:rPr sz="1300" b="0" i="0">
-                <a:solidFill>
-                  <a:srgbClr val="8B949E"/>
-                </a:solidFill>
-                <a:latin typeface="Calibri"/>
-              </a:rPr>
-              <a:t/>
-            </a:r>
+            <a:endParaRPr/>
           </a:p>
         </p:txBody>
       </p:sp>
@@ -17892,6 +17998,7 @@
           <a:lstStyle/>
           <a:p>
             <a:pPr algn="ctr"/>
+            <a:endParaRPr/>
           </a:p>
         </p:txBody>
       </p:sp>
@@ -17912,14 +18019,14 @@
           <a:noFill/>
         </p:spPr>
         <p:txBody>
-          <a:bodyPr wrap="square" lIns="0" rIns="0" tIns="0" bIns="0" anchor="t">
+          <a:bodyPr wrap="square" lIns="0" tIns="0" rIns="0" bIns="0" anchor="t">
             <a:spAutoFit/>
           </a:bodyPr>
           <a:lstStyle/>
           <a:p>
             <a:pPr algn="ctr"/>
             <a:r>
-              <a:rPr sz="1100" b="1" i="0">
+              <a:rPr sz="1100" b="1" i="0" dirty="0">
                 <a:solidFill>
                   <a:srgbClr val="58A6FF"/>
                 </a:solidFill>
@@ -17947,7 +18054,7 @@
           <a:noFill/>
         </p:spPr>
         <p:txBody>
-          <a:bodyPr wrap="square" lIns="0" rIns="0" tIns="0" bIns="0" anchor="ctr">
+          <a:bodyPr wrap="square" lIns="0" tIns="0" rIns="0" bIns="0" anchor="ctr">
             <a:spAutoFit/>
           </a:bodyPr>
           <a:lstStyle/>
@@ -17961,41 +18068,6 @@
                 <a:latin typeface="Trebuchet MS"/>
               </a:rPr>
               <a:t>Kirk Richardson</a:t>
-            </a:r>
-          </a:p>
-        </p:txBody>
-      </p:sp>
-      <p:sp>
-        <p:nvSpPr>
-          <p:cNvPr id="14" name="TextBox 13"/>
-          <p:cNvSpPr txBox="1"/>
-          <p:nvPr/>
-        </p:nvSpPr>
-        <p:spPr>
-          <a:xfrm>
-            <a:off x="4343400" y="4846320"/>
-            <a:ext cx="3611880" cy="868680"/>
-          </a:xfrm>
-          <a:prstGeom prst="rect">
-            <a:avLst/>
-          </a:prstGeom>
-          <a:noFill/>
-        </p:spPr>
-        <p:txBody>
-          <a:bodyPr wrap="square" lIns="0" rIns="0" tIns="0" bIns="0" anchor="t">
-            <a:spAutoFit/>
-          </a:bodyPr>
-          <a:lstStyle/>
-          <a:p>
-            <a:pPr algn="ctr"/>
-            <a:r>
-              <a:rPr sz="1300" b="0" i="0">
-                <a:solidFill>
-                  <a:srgbClr val="8B949E"/>
-                </a:solidFill>
-                <a:latin typeface="Calibri"/>
-              </a:rPr>
-              <a:t>aiRadar</a:t>
             </a:r>
           </a:p>
         </p:txBody>
@@ -18043,6 +18115,7 @@
           <a:lstStyle/>
           <a:p>
             <a:pPr algn="ctr"/>
+            <a:endParaRPr/>
           </a:p>
         </p:txBody>
       </p:sp>
@@ -18055,22 +18128,22 @@
         <p:spPr>
           <a:xfrm>
             <a:off x="8138160" y="3794760"/>
-            <a:ext cx="3611880" cy="320040"/>
-          </a:xfrm>
-          <a:prstGeom prst="rect">
-            <a:avLst/>
-          </a:prstGeom>
-          <a:noFill/>
-        </p:spPr>
-        <p:txBody>
-          <a:bodyPr wrap="square" lIns="0" rIns="0" tIns="0" bIns="0" anchor="t">
+            <a:ext cx="3611880" cy="169277"/>
+          </a:xfrm>
+          <a:prstGeom prst="rect">
+            <a:avLst/>
+          </a:prstGeom>
+          <a:noFill/>
+        </p:spPr>
+        <p:txBody>
+          <a:bodyPr wrap="square" lIns="0" tIns="0" rIns="0" bIns="0" anchor="t">
             <a:spAutoFit/>
           </a:bodyPr>
           <a:lstStyle/>
           <a:p>
             <a:pPr algn="ctr"/>
             <a:r>
-              <a:rPr sz="1100" b="1" i="0">
+              <a:rPr sz="1100" b="1" i="0" dirty="0">
                 <a:solidFill>
                   <a:srgbClr val="58A6FF"/>
                 </a:solidFill>
@@ -18078,6 +18151,21 @@
               </a:rPr>
               <a:t>FIRMWARE</a:t>
             </a:r>
+            <a:r>
+              <a:rPr lang="en-US" sz="1100" b="1" i="0" dirty="0">
+                <a:solidFill>
+                  <a:srgbClr val="58A6FF"/>
+                </a:solidFill>
+                <a:latin typeface="Consolas"/>
+              </a:rPr>
+              <a:t> 2.0</a:t>
+            </a:r>
+            <a:endParaRPr sz="1100" b="1" i="0" dirty="0">
+              <a:solidFill>
+                <a:srgbClr val="58A6FF"/>
+              </a:solidFill>
+              <a:latin typeface="Consolas"/>
+            </a:endParaRPr>
           </a:p>
         </p:txBody>
       </p:sp>
@@ -18098,7 +18186,7 @@
           <a:noFill/>
         </p:spPr>
         <p:txBody>
-          <a:bodyPr wrap="square" lIns="0" rIns="0" tIns="0" bIns="0" anchor="ctr">
+          <a:bodyPr wrap="square" lIns="0" tIns="0" rIns="0" bIns="0" anchor="ctr">
             <a:spAutoFit/>
           </a:bodyPr>
           <a:lstStyle/>
@@ -18112,41 +18200,6 @@
                 <a:latin typeface="Trebuchet MS"/>
               </a:rPr>
               <a:t>Nick Maltchev</a:t>
-            </a:r>
-          </a:p>
-        </p:txBody>
-      </p:sp>
-      <p:sp>
-        <p:nvSpPr>
-          <p:cNvPr id="18" name="TextBox 17"/>
-          <p:cNvSpPr txBox="1"/>
-          <p:nvPr/>
-        </p:nvSpPr>
-        <p:spPr>
-          <a:xfrm>
-            <a:off x="8138160" y="4846320"/>
-            <a:ext cx="3611880" cy="868680"/>
-          </a:xfrm>
-          <a:prstGeom prst="rect">
-            <a:avLst/>
-          </a:prstGeom>
-          <a:noFill/>
-        </p:spPr>
-        <p:txBody>
-          <a:bodyPr wrap="square" lIns="0" rIns="0" tIns="0" bIns="0" anchor="t">
-            <a:spAutoFit/>
-          </a:bodyPr>
-          <a:lstStyle/>
-          <a:p>
-            <a:pPr algn="ctr"/>
-            <a:r>
-              <a:rPr sz="1300" b="0" i="0">
-                <a:solidFill>
-                  <a:srgbClr val="8B949E"/>
-                </a:solidFill>
-                <a:latin typeface="Calibri"/>
-              </a:rPr>
-              <a:t>Mirai Security</a:t>
             </a:r>
           </a:p>
         </p:txBody>
@@ -18160,7 +18213,7 @@
 </file>
 
 <file path=ppt/slides/slide3.xml><?xml version="1.0" encoding="utf-8"?>
-<p:sld xmlns:a="http://schemas.openxmlformats.org/drawingml/2006/main" xmlns:p="http://schemas.openxmlformats.org/presentationml/2006/main" xmlns:r="http://schemas.openxmlformats.org/officeDocument/2006/relationships">
+<p:sld xmlns:a="http://schemas.openxmlformats.org/drawingml/2006/main" xmlns:r="http://schemas.openxmlformats.org/officeDocument/2006/relationships" xmlns:p="http://schemas.openxmlformats.org/presentationml/2006/main">
   <p:cSld>
     <p:spTree>
       <p:nvGrpSpPr>
@@ -18168,7 +18221,14 @@
         <p:cNvGrpSpPr/>
         <p:nvPr/>
       </p:nvGrpSpPr>
-      <p:grpSpPr/>
+      <p:grpSpPr>
+        <a:xfrm>
+          <a:off x="0" y="0"/>
+          <a:ext cx="0" cy="0"/>
+          <a:chOff x="0" y="0"/>
+          <a:chExt cx="0" cy="0"/>
+        </a:xfrm>
+      </p:grpSpPr>
       <p:sp>
         <p:nvSpPr>
           <p:cNvPr id="2" name="Rectangle 1"/>
@@ -18210,6 +18270,7 @@
           <a:lstStyle/>
           <a:p>
             <a:pPr algn="ctr"/>
+            <a:endParaRPr/>
           </a:p>
         </p:txBody>
       </p:sp>
@@ -18230,7 +18291,7 @@
           <a:noFill/>
         </p:spPr>
         <p:txBody>
-          <a:bodyPr wrap="square" lIns="0" rIns="0" tIns="0" bIns="0" anchor="t">
+          <a:bodyPr wrap="square" lIns="0" tIns="0" rIns="0" bIns="0" anchor="t">
             <a:spAutoFit/>
           </a:bodyPr>
           <a:lstStyle/>
@@ -18289,6 +18350,7 @@
           <a:lstStyle/>
           <a:p>
             <a:pPr algn="ctr"/>
+            <a:endParaRPr/>
           </a:p>
         </p:txBody>
       </p:sp>
@@ -18333,6 +18395,7 @@
           <a:lstStyle/>
           <a:p>
             <a:pPr algn="ctr"/>
+            <a:endParaRPr/>
           </a:p>
         </p:txBody>
       </p:sp>
@@ -18353,7 +18416,7 @@
           <a:noFill/>
         </p:spPr>
         <p:txBody>
-          <a:bodyPr wrap="square" lIns="0" rIns="0" tIns="0" bIns="0" anchor="ctr">
+          <a:bodyPr wrap="square" lIns="0" tIns="0" rIns="0" bIns="0" anchor="ctr">
             <a:spAutoFit/>
           </a:bodyPr>
           <a:lstStyle/>
@@ -18388,7 +18451,7 @@
           <a:noFill/>
         </p:spPr>
         <p:txBody>
-          <a:bodyPr wrap="square" lIns="0" rIns="0" tIns="0" bIns="0" anchor="ctr">
+          <a:bodyPr wrap="square" lIns="0" tIns="0" rIns="0" bIns="0" anchor="ctr">
             <a:spAutoFit/>
           </a:bodyPr>
           <a:lstStyle/>
@@ -18423,7 +18486,7 @@
           <a:noFill/>
         </p:spPr>
         <p:txBody>
-          <a:bodyPr wrap="square" lIns="0" rIns="0" tIns="0" bIns="0" anchor="ctr">
+          <a:bodyPr wrap="square" lIns="0" tIns="0" rIns="0" bIns="0" anchor="ctr">
             <a:spAutoFit/>
           </a:bodyPr>
           <a:lstStyle/>
@@ -18458,7 +18521,7 @@
           <a:noFill/>
         </p:spPr>
         <p:txBody>
-          <a:bodyPr wrap="square" lIns="0" rIns="0" tIns="0" bIns="0" anchor="ctr">
+          <a:bodyPr wrap="square" lIns="0" tIns="0" rIns="0" bIns="0" anchor="ctr">
             <a:spAutoFit/>
           </a:bodyPr>
           <a:lstStyle/>
@@ -18519,6 +18582,7 @@
           <a:lstStyle/>
           <a:p>
             <a:pPr algn="ctr"/>
+            <a:endParaRPr/>
           </a:p>
         </p:txBody>
       </p:sp>
@@ -18539,7 +18603,7 @@
           <a:noFill/>
         </p:spPr>
         <p:txBody>
-          <a:bodyPr wrap="square" lIns="0" rIns="0" tIns="0" bIns="0" anchor="t">
+          <a:bodyPr wrap="square" lIns="0" tIns="0" rIns="0" bIns="0" anchor="t">
             <a:spAutoFit/>
           </a:bodyPr>
           <a:lstStyle/>
@@ -18574,7 +18638,7 @@
           <a:noFill/>
         </p:spPr>
         <p:txBody>
-          <a:bodyPr wrap="square" lIns="0" rIns="0" tIns="0" bIns="0" anchor="t">
+          <a:bodyPr wrap="square" lIns="0" tIns="0" rIns="0" bIns="0" anchor="t">
             <a:spAutoFit/>
           </a:bodyPr>
           <a:lstStyle/>
@@ -18635,6 +18699,7 @@
           <a:lstStyle/>
           <a:p>
             <a:pPr algn="ctr"/>
+            <a:endParaRPr/>
           </a:p>
         </p:txBody>
       </p:sp>
@@ -18655,7 +18720,7 @@
           <a:noFill/>
         </p:spPr>
         <p:txBody>
-          <a:bodyPr wrap="square" lIns="0" rIns="0" tIns="0" bIns="0" anchor="t">
+          <a:bodyPr wrap="square" lIns="0" tIns="0" rIns="0" bIns="0" anchor="t">
             <a:spAutoFit/>
           </a:bodyPr>
           <a:lstStyle/>
@@ -18690,7 +18755,7 @@
           <a:noFill/>
         </p:spPr>
         <p:txBody>
-          <a:bodyPr wrap="square" lIns="0" rIns="0" tIns="0" bIns="0" anchor="t">
+          <a:bodyPr wrap="square" lIns="0" tIns="0" rIns="0" bIns="0" anchor="t">
             <a:spAutoFit/>
           </a:bodyPr>
           <a:lstStyle/>
@@ -18751,6 +18816,7 @@
           <a:lstStyle/>
           <a:p>
             <a:pPr algn="ctr"/>
+            <a:endParaRPr/>
           </a:p>
         </p:txBody>
       </p:sp>
@@ -18771,7 +18837,7 @@
           <a:noFill/>
         </p:spPr>
         <p:txBody>
-          <a:bodyPr wrap="square" lIns="0" rIns="0" tIns="0" bIns="0" anchor="t">
+          <a:bodyPr wrap="square" lIns="0" tIns="0" rIns="0" bIns="0" anchor="t">
             <a:spAutoFit/>
           </a:bodyPr>
           <a:lstStyle/>
@@ -18806,7 +18872,7 @@
           <a:noFill/>
         </p:spPr>
         <p:txBody>
-          <a:bodyPr wrap="square" lIns="0" rIns="0" tIns="0" bIns="0" anchor="t">
+          <a:bodyPr wrap="square" lIns="0" tIns="0" rIns="0" bIns="0" anchor="t">
             <a:spAutoFit/>
           </a:bodyPr>
           <a:lstStyle/>
@@ -18867,6 +18933,7 @@
           <a:lstStyle/>
           <a:p>
             <a:pPr algn="ctr"/>
+            <a:endParaRPr/>
           </a:p>
         </p:txBody>
       </p:sp>
@@ -18887,7 +18954,7 @@
           <a:noFill/>
         </p:spPr>
         <p:txBody>
-          <a:bodyPr wrap="square" lIns="0" rIns="0" tIns="0" bIns="0" anchor="t">
+          <a:bodyPr wrap="square" lIns="0" tIns="0" rIns="0" bIns="0" anchor="t">
             <a:spAutoFit/>
           </a:bodyPr>
           <a:lstStyle/>
@@ -18922,7 +18989,7 @@
           <a:noFill/>
         </p:spPr>
         <p:txBody>
-          <a:bodyPr wrap="square" lIns="0" rIns="0" tIns="0" bIns="0" anchor="t">
+          <a:bodyPr wrap="square" lIns="0" tIns="0" rIns="0" bIns="0" anchor="t">
             <a:spAutoFit/>
           </a:bodyPr>
           <a:lstStyle/>
@@ -18983,6 +19050,7 @@
           <a:lstStyle/>
           <a:p>
             <a:pPr algn="ctr"/>
+            <a:endParaRPr/>
           </a:p>
         </p:txBody>
       </p:sp>
@@ -19003,7 +19071,7 @@
           <a:noFill/>
         </p:spPr>
         <p:txBody>
-          <a:bodyPr wrap="square" lIns="0" rIns="0" tIns="0" bIns="0" anchor="t">
+          <a:bodyPr wrap="square" lIns="0" tIns="0" rIns="0" bIns="0" anchor="t">
             <a:spAutoFit/>
           </a:bodyPr>
           <a:lstStyle/>
@@ -19038,7 +19106,7 @@
           <a:noFill/>
         </p:spPr>
         <p:txBody>
-          <a:bodyPr wrap="square" lIns="0" rIns="0" tIns="0" bIns="0" anchor="t">
+          <a:bodyPr wrap="square" lIns="0" tIns="0" rIns="0" bIns="0" anchor="t">
             <a:spAutoFit/>
           </a:bodyPr>
           <a:lstStyle/>
@@ -19099,6 +19167,7 @@
           <a:lstStyle/>
           <a:p>
             <a:pPr algn="ctr"/>
+            <a:endParaRPr/>
           </a:p>
         </p:txBody>
       </p:sp>
@@ -19119,7 +19188,7 @@
           <a:noFill/>
         </p:spPr>
         <p:txBody>
-          <a:bodyPr wrap="square" lIns="0" rIns="0" tIns="0" bIns="0" anchor="t">
+          <a:bodyPr wrap="square" lIns="0" tIns="0" rIns="0" bIns="0" anchor="t">
             <a:spAutoFit/>
           </a:bodyPr>
           <a:lstStyle/>
@@ -19154,7 +19223,7 @@
           <a:noFill/>
         </p:spPr>
         <p:txBody>
-          <a:bodyPr wrap="square" lIns="0" rIns="0" tIns="0" bIns="0" anchor="t">
+          <a:bodyPr wrap="square" lIns="0" tIns="0" rIns="0" bIns="0" anchor="t">
             <a:spAutoFit/>
           </a:bodyPr>
           <a:lstStyle/>
@@ -19180,8 +19249,8 @@
         </p:nvCxnSpPr>
         <p:spPr>
           <a:xfrm>
-            <a:off x="3154680" y="2171700.0"/>
-            <a:ext cx="1417320" cy="1348740.0"/>
+            <a:off x="3154680" y="0"/>
+            <a:ext cx="1417320" cy="0"/>
           </a:xfrm>
           <a:prstGeom prst="line">
             <a:avLst/>
@@ -19216,8 +19285,8 @@
         </p:nvCxnSpPr>
         <p:spPr>
           <a:xfrm>
-            <a:off x="3154680" y="3451860.0"/>
-            <a:ext cx="1417320" cy="68580.0"/>
+            <a:off x="3154680" y="0"/>
+            <a:ext cx="1417320" cy="0"/>
           </a:xfrm>
           <a:prstGeom prst="line">
             <a:avLst/>
@@ -19252,8 +19321,8 @@
         </p:nvCxnSpPr>
         <p:spPr>
           <a:xfrm flipV="1">
-            <a:off x="3154680" y="3520440.0"/>
-            <a:ext cx="1417320" cy="1211580.0"/>
+            <a:off x="3154680" y="0"/>
+            <a:ext cx="1417320" cy="0"/>
           </a:xfrm>
           <a:prstGeom prst="line">
             <a:avLst/>
@@ -19288,8 +19357,8 @@
         </p:nvCxnSpPr>
         <p:spPr>
           <a:xfrm flipH="1">
-            <a:off x="7589520" y="2171700.0"/>
-            <a:ext cx="1554480" cy="1348740.0"/>
+            <a:off x="7589520" y="0"/>
+            <a:ext cx="1554480" cy="0"/>
           </a:xfrm>
           <a:prstGeom prst="line">
             <a:avLst/>
@@ -19324,8 +19393,8 @@
         </p:nvCxnSpPr>
         <p:spPr>
           <a:xfrm flipH="1">
-            <a:off x="7589520" y="3451860.0"/>
-            <a:ext cx="1554480" cy="68580.0"/>
+            <a:off x="7589520" y="0"/>
+            <a:ext cx="1554480" cy="0"/>
           </a:xfrm>
           <a:prstGeom prst="line">
             <a:avLst/>
@@ -19360,8 +19429,8 @@
         </p:nvCxnSpPr>
         <p:spPr>
           <a:xfrm flipH="1" flipV="1">
-            <a:off x="7589520" y="3520440.0"/>
-            <a:ext cx="1554480" cy="1211580.0"/>
+            <a:off x="7589520" y="0"/>
+            <a:ext cx="1554480" cy="0"/>
           </a:xfrm>
           <a:prstGeom prst="line">
             <a:avLst/>
@@ -19405,7 +19474,7 @@
           <a:noFill/>
         </p:spPr>
         <p:txBody>
-          <a:bodyPr wrap="square" lIns="0" rIns="0" tIns="0" bIns="0" anchor="t">
+          <a:bodyPr wrap="square" lIns="0" tIns="0" rIns="0" bIns="0" anchor="t">
             <a:spAutoFit/>
           </a:bodyPr>
           <a:lstStyle/>
@@ -19440,7 +19509,7 @@
           <a:noFill/>
         </p:spPr>
         <p:txBody>
-          <a:bodyPr wrap="square" lIns="0" rIns="0" tIns="0" bIns="0" anchor="t">
+          <a:bodyPr wrap="square" lIns="0" tIns="0" rIns="0" bIns="0" anchor="t">
             <a:spAutoFit/>
           </a:bodyPr>
           <a:lstStyle/>
@@ -19475,7 +19544,7 @@
           <a:noFill/>
         </p:spPr>
         <p:txBody>
-          <a:bodyPr wrap="square" lIns="0" rIns="0" tIns="0" bIns="0" anchor="t">
+          <a:bodyPr wrap="square" lIns="0" tIns="0" rIns="0" bIns="0" anchor="t">
             <a:spAutoFit/>
           </a:bodyPr>
           <a:lstStyle/>
@@ -19502,7 +19571,7 @@
 </file>
 
 <file path=ppt/slides/slide4.xml><?xml version="1.0" encoding="utf-8"?>
-<p:sld xmlns:a="http://schemas.openxmlformats.org/drawingml/2006/main" xmlns:p="http://schemas.openxmlformats.org/presentationml/2006/main" xmlns:r="http://schemas.openxmlformats.org/officeDocument/2006/relationships">
+<p:sld xmlns:a="http://schemas.openxmlformats.org/drawingml/2006/main" xmlns:r="http://schemas.openxmlformats.org/officeDocument/2006/relationships" xmlns:p="http://schemas.openxmlformats.org/presentationml/2006/main">
   <p:cSld>
     <p:spTree>
       <p:nvGrpSpPr>
@@ -19510,7 +19579,14 @@
         <p:cNvGrpSpPr/>
         <p:nvPr/>
       </p:nvGrpSpPr>
-      <p:grpSpPr/>
+      <p:grpSpPr>
+        <a:xfrm>
+          <a:off x="0" y="0"/>
+          <a:ext cx="0" cy="0"/>
+          <a:chOff x="0" y="0"/>
+          <a:chExt cx="0" cy="0"/>
+        </a:xfrm>
+      </p:grpSpPr>
       <p:sp>
         <p:nvSpPr>
           <p:cNvPr id="2" name="Rectangle 1"/>
@@ -19552,6 +19628,7 @@
           <a:lstStyle/>
           <a:p>
             <a:pPr algn="ctr"/>
+            <a:endParaRPr/>
           </a:p>
         </p:txBody>
       </p:sp>
@@ -19572,7 +19649,7 @@
           <a:noFill/>
         </p:spPr>
         <p:txBody>
-          <a:bodyPr wrap="square" lIns="0" rIns="0" tIns="0" bIns="0" anchor="t">
+          <a:bodyPr wrap="square" lIns="0" tIns="0" rIns="0" bIns="0" anchor="t">
             <a:spAutoFit/>
           </a:bodyPr>
           <a:lstStyle/>
@@ -19631,6 +19708,7 @@
           <a:lstStyle/>
           <a:p>
             <a:pPr algn="ctr"/>
+            <a:endParaRPr/>
           </a:p>
         </p:txBody>
       </p:sp>
@@ -19677,6 +19755,7 @@
           <a:lstStyle/>
           <a:p>
             <a:pPr algn="ctr"/>
+            <a:endParaRPr/>
           </a:p>
         </p:txBody>
       </p:sp>
@@ -19721,6 +19800,7 @@
           <a:lstStyle/>
           <a:p>
             <a:pPr algn="ctr"/>
+            <a:endParaRPr/>
           </a:p>
         </p:txBody>
       </p:sp>
@@ -19741,7 +19821,7 @@
           <a:noFill/>
         </p:spPr>
         <p:txBody>
-          <a:bodyPr wrap="square" lIns="0" rIns="0" tIns="0" bIns="0" anchor="ctr">
+          <a:bodyPr wrap="square" lIns="0" tIns="0" rIns="0" bIns="0" anchor="ctr">
             <a:spAutoFit/>
           </a:bodyPr>
           <a:lstStyle/>
@@ -19776,7 +19856,7 @@
           <a:noFill/>
         </p:spPr>
         <p:txBody>
-          <a:bodyPr wrap="square" lIns="0" rIns="0" tIns="0" bIns="0" anchor="ctr">
+          <a:bodyPr wrap="square" lIns="0" tIns="0" rIns="0" bIns="0" anchor="ctr">
             <a:spAutoFit/>
           </a:bodyPr>
           <a:lstStyle/>
@@ -19837,6 +19917,7 @@
           <a:lstStyle/>
           <a:p>
             <a:pPr algn="ctr"/>
+            <a:endParaRPr/>
           </a:p>
         </p:txBody>
       </p:sp>
@@ -19857,7 +19938,7 @@
           <a:noFill/>
         </p:spPr>
         <p:txBody>
-          <a:bodyPr wrap="square" lIns="0" rIns="0" tIns="0" bIns="0" anchor="ctr">
+          <a:bodyPr wrap="square" lIns="0" tIns="0" rIns="0" bIns="0" anchor="ctr">
             <a:spAutoFit/>
           </a:bodyPr>
           <a:lstStyle/>
@@ -19892,7 +19973,7 @@
           <a:noFill/>
         </p:spPr>
         <p:txBody>
-          <a:bodyPr wrap="square" lIns="0" rIns="0" tIns="0" bIns="0" anchor="ctr">
+          <a:bodyPr wrap="square" lIns="0" tIns="0" rIns="0" bIns="0" anchor="ctr">
             <a:spAutoFit/>
           </a:bodyPr>
           <a:lstStyle/>
@@ -19953,6 +20034,7 @@
           <a:lstStyle/>
           <a:p>
             <a:pPr algn="ctr"/>
+            <a:endParaRPr/>
           </a:p>
         </p:txBody>
       </p:sp>
@@ -19973,7 +20055,7 @@
           <a:noFill/>
         </p:spPr>
         <p:txBody>
-          <a:bodyPr wrap="square" lIns="0" rIns="0" tIns="0" bIns="0" anchor="ctr">
+          <a:bodyPr wrap="square" lIns="0" tIns="0" rIns="0" bIns="0" anchor="ctr">
             <a:spAutoFit/>
           </a:bodyPr>
           <a:lstStyle/>
@@ -20008,7 +20090,7 @@
           <a:noFill/>
         </p:spPr>
         <p:txBody>
-          <a:bodyPr wrap="square" lIns="0" rIns="0" tIns="0" bIns="0" anchor="ctr">
+          <a:bodyPr wrap="square" lIns="0" tIns="0" rIns="0" bIns="0" anchor="ctr">
             <a:spAutoFit/>
           </a:bodyPr>
           <a:lstStyle/>
@@ -20069,6 +20151,7 @@
           <a:lstStyle/>
           <a:p>
             <a:pPr algn="ctr"/>
+            <a:endParaRPr/>
           </a:p>
         </p:txBody>
       </p:sp>
@@ -20089,7 +20172,7 @@
           <a:noFill/>
         </p:spPr>
         <p:txBody>
-          <a:bodyPr wrap="square" lIns="0" rIns="0" tIns="0" bIns="0" anchor="ctr">
+          <a:bodyPr wrap="square" lIns="0" tIns="0" rIns="0" bIns="0" anchor="ctr">
             <a:spAutoFit/>
           </a:bodyPr>
           <a:lstStyle/>
@@ -20124,7 +20207,7 @@
           <a:noFill/>
         </p:spPr>
         <p:txBody>
-          <a:bodyPr wrap="square" lIns="0" rIns="0" tIns="0" bIns="0" anchor="ctr">
+          <a:bodyPr wrap="square" lIns="0" tIns="0" rIns="0" bIns="0" anchor="ctr">
             <a:spAutoFit/>
           </a:bodyPr>
           <a:lstStyle/>
@@ -20185,6 +20268,7 @@
           <a:lstStyle/>
           <a:p>
             <a:pPr algn="ctr"/>
+            <a:endParaRPr/>
           </a:p>
         </p:txBody>
       </p:sp>
@@ -20205,7 +20289,7 @@
           <a:noFill/>
         </p:spPr>
         <p:txBody>
-          <a:bodyPr wrap="square" lIns="0" rIns="0" tIns="0" bIns="0" anchor="ctr">
+          <a:bodyPr wrap="square" lIns="0" tIns="0" rIns="0" bIns="0" anchor="ctr">
             <a:spAutoFit/>
           </a:bodyPr>
           <a:lstStyle/>
@@ -20240,7 +20324,7 @@
           <a:noFill/>
         </p:spPr>
         <p:txBody>
-          <a:bodyPr wrap="square" lIns="0" rIns="0" tIns="0" bIns="0" anchor="ctr">
+          <a:bodyPr wrap="square" lIns="0" tIns="0" rIns="0" bIns="0" anchor="ctr">
             <a:spAutoFit/>
           </a:bodyPr>
           <a:lstStyle/>
@@ -20301,6 +20385,7 @@
           <a:lstStyle/>
           <a:p>
             <a:pPr algn="ctr"/>
+            <a:endParaRPr/>
           </a:p>
         </p:txBody>
       </p:sp>
@@ -20321,7 +20406,7 @@
           <a:noFill/>
         </p:spPr>
         <p:txBody>
-          <a:bodyPr wrap="square" lIns="0" rIns="0" tIns="0" bIns="0" anchor="ctr">
+          <a:bodyPr wrap="square" lIns="0" tIns="0" rIns="0" bIns="0" anchor="ctr">
             <a:spAutoFit/>
           </a:bodyPr>
           <a:lstStyle/>
@@ -20356,7 +20441,7 @@
           <a:noFill/>
         </p:spPr>
         <p:txBody>
-          <a:bodyPr wrap="square" lIns="0" rIns="0" tIns="0" bIns="0" anchor="ctr">
+          <a:bodyPr wrap="square" lIns="0" tIns="0" rIns="0" bIns="0" anchor="ctr">
             <a:spAutoFit/>
           </a:bodyPr>
           <a:lstStyle/>
@@ -20417,6 +20502,7 @@
           <a:lstStyle/>
           <a:p>
             <a:pPr algn="ctr"/>
+            <a:endParaRPr/>
           </a:p>
         </p:txBody>
       </p:sp>
@@ -20437,7 +20523,7 @@
           <a:noFill/>
         </p:spPr>
         <p:txBody>
-          <a:bodyPr wrap="square" lIns="0" rIns="0" tIns="0" bIns="0" anchor="ctr">
+          <a:bodyPr wrap="square" lIns="0" tIns="0" rIns="0" bIns="0" anchor="ctr">
             <a:spAutoFit/>
           </a:bodyPr>
           <a:lstStyle/>
@@ -20472,7 +20558,7 @@
           <a:noFill/>
         </p:spPr>
         <p:txBody>
-          <a:bodyPr wrap="square" lIns="0" rIns="0" tIns="0" bIns="0" anchor="ctr">
+          <a:bodyPr wrap="square" lIns="0" tIns="0" rIns="0" bIns="0" anchor="ctr">
             <a:spAutoFit/>
           </a:bodyPr>
           <a:lstStyle/>
@@ -20507,7 +20593,7 @@
           <a:noFill/>
         </p:spPr>
         <p:txBody>
-          <a:bodyPr wrap="square" lIns="0" rIns="0" tIns="0" bIns="0" anchor="t">
+          <a:bodyPr wrap="square" lIns="0" tIns="0" rIns="0" bIns="0" anchor="t">
             <a:spAutoFit/>
           </a:bodyPr>
           <a:lstStyle/>
@@ -20542,7 +20628,7 @@
           <a:noFill/>
         </p:spPr>
         <p:txBody>
-          <a:bodyPr wrap="square" lIns="0" rIns="0" tIns="0" bIns="0" anchor="t">
+          <a:bodyPr wrap="square" lIns="0" tIns="0" rIns="0" bIns="0" anchor="t">
             <a:spAutoFit/>
           </a:bodyPr>
           <a:lstStyle/>
@@ -20569,7 +20655,7 @@
 </file>
 
 <file path=ppt/slides/slide5.xml><?xml version="1.0" encoding="utf-8"?>
-<p:sld xmlns:a="http://schemas.openxmlformats.org/drawingml/2006/main" xmlns:p="http://schemas.openxmlformats.org/presentationml/2006/main" xmlns:r="http://schemas.openxmlformats.org/officeDocument/2006/relationships">
+<p:sld xmlns:a="http://schemas.openxmlformats.org/drawingml/2006/main" xmlns:r="http://schemas.openxmlformats.org/officeDocument/2006/relationships" xmlns:p="http://schemas.openxmlformats.org/presentationml/2006/main">
   <p:cSld>
     <p:spTree>
       <p:nvGrpSpPr>
@@ -20577,7 +20663,14 @@
         <p:cNvGrpSpPr/>
         <p:nvPr/>
       </p:nvGrpSpPr>
-      <p:grpSpPr/>
+      <p:grpSpPr>
+        <a:xfrm>
+          <a:off x="0" y="0"/>
+          <a:ext cx="0" cy="0"/>
+          <a:chOff x="0" y="0"/>
+          <a:chExt cx="0" cy="0"/>
+        </a:xfrm>
+      </p:grpSpPr>
       <p:sp>
         <p:nvSpPr>
           <p:cNvPr id="2" name="Rectangle 1"/>
@@ -20619,6 +20712,7 @@
           <a:lstStyle/>
           <a:p>
             <a:pPr algn="ctr"/>
+            <a:endParaRPr/>
           </a:p>
         </p:txBody>
       </p:sp>
@@ -20639,7 +20733,7 @@
           <a:noFill/>
         </p:spPr>
         <p:txBody>
-          <a:bodyPr wrap="square" lIns="0" rIns="0" tIns="0" bIns="0" anchor="t">
+          <a:bodyPr wrap="square" lIns="0" tIns="0" rIns="0" bIns="0" anchor="t">
             <a:spAutoFit/>
           </a:bodyPr>
           <a:lstStyle/>
@@ -20698,6 +20792,7 @@
           <a:lstStyle/>
           <a:p>
             <a:pPr algn="ctr"/>
+            <a:endParaRPr/>
           </a:p>
         </p:txBody>
       </p:sp>
@@ -20744,6 +20839,7 @@
           <a:lstStyle/>
           <a:p>
             <a:pPr algn="ctr"/>
+            <a:endParaRPr/>
           </a:p>
         </p:txBody>
       </p:sp>
@@ -20788,6 +20884,7 @@
           <a:lstStyle/>
           <a:p>
             <a:pPr algn="ctr"/>
+            <a:endParaRPr/>
           </a:p>
         </p:txBody>
       </p:sp>
@@ -20808,7 +20905,7 @@
           <a:noFill/>
         </p:spPr>
         <p:txBody>
-          <a:bodyPr wrap="square" lIns="0" rIns="0" tIns="0" bIns="0" anchor="t">
+          <a:bodyPr wrap="square" lIns="0" tIns="0" rIns="0" bIns="0" anchor="t">
             <a:spAutoFit/>
           </a:bodyPr>
           <a:lstStyle/>
@@ -20843,7 +20940,7 @@
           <a:noFill/>
         </p:spPr>
         <p:txBody>
-          <a:bodyPr wrap="square" lIns="0" rIns="0" tIns="0" bIns="0" anchor="t">
+          <a:bodyPr wrap="square" lIns="0" tIns="0" rIns="0" bIns="0" anchor="t">
             <a:spAutoFit/>
           </a:bodyPr>
           <a:lstStyle/>
@@ -20904,6 +21001,7 @@
           <a:lstStyle/>
           <a:p>
             <a:pPr algn="ctr"/>
+            <a:endParaRPr/>
           </a:p>
         </p:txBody>
       </p:sp>
@@ -20948,6 +21046,7 @@
           <a:lstStyle/>
           <a:p>
             <a:pPr algn="ctr"/>
+            <a:endParaRPr/>
           </a:p>
         </p:txBody>
       </p:sp>
@@ -20968,7 +21067,7 @@
           <a:noFill/>
         </p:spPr>
         <p:txBody>
-          <a:bodyPr wrap="square" lIns="0" rIns="0" tIns="0" bIns="0" anchor="t">
+          <a:bodyPr wrap="square" lIns="0" tIns="0" rIns="0" bIns="0" anchor="t">
             <a:spAutoFit/>
           </a:bodyPr>
           <a:lstStyle/>
@@ -21003,7 +21102,7 @@
           <a:noFill/>
         </p:spPr>
         <p:txBody>
-          <a:bodyPr wrap="square" lIns="0" rIns="0" tIns="0" bIns="0" anchor="t">
+          <a:bodyPr wrap="square" lIns="0" tIns="0" rIns="0" bIns="0" anchor="t">
             <a:spAutoFit/>
           </a:bodyPr>
           <a:lstStyle/>
@@ -21064,6 +21163,7 @@
           <a:lstStyle/>
           <a:p>
             <a:pPr algn="ctr"/>
+            <a:endParaRPr/>
           </a:p>
         </p:txBody>
       </p:sp>
@@ -21108,6 +21208,7 @@
           <a:lstStyle/>
           <a:p>
             <a:pPr algn="ctr"/>
+            <a:endParaRPr/>
           </a:p>
         </p:txBody>
       </p:sp>
@@ -21128,7 +21229,7 @@
           <a:noFill/>
         </p:spPr>
         <p:txBody>
-          <a:bodyPr wrap="square" lIns="0" rIns="0" tIns="0" bIns="0" anchor="t">
+          <a:bodyPr wrap="square" lIns="0" tIns="0" rIns="0" bIns="0" anchor="t">
             <a:spAutoFit/>
           </a:bodyPr>
           <a:lstStyle/>
@@ -21163,7 +21264,7 @@
           <a:noFill/>
         </p:spPr>
         <p:txBody>
-          <a:bodyPr wrap="square" lIns="0" rIns="0" tIns="0" bIns="0" anchor="t">
+          <a:bodyPr wrap="square" lIns="0" tIns="0" rIns="0" bIns="0" anchor="t">
             <a:spAutoFit/>
           </a:bodyPr>
           <a:lstStyle/>
@@ -21224,6 +21325,7 @@
           <a:lstStyle/>
           <a:p>
             <a:pPr algn="ctr"/>
+            <a:endParaRPr/>
           </a:p>
         </p:txBody>
       </p:sp>
@@ -21268,6 +21370,7 @@
           <a:lstStyle/>
           <a:p>
             <a:pPr algn="ctr"/>
+            <a:endParaRPr/>
           </a:p>
         </p:txBody>
       </p:sp>
@@ -21288,7 +21391,7 @@
           <a:noFill/>
         </p:spPr>
         <p:txBody>
-          <a:bodyPr wrap="square" lIns="0" rIns="0" tIns="0" bIns="0" anchor="t">
+          <a:bodyPr wrap="square" lIns="0" tIns="0" rIns="0" bIns="0" anchor="t">
             <a:spAutoFit/>
           </a:bodyPr>
           <a:lstStyle/>
@@ -21323,7 +21426,7 @@
           <a:noFill/>
         </p:spPr>
         <p:txBody>
-          <a:bodyPr wrap="square" lIns="0" rIns="0" tIns="0" bIns="0" anchor="t">
+          <a:bodyPr wrap="square" lIns="0" tIns="0" rIns="0" bIns="0" anchor="t">
             <a:spAutoFit/>
           </a:bodyPr>
           <a:lstStyle/>
@@ -21358,7 +21461,7 @@
           <a:noFill/>
         </p:spPr>
         <p:txBody>
-          <a:bodyPr wrap="square" lIns="0" rIns="0" tIns="0" bIns="0" anchor="t">
+          <a:bodyPr wrap="square" lIns="0" tIns="0" rIns="0" bIns="0" anchor="t">
             <a:spAutoFit/>
           </a:bodyPr>
           <a:lstStyle/>
@@ -21393,7 +21496,7 @@
           <a:noFill/>
         </p:spPr>
         <p:txBody>
-          <a:bodyPr wrap="square" lIns="0" rIns="0" tIns="0" bIns="0" anchor="t">
+          <a:bodyPr wrap="square" lIns="0" tIns="0" rIns="0" bIns="0" anchor="t">
             <a:spAutoFit/>
           </a:bodyPr>
           <a:lstStyle/>
@@ -21420,7 +21523,7 @@
 </file>
 
 <file path=ppt/slides/slide6.xml><?xml version="1.0" encoding="utf-8"?>
-<p:sld xmlns:a="http://schemas.openxmlformats.org/drawingml/2006/main" xmlns:p="http://schemas.openxmlformats.org/presentationml/2006/main" xmlns:r="http://schemas.openxmlformats.org/officeDocument/2006/relationships">
+<p:sld xmlns:a="http://schemas.openxmlformats.org/drawingml/2006/main" xmlns:r="http://schemas.openxmlformats.org/officeDocument/2006/relationships" xmlns:p="http://schemas.openxmlformats.org/presentationml/2006/main">
   <p:cSld>
     <p:spTree>
       <p:nvGrpSpPr>
@@ -21428,7 +21531,14 @@
         <p:cNvGrpSpPr/>
         <p:nvPr/>
       </p:nvGrpSpPr>
-      <p:grpSpPr/>
+      <p:grpSpPr>
+        <a:xfrm>
+          <a:off x="0" y="0"/>
+          <a:ext cx="0" cy="0"/>
+          <a:chOff x="0" y="0"/>
+          <a:chExt cx="0" cy="0"/>
+        </a:xfrm>
+      </p:grpSpPr>
       <p:sp>
         <p:nvSpPr>
           <p:cNvPr id="2" name="Rectangle 1"/>
@@ -21470,6 +21580,7 @@
           <a:lstStyle/>
           <a:p>
             <a:pPr algn="ctr"/>
+            <a:endParaRPr/>
           </a:p>
         </p:txBody>
       </p:sp>
@@ -21490,7 +21601,7 @@
           <a:noFill/>
         </p:spPr>
         <p:txBody>
-          <a:bodyPr wrap="square" lIns="0" rIns="0" tIns="0" bIns="0" anchor="t">
+          <a:bodyPr wrap="square" lIns="0" tIns="0" rIns="0" bIns="0" anchor="t">
             <a:spAutoFit/>
           </a:bodyPr>
           <a:lstStyle/>
@@ -21549,6 +21660,7 @@
           <a:lstStyle/>
           <a:p>
             <a:pPr algn="ctr"/>
+            <a:endParaRPr/>
           </a:p>
         </p:txBody>
       </p:sp>
@@ -21595,6 +21707,7 @@
           <a:lstStyle/>
           <a:p>
             <a:pPr algn="ctr"/>
+            <a:endParaRPr/>
           </a:p>
         </p:txBody>
       </p:sp>
@@ -21615,7 +21728,7 @@
           <a:noFill/>
         </p:spPr>
         <p:txBody>
-          <a:bodyPr wrap="square" lIns="0" rIns="0" tIns="0" bIns="0" anchor="t">
+          <a:bodyPr wrap="square" lIns="0" tIns="0" rIns="0" bIns="0" anchor="t">
             <a:spAutoFit/>
           </a:bodyPr>
           <a:lstStyle/>
@@ -21830,7 +21943,7 @@
           <a:noFill/>
         </p:spPr>
         <p:txBody>
-          <a:bodyPr wrap="square" lIns="0" rIns="0" tIns="0" bIns="0" anchor="t">
+          <a:bodyPr wrap="square" lIns="0" tIns="0" rIns="0" bIns="0" anchor="t">
             <a:spAutoFit/>
           </a:bodyPr>
           <a:lstStyle/>
@@ -21865,7 +21978,7 @@
           <a:noFill/>
         </p:spPr>
         <p:txBody>
-          <a:bodyPr wrap="square" lIns="0" rIns="0" tIns="0" bIns="0" anchor="t">
+          <a:bodyPr wrap="square" lIns="0" tIns="0" rIns="0" bIns="0" anchor="t">
             <a:spAutoFit/>
           </a:bodyPr>
           <a:lstStyle/>
@@ -21892,7 +22005,7 @@
 </file>
 
 <file path=ppt/slides/slide7.xml><?xml version="1.0" encoding="utf-8"?>
-<p:sld xmlns:a="http://schemas.openxmlformats.org/drawingml/2006/main" xmlns:p="http://schemas.openxmlformats.org/presentationml/2006/main" xmlns:r="http://schemas.openxmlformats.org/officeDocument/2006/relationships">
+<p:sld xmlns:a="http://schemas.openxmlformats.org/drawingml/2006/main" xmlns:r="http://schemas.openxmlformats.org/officeDocument/2006/relationships" xmlns:p="http://schemas.openxmlformats.org/presentationml/2006/main">
   <p:cSld>
     <p:spTree>
       <p:nvGrpSpPr>
@@ -21900,7 +22013,14 @@
         <p:cNvGrpSpPr/>
         <p:nvPr/>
       </p:nvGrpSpPr>
-      <p:grpSpPr/>
+      <p:grpSpPr>
+        <a:xfrm>
+          <a:off x="0" y="0"/>
+          <a:ext cx="0" cy="0"/>
+          <a:chOff x="0" y="0"/>
+          <a:chExt cx="0" cy="0"/>
+        </a:xfrm>
+      </p:grpSpPr>
       <p:sp>
         <p:nvSpPr>
           <p:cNvPr id="2" name="Rectangle 1"/>
@@ -21942,6 +22062,7 @@
           <a:lstStyle/>
           <a:p>
             <a:pPr algn="ctr"/>
+            <a:endParaRPr/>
           </a:p>
         </p:txBody>
       </p:sp>
@@ -21962,7 +22083,7 @@
           <a:noFill/>
         </p:spPr>
         <p:txBody>
-          <a:bodyPr wrap="square" lIns="0" rIns="0" tIns="0" bIns="0" anchor="t">
+          <a:bodyPr wrap="square" lIns="0" tIns="0" rIns="0" bIns="0" anchor="t">
             <a:spAutoFit/>
           </a:bodyPr>
           <a:lstStyle/>
@@ -22021,6 +22142,7 @@
           <a:lstStyle/>
           <a:p>
             <a:pPr algn="ctr"/>
+            <a:endParaRPr/>
           </a:p>
         </p:txBody>
       </p:sp>
@@ -22065,6 +22187,7 @@
           <a:lstStyle/>
           <a:p>
             <a:pPr algn="ctr"/>
+            <a:endParaRPr/>
           </a:p>
         </p:txBody>
       </p:sp>
@@ -22085,7 +22208,7 @@
           <a:noFill/>
         </p:spPr>
         <p:txBody>
-          <a:bodyPr wrap="square" lIns="0" rIns="0" tIns="0" bIns="0" anchor="ctr">
+          <a:bodyPr wrap="square" lIns="0" tIns="0" rIns="0" bIns="0" anchor="ctr">
             <a:spAutoFit/>
           </a:bodyPr>
           <a:lstStyle/>
@@ -22146,6 +22269,7 @@
           <a:lstStyle/>
           <a:p>
             <a:pPr algn="ctr"/>
+            <a:endParaRPr/>
           </a:p>
         </p:txBody>
       </p:sp>
@@ -22166,7 +22290,7 @@
           <a:noFill/>
         </p:spPr>
         <p:txBody>
-          <a:bodyPr wrap="square" lIns="0" rIns="0" tIns="0" bIns="0" anchor="ctr">
+          <a:bodyPr wrap="square" lIns="0" tIns="0" rIns="0" bIns="0" anchor="ctr">
             <a:spAutoFit/>
           </a:bodyPr>
           <a:lstStyle/>
@@ -22201,7 +22325,7 @@
           <a:noFill/>
         </p:spPr>
         <p:txBody>
-          <a:bodyPr wrap="square" lIns="0" rIns="0" tIns="0" bIns="0" anchor="ctr">
+          <a:bodyPr wrap="square" lIns="0" tIns="0" rIns="0" bIns="0" anchor="ctr">
             <a:spAutoFit/>
           </a:bodyPr>
           <a:lstStyle/>
@@ -22260,6 +22384,7 @@
           <a:lstStyle/>
           <a:p>
             <a:pPr algn="ctr"/>
+            <a:endParaRPr/>
           </a:p>
         </p:txBody>
       </p:sp>
@@ -22280,7 +22405,7 @@
           <a:noFill/>
         </p:spPr>
         <p:txBody>
-          <a:bodyPr wrap="square" lIns="0" rIns="0" tIns="0" bIns="0" anchor="ctr">
+          <a:bodyPr wrap="square" lIns="0" tIns="0" rIns="0" bIns="0" anchor="ctr">
             <a:spAutoFit/>
           </a:bodyPr>
           <a:lstStyle/>
@@ -22341,6 +22466,7 @@
           <a:lstStyle/>
           <a:p>
             <a:pPr algn="ctr"/>
+            <a:endParaRPr/>
           </a:p>
         </p:txBody>
       </p:sp>
@@ -22361,7 +22487,7 @@
           <a:noFill/>
         </p:spPr>
         <p:txBody>
-          <a:bodyPr wrap="square" lIns="0" rIns="0" tIns="0" bIns="0" anchor="ctr">
+          <a:bodyPr wrap="square" lIns="0" tIns="0" rIns="0" bIns="0" anchor="ctr">
             <a:spAutoFit/>
           </a:bodyPr>
           <a:lstStyle/>
@@ -22396,7 +22522,7 @@
           <a:noFill/>
         </p:spPr>
         <p:txBody>
-          <a:bodyPr wrap="square" lIns="0" rIns="0" tIns="0" bIns="0" anchor="ctr">
+          <a:bodyPr wrap="square" lIns="0" tIns="0" rIns="0" bIns="0" anchor="ctr">
             <a:spAutoFit/>
           </a:bodyPr>
           <a:lstStyle/>
@@ -22455,6 +22581,7 @@
           <a:lstStyle/>
           <a:p>
             <a:pPr algn="ctr"/>
+            <a:endParaRPr/>
           </a:p>
         </p:txBody>
       </p:sp>
@@ -22475,7 +22602,7 @@
           <a:noFill/>
         </p:spPr>
         <p:txBody>
-          <a:bodyPr wrap="square" lIns="0" rIns="0" tIns="0" bIns="0" anchor="ctr">
+          <a:bodyPr wrap="square" lIns="0" tIns="0" rIns="0" bIns="0" anchor="ctr">
             <a:spAutoFit/>
           </a:bodyPr>
           <a:lstStyle/>
@@ -22536,6 +22663,7 @@
           <a:lstStyle/>
           <a:p>
             <a:pPr algn="ctr"/>
+            <a:endParaRPr/>
           </a:p>
         </p:txBody>
       </p:sp>
@@ -22556,7 +22684,7 @@
           <a:noFill/>
         </p:spPr>
         <p:txBody>
-          <a:bodyPr wrap="square" lIns="0" rIns="0" tIns="0" bIns="0" anchor="ctr">
+          <a:bodyPr wrap="square" lIns="0" tIns="0" rIns="0" bIns="0" anchor="ctr">
             <a:spAutoFit/>
           </a:bodyPr>
           <a:lstStyle/>
@@ -22591,7 +22719,7 @@
           <a:noFill/>
         </p:spPr>
         <p:txBody>
-          <a:bodyPr wrap="square" lIns="0" rIns="0" tIns="0" bIns="0" anchor="ctr">
+          <a:bodyPr wrap="square" lIns="0" tIns="0" rIns="0" bIns="0" anchor="ctr">
             <a:spAutoFit/>
           </a:bodyPr>
           <a:lstStyle/>
@@ -22650,6 +22778,7 @@
           <a:lstStyle/>
           <a:p>
             <a:pPr algn="ctr"/>
+            <a:endParaRPr/>
           </a:p>
         </p:txBody>
       </p:sp>
@@ -22670,7 +22799,7 @@
           <a:noFill/>
         </p:spPr>
         <p:txBody>
-          <a:bodyPr wrap="square" lIns="0" rIns="0" tIns="0" bIns="0" anchor="ctr">
+          <a:bodyPr wrap="square" lIns="0" tIns="0" rIns="0" bIns="0" anchor="ctr">
             <a:spAutoFit/>
           </a:bodyPr>
           <a:lstStyle/>
@@ -22731,6 +22860,7 @@
           <a:lstStyle/>
           <a:p>
             <a:pPr algn="ctr"/>
+            <a:endParaRPr/>
           </a:p>
         </p:txBody>
       </p:sp>
@@ -22751,7 +22881,7 @@
           <a:noFill/>
         </p:spPr>
         <p:txBody>
-          <a:bodyPr wrap="square" lIns="0" rIns="0" tIns="0" bIns="0" anchor="ctr">
+          <a:bodyPr wrap="square" lIns="0" tIns="0" rIns="0" bIns="0" anchor="ctr">
             <a:spAutoFit/>
           </a:bodyPr>
           <a:lstStyle/>
@@ -22786,7 +22916,7 @@
           <a:noFill/>
         </p:spPr>
         <p:txBody>
-          <a:bodyPr wrap="square" lIns="0" rIns="0" tIns="0" bIns="0" anchor="ctr">
+          <a:bodyPr wrap="square" lIns="0" tIns="0" rIns="0" bIns="0" anchor="ctr">
             <a:spAutoFit/>
           </a:bodyPr>
           <a:lstStyle/>
@@ -22845,6 +22975,7 @@
           <a:lstStyle/>
           <a:p>
             <a:pPr algn="ctr"/>
+            <a:endParaRPr/>
           </a:p>
         </p:txBody>
       </p:sp>
@@ -22865,7 +22996,7 @@
           <a:noFill/>
         </p:spPr>
         <p:txBody>
-          <a:bodyPr wrap="square" lIns="0" rIns="0" tIns="0" bIns="0" anchor="ctr">
+          <a:bodyPr wrap="square" lIns="0" tIns="0" rIns="0" bIns="0" anchor="ctr">
             <a:spAutoFit/>
           </a:bodyPr>
           <a:lstStyle/>
@@ -22926,6 +23057,7 @@
           <a:lstStyle/>
           <a:p>
             <a:pPr algn="ctr"/>
+            <a:endParaRPr/>
           </a:p>
         </p:txBody>
       </p:sp>
@@ -22946,7 +23078,7 @@
           <a:noFill/>
         </p:spPr>
         <p:txBody>
-          <a:bodyPr wrap="square" lIns="0" rIns="0" tIns="0" bIns="0" anchor="ctr">
+          <a:bodyPr wrap="square" lIns="0" tIns="0" rIns="0" bIns="0" anchor="ctr">
             <a:spAutoFit/>
           </a:bodyPr>
           <a:lstStyle/>
@@ -22981,7 +23113,7 @@
           <a:noFill/>
         </p:spPr>
         <p:txBody>
-          <a:bodyPr wrap="square" lIns="0" rIns="0" tIns="0" bIns="0" anchor="ctr">
+          <a:bodyPr wrap="square" lIns="0" tIns="0" rIns="0" bIns="0" anchor="ctr">
             <a:spAutoFit/>
           </a:bodyPr>
           <a:lstStyle/>
@@ -23040,6 +23172,7 @@
           <a:lstStyle/>
           <a:p>
             <a:pPr algn="ctr"/>
+            <a:endParaRPr/>
           </a:p>
         </p:txBody>
       </p:sp>
@@ -23060,7 +23193,7 @@
           <a:noFill/>
         </p:spPr>
         <p:txBody>
-          <a:bodyPr wrap="square" lIns="0" rIns="0" tIns="0" bIns="0" anchor="ctr">
+          <a:bodyPr wrap="square" lIns="0" tIns="0" rIns="0" bIns="0" anchor="ctr">
             <a:spAutoFit/>
           </a:bodyPr>
           <a:lstStyle/>
@@ -23121,6 +23254,7 @@
           <a:lstStyle/>
           <a:p>
             <a:pPr algn="ctr"/>
+            <a:endParaRPr/>
           </a:p>
         </p:txBody>
       </p:sp>
@@ -23141,7 +23275,7 @@
           <a:noFill/>
         </p:spPr>
         <p:txBody>
-          <a:bodyPr wrap="square" lIns="0" rIns="0" tIns="0" bIns="0" anchor="ctr">
+          <a:bodyPr wrap="square" lIns="0" tIns="0" rIns="0" bIns="0" anchor="ctr">
             <a:spAutoFit/>
           </a:bodyPr>
           <a:lstStyle/>
@@ -23176,7 +23310,7 @@
           <a:noFill/>
         </p:spPr>
         <p:txBody>
-          <a:bodyPr wrap="square" lIns="0" rIns="0" tIns="0" bIns="0" anchor="ctr">
+          <a:bodyPr wrap="square" lIns="0" tIns="0" rIns="0" bIns="0" anchor="ctr">
             <a:spAutoFit/>
           </a:bodyPr>
           <a:lstStyle/>
@@ -23235,6 +23369,7 @@
           <a:lstStyle/>
           <a:p>
             <a:pPr algn="ctr"/>
+            <a:endParaRPr/>
           </a:p>
         </p:txBody>
       </p:sp>
@@ -23255,7 +23390,7 @@
           <a:noFill/>
         </p:spPr>
         <p:txBody>
-          <a:bodyPr wrap="square" lIns="0" rIns="0" tIns="0" bIns="0" anchor="ctr">
+          <a:bodyPr wrap="square" lIns="0" tIns="0" rIns="0" bIns="0" anchor="ctr">
             <a:spAutoFit/>
           </a:bodyPr>
           <a:lstStyle/>
@@ -23316,6 +23451,7 @@
           <a:lstStyle/>
           <a:p>
             <a:pPr algn="ctr"/>
+            <a:endParaRPr/>
           </a:p>
         </p:txBody>
       </p:sp>
@@ -23336,7 +23472,7 @@
           <a:noFill/>
         </p:spPr>
         <p:txBody>
-          <a:bodyPr wrap="square" lIns="0" rIns="0" tIns="0" bIns="0" anchor="ctr">
+          <a:bodyPr wrap="square" lIns="0" tIns="0" rIns="0" bIns="0" anchor="ctr">
             <a:spAutoFit/>
           </a:bodyPr>
           <a:lstStyle/>
@@ -23371,7 +23507,7 @@
           <a:noFill/>
         </p:spPr>
         <p:txBody>
-          <a:bodyPr wrap="square" lIns="0" rIns="0" tIns="0" bIns="0" anchor="ctr">
+          <a:bodyPr wrap="square" lIns="0" tIns="0" rIns="0" bIns="0" anchor="ctr">
             <a:spAutoFit/>
           </a:bodyPr>
           <a:lstStyle/>
@@ -23430,6 +23566,7 @@
           <a:lstStyle/>
           <a:p>
             <a:pPr algn="ctr"/>
+            <a:endParaRPr/>
           </a:p>
         </p:txBody>
       </p:sp>
@@ -23450,7 +23587,7 @@
           <a:noFill/>
         </p:spPr>
         <p:txBody>
-          <a:bodyPr wrap="square" lIns="0" rIns="0" tIns="0" bIns="0" anchor="ctr">
+          <a:bodyPr wrap="square" lIns="0" tIns="0" rIns="0" bIns="0" anchor="ctr">
             <a:spAutoFit/>
           </a:bodyPr>
           <a:lstStyle/>
@@ -23511,6 +23648,7 @@
           <a:lstStyle/>
           <a:p>
             <a:pPr algn="ctr"/>
+            <a:endParaRPr/>
           </a:p>
         </p:txBody>
       </p:sp>
@@ -23531,7 +23669,7 @@
           <a:noFill/>
         </p:spPr>
         <p:txBody>
-          <a:bodyPr wrap="square" lIns="0" rIns="0" tIns="0" bIns="0" anchor="ctr">
+          <a:bodyPr wrap="square" lIns="0" tIns="0" rIns="0" bIns="0" anchor="ctr">
             <a:spAutoFit/>
           </a:bodyPr>
           <a:lstStyle/>
@@ -23566,7 +23704,7 @@
           <a:noFill/>
         </p:spPr>
         <p:txBody>
-          <a:bodyPr wrap="square" lIns="0" rIns="0" tIns="0" bIns="0" anchor="ctr">
+          <a:bodyPr wrap="square" lIns="0" tIns="0" rIns="0" bIns="0" anchor="ctr">
             <a:spAutoFit/>
           </a:bodyPr>
           <a:lstStyle/>
@@ -23601,7 +23739,7 @@
           <a:noFill/>
         </p:spPr>
         <p:txBody>
-          <a:bodyPr wrap="square" lIns="0" rIns="0" tIns="0" bIns="0" anchor="t">
+          <a:bodyPr wrap="square" lIns="0" tIns="0" rIns="0" bIns="0" anchor="t">
             <a:spAutoFit/>
           </a:bodyPr>
           <a:lstStyle/>
@@ -23636,7 +23774,7 @@
           <a:noFill/>
         </p:spPr>
         <p:txBody>
-          <a:bodyPr wrap="square" lIns="0" rIns="0" tIns="0" bIns="0" anchor="t">
+          <a:bodyPr wrap="square" lIns="0" tIns="0" rIns="0" bIns="0" anchor="t">
             <a:spAutoFit/>
           </a:bodyPr>
           <a:lstStyle/>
@@ -23663,7 +23801,7 @@
 </file>
 
 <file path=ppt/slides/slide8.xml><?xml version="1.0" encoding="utf-8"?>
-<p:sld xmlns:a="http://schemas.openxmlformats.org/drawingml/2006/main" xmlns:p="http://schemas.openxmlformats.org/presentationml/2006/main" xmlns:r="http://schemas.openxmlformats.org/officeDocument/2006/relationships">
+<p:sld xmlns:a="http://schemas.openxmlformats.org/drawingml/2006/main" xmlns:r="http://schemas.openxmlformats.org/officeDocument/2006/relationships" xmlns:p="http://schemas.openxmlformats.org/presentationml/2006/main">
   <p:cSld>
     <p:spTree>
       <p:nvGrpSpPr>
@@ -23671,7 +23809,14 @@
         <p:cNvGrpSpPr/>
         <p:nvPr/>
       </p:nvGrpSpPr>
-      <p:grpSpPr/>
+      <p:grpSpPr>
+        <a:xfrm>
+          <a:off x="0" y="0"/>
+          <a:ext cx="0" cy="0"/>
+          <a:chOff x="0" y="0"/>
+          <a:chExt cx="0" cy="0"/>
+        </a:xfrm>
+      </p:grpSpPr>
       <p:sp>
         <p:nvSpPr>
           <p:cNvPr id="2" name="Rectangle 1"/>
@@ -23713,6 +23858,7 @@
           <a:lstStyle/>
           <a:p>
             <a:pPr algn="ctr"/>
+            <a:endParaRPr/>
           </a:p>
         </p:txBody>
       </p:sp>
@@ -23733,7 +23879,7 @@
           <a:noFill/>
         </p:spPr>
         <p:txBody>
-          <a:bodyPr wrap="square" lIns="0" rIns="0" tIns="0" bIns="0" anchor="t">
+          <a:bodyPr wrap="square" lIns="0" tIns="0" rIns="0" bIns="0" anchor="t">
             <a:spAutoFit/>
           </a:bodyPr>
           <a:lstStyle/>
@@ -23792,6 +23938,7 @@
           <a:lstStyle/>
           <a:p>
             <a:pPr algn="ctr"/>
+            <a:endParaRPr/>
           </a:p>
         </p:txBody>
       </p:sp>
@@ -23838,6 +23985,7 @@
           <a:lstStyle/>
           <a:p>
             <a:pPr algn="ctr"/>
+            <a:endParaRPr/>
           </a:p>
         </p:txBody>
       </p:sp>
@@ -23858,7 +24006,7 @@
           <a:noFill/>
         </p:spPr>
         <p:txBody>
-          <a:bodyPr wrap="square" lIns="0" rIns="0" tIns="0" bIns="0" anchor="t">
+          <a:bodyPr wrap="square" lIns="0" tIns="0" rIns="0" bIns="0" anchor="t">
             <a:spAutoFit/>
           </a:bodyPr>
           <a:lstStyle/>
@@ -24039,6 +24187,7 @@
           <a:lstStyle/>
           <a:p>
             <a:pPr algn="ctr"/>
+            <a:endParaRPr/>
           </a:p>
         </p:txBody>
       </p:sp>
@@ -24059,7 +24208,7 @@
           <a:noFill/>
         </p:spPr>
         <p:txBody>
-          <a:bodyPr wrap="square" lIns="0" rIns="0" tIns="0" bIns="0" anchor="t">
+          <a:bodyPr wrap="square" lIns="0" tIns="0" rIns="0" bIns="0" anchor="t">
             <a:spAutoFit/>
           </a:bodyPr>
           <a:lstStyle/>
@@ -24094,7 +24243,7 @@
           <a:noFill/>
         </p:spPr>
         <p:txBody>
-          <a:bodyPr wrap="square" lIns="0" rIns="0" tIns="0" bIns="0" anchor="t">
+          <a:bodyPr wrap="square" lIns="0" tIns="0" rIns="0" bIns="0" anchor="t">
             <a:spAutoFit/>
           </a:bodyPr>
           <a:lstStyle/>
@@ -24132,7 +24281,7 @@
           <a:noFill/>
         </p:spPr>
         <p:txBody>
-          <a:bodyPr wrap="square" lIns="0" rIns="0" tIns="0" bIns="0" anchor="t">
+          <a:bodyPr wrap="square" lIns="0" tIns="0" rIns="0" bIns="0" anchor="t">
             <a:spAutoFit/>
           </a:bodyPr>
           <a:lstStyle/>
@@ -24167,7 +24316,7 @@
           <a:noFill/>
         </p:spPr>
         <p:txBody>
-          <a:bodyPr wrap="square" lIns="0" rIns="0" tIns="0" bIns="0" anchor="t">
+          <a:bodyPr wrap="square" lIns="0" tIns="0" rIns="0" bIns="0" anchor="t">
             <a:spAutoFit/>
           </a:bodyPr>
           <a:lstStyle/>
@@ -24194,7 +24343,7 @@
 </file>
 
 <file path=ppt/slides/slide9.xml><?xml version="1.0" encoding="utf-8"?>
-<p:sld xmlns:a="http://schemas.openxmlformats.org/drawingml/2006/main" xmlns:p="http://schemas.openxmlformats.org/presentationml/2006/main" xmlns:r="http://schemas.openxmlformats.org/officeDocument/2006/relationships">
+<p:sld xmlns:a="http://schemas.openxmlformats.org/drawingml/2006/main" xmlns:r="http://schemas.openxmlformats.org/officeDocument/2006/relationships" xmlns:p="http://schemas.openxmlformats.org/presentationml/2006/main">
   <p:cSld>
     <p:spTree>
       <p:nvGrpSpPr>
@@ -24202,7 +24351,14 @@
         <p:cNvGrpSpPr/>
         <p:nvPr/>
       </p:nvGrpSpPr>
-      <p:grpSpPr/>
+      <p:grpSpPr>
+        <a:xfrm>
+          <a:off x="0" y="0"/>
+          <a:ext cx="0" cy="0"/>
+          <a:chOff x="0" y="0"/>
+          <a:chExt cx="0" cy="0"/>
+        </a:xfrm>
+      </p:grpSpPr>
       <p:sp>
         <p:nvSpPr>
           <p:cNvPr id="2" name="Rectangle 1"/>
@@ -24244,6 +24400,7 @@
           <a:lstStyle/>
           <a:p>
             <a:pPr algn="ctr"/>
+            <a:endParaRPr/>
           </a:p>
         </p:txBody>
       </p:sp>
@@ -24264,7 +24421,7 @@
           <a:noFill/>
         </p:spPr>
         <p:txBody>
-          <a:bodyPr wrap="square" lIns="0" rIns="0" tIns="0" bIns="0" anchor="t">
+          <a:bodyPr wrap="square" lIns="0" tIns="0" rIns="0" bIns="0" anchor="t">
             <a:spAutoFit/>
           </a:bodyPr>
           <a:lstStyle/>
@@ -24299,7 +24456,7 @@
           <a:noFill/>
         </p:spPr>
         <p:txBody>
-          <a:bodyPr wrap="square" lIns="0" rIns="0" tIns="0" bIns="0" anchor="t">
+          <a:bodyPr wrap="square" lIns="0" tIns="0" rIns="0" bIns="0" anchor="t">
             <a:spAutoFit/>
           </a:bodyPr>
           <a:lstStyle/>
@@ -24358,6 +24515,7 @@
           <a:lstStyle/>
           <a:p>
             <a:pPr algn="ctr"/>
+            <a:endParaRPr/>
           </a:p>
         </p:txBody>
       </p:sp>
@@ -24404,6 +24562,7 @@
           <a:lstStyle/>
           <a:p>
             <a:pPr algn="ctr"/>
+            <a:endParaRPr/>
           </a:p>
         </p:txBody>
       </p:sp>
@@ -24424,7 +24583,7 @@
           <a:noFill/>
         </p:spPr>
         <p:txBody>
-          <a:bodyPr wrap="square" lIns="0" rIns="0" tIns="0" bIns="0" anchor="t">
+          <a:bodyPr wrap="square" lIns="0" tIns="0" rIns="0" bIns="0" anchor="t">
             <a:spAutoFit/>
           </a:bodyPr>
           <a:lstStyle/>
@@ -24641,6 +24800,7 @@
           <a:lstStyle/>
           <a:p>
             <a:pPr algn="ctr"/>
+            <a:endParaRPr/>
           </a:p>
         </p:txBody>
       </p:sp>
@@ -24661,7 +24821,7 @@
           <a:noFill/>
         </p:spPr>
         <p:txBody>
-          <a:bodyPr wrap="square" lIns="0" rIns="0" tIns="0" bIns="0" anchor="t">
+          <a:bodyPr wrap="square" lIns="0" tIns="0" rIns="0" bIns="0" anchor="t">
             <a:spAutoFit/>
           </a:bodyPr>
           <a:lstStyle/>
@@ -24696,7 +24856,7 @@
           <a:noFill/>
         </p:spPr>
         <p:txBody>
-          <a:bodyPr wrap="square" lIns="0" rIns="0" tIns="0" bIns="0" anchor="t">
+          <a:bodyPr wrap="square" lIns="0" tIns="0" rIns="0" bIns="0" anchor="t">
             <a:spAutoFit/>
           </a:bodyPr>
           <a:lstStyle/>
@@ -24734,7 +24894,7 @@
           <a:noFill/>
         </p:spPr>
         <p:txBody>
-          <a:bodyPr wrap="square" lIns="0" rIns="0" tIns="0" bIns="0" anchor="t">
+          <a:bodyPr wrap="square" lIns="0" tIns="0" rIns="0" bIns="0" anchor="t">
             <a:spAutoFit/>
           </a:bodyPr>
           <a:lstStyle/>
@@ -24769,7 +24929,7 @@
           <a:noFill/>
         </p:spPr>
         <p:txBody>
-          <a:bodyPr wrap="square" lIns="0" rIns="0" tIns="0" bIns="0" anchor="t">
+          <a:bodyPr wrap="square" lIns="0" tIns="0" rIns="0" bIns="0" anchor="t">
             <a:spAutoFit/>
           </a:bodyPr>
           <a:lstStyle/>
@@ -25126,44 +25286,44 @@
         <a:sysClr val="window" lastClr="FFFFFF"/>
       </a:lt1>
       <a:dk2>
-        <a:srgbClr val="1F497D"/>
+        <a:srgbClr val="0E2841"/>
       </a:dk2>
       <a:lt2>
-        <a:srgbClr val="EEECE1"/>
+        <a:srgbClr val="E8E8E8"/>
       </a:lt2>
       <a:accent1>
-        <a:srgbClr val="4F81BD"/>
+        <a:srgbClr val="156082"/>
       </a:accent1>
       <a:accent2>
-        <a:srgbClr val="C0504D"/>
+        <a:srgbClr val="E97132"/>
       </a:accent2>
       <a:accent3>
-        <a:srgbClr val="9BBB59"/>
+        <a:srgbClr val="196B24"/>
       </a:accent3>
       <a:accent4>
-        <a:srgbClr val="8064A2"/>
+        <a:srgbClr val="0F9ED5"/>
       </a:accent4>
       <a:accent5>
-        <a:srgbClr val="4BACC6"/>
+        <a:srgbClr val="A02B93"/>
       </a:accent5>
       <a:accent6>
-        <a:srgbClr val="F79646"/>
+        <a:srgbClr val="4EA72E"/>
       </a:accent6>
       <a:hlink>
-        <a:srgbClr val="0000FF"/>
+        <a:srgbClr val="467886"/>
       </a:hlink>
       <a:folHlink>
-        <a:srgbClr val="800080"/>
+        <a:srgbClr val="96607D"/>
       </a:folHlink>
     </a:clrScheme>
     <a:fontScheme name="Office">
       <a:majorFont>
-        <a:latin typeface="Calibri"/>
+        <a:latin typeface="Aptos Display" panose="02110004020202020204"/>
         <a:ea typeface=""/>
         <a:cs typeface=""/>
-        <a:font script="Jpan" typeface="ＭＳ Ｐゴシック"/>
+        <a:font script="Jpan" typeface="游ゴシック Light"/>
         <a:font script="Hang" typeface="맑은 고딕"/>
-        <a:font script="Hans" typeface="宋体"/>
+        <a:font script="Hans" typeface="等线 Light"/>
         <a:font script="Hant" typeface="新細明體"/>
         <a:font script="Arab" typeface="Times New Roman"/>
         <a:font script="Hebr" typeface="Times New Roman"/>
@@ -25191,14 +25351,31 @@
         <a:font script="Viet" typeface="Times New Roman"/>
         <a:font script="Uigh" typeface="Microsoft Uighur"/>
         <a:font script="Geor" typeface="Sylfaen"/>
+        <a:font script="Armn" typeface="Arial"/>
+        <a:font script="Bugi" typeface="Leelawadee UI"/>
+        <a:font script="Bopo" typeface="Microsoft JhengHei"/>
+        <a:font script="Java" typeface="Javanese Text"/>
+        <a:font script="Lisu" typeface="Segoe UI"/>
+        <a:font script="Mymr" typeface="Myanmar Text"/>
+        <a:font script="Nkoo" typeface="Ebrima"/>
+        <a:font script="Olck" typeface="Nirmala UI"/>
+        <a:font script="Osma" typeface="Ebrima"/>
+        <a:font script="Phag" typeface="Phagspa"/>
+        <a:font script="Syrn" typeface="Estrangelo Edessa"/>
+        <a:font script="Syrj" typeface="Estrangelo Edessa"/>
+        <a:font script="Syre" typeface="Estrangelo Edessa"/>
+        <a:font script="Sora" typeface="Nirmala UI"/>
+        <a:font script="Tale" typeface="Microsoft Tai Le"/>
+        <a:font script="Talu" typeface="Microsoft New Tai Lue"/>
+        <a:font script="Tfng" typeface="Ebrima"/>
       </a:majorFont>
       <a:minorFont>
-        <a:latin typeface="Calibri"/>
+        <a:latin typeface="Aptos" panose="02110004020202020204"/>
         <a:ea typeface=""/>
         <a:cs typeface=""/>
-        <a:font script="Jpan" typeface="ＭＳ Ｐゴシック"/>
+        <a:font script="Jpan" typeface="游ゴシック"/>
         <a:font script="Hang" typeface="맑은 고딕"/>
-        <a:font script="Hans" typeface="宋体"/>
+        <a:font script="Hans" typeface="等线"/>
         <a:font script="Hant" typeface="新細明體"/>
         <a:font script="Arab" typeface="Arial"/>
         <a:font script="Hebr" typeface="Arial"/>
@@ -25226,6 +25403,23 @@
         <a:font script="Viet" typeface="Arial"/>
         <a:font script="Uigh" typeface="Microsoft Uighur"/>
         <a:font script="Geor" typeface="Sylfaen"/>
+        <a:font script="Armn" typeface="Arial"/>
+        <a:font script="Bugi" typeface="Leelawadee UI"/>
+        <a:font script="Bopo" typeface="Microsoft JhengHei"/>
+        <a:font script="Java" typeface="Javanese Text"/>
+        <a:font script="Lisu" typeface="Segoe UI"/>
+        <a:font script="Mymr" typeface="Myanmar Text"/>
+        <a:font script="Nkoo" typeface="Ebrima"/>
+        <a:font script="Olck" typeface="Nirmala UI"/>
+        <a:font script="Osma" typeface="Ebrima"/>
+        <a:font script="Phag" typeface="Phagspa"/>
+        <a:font script="Syrn" typeface="Estrangelo Edessa"/>
+        <a:font script="Syrj" typeface="Estrangelo Edessa"/>
+        <a:font script="Syre" typeface="Estrangelo Edessa"/>
+        <a:font script="Sora" typeface="Nirmala UI"/>
+        <a:font script="Tale" typeface="Microsoft Tai Le"/>
+        <a:font script="Talu" typeface="Microsoft New Tai Lue"/>
+        <a:font script="Tfng" typeface="Ebrima"/>
       </a:minorFont>
     </a:fontScheme>
     <a:fmtScheme name="Office">
@@ -25237,180 +25431,136 @@
           <a:gsLst>
             <a:gs pos="0">
               <a:schemeClr val="phClr">
-                <a:tint val="50000"/>
-                <a:satMod val="300000"/>
+                <a:lumMod val="110000"/>
+                <a:satMod val="105000"/>
+                <a:tint val="67000"/>
               </a:schemeClr>
             </a:gs>
-            <a:gs pos="35000">
+            <a:gs pos="50000">
               <a:schemeClr val="phClr">
-                <a:tint val="37000"/>
-                <a:satMod val="300000"/>
+                <a:lumMod val="105000"/>
+                <a:satMod val="103000"/>
+                <a:tint val="73000"/>
               </a:schemeClr>
             </a:gs>
             <a:gs pos="100000">
               <a:schemeClr val="phClr">
-                <a:tint val="15000"/>
-                <a:satMod val="350000"/>
+                <a:lumMod val="105000"/>
+                <a:satMod val="109000"/>
+                <a:tint val="81000"/>
               </a:schemeClr>
             </a:gs>
           </a:gsLst>
-          <a:lin ang="16200000" scaled="1"/>
+          <a:lin ang="5400000" scaled="0"/>
         </a:gradFill>
         <a:gradFill rotWithShape="1">
           <a:gsLst>
             <a:gs pos="0">
               <a:schemeClr val="phClr">
-                <a:tint val="100000"/>
+                <a:satMod val="103000"/>
+                <a:lumMod val="102000"/>
+                <a:tint val="94000"/>
+              </a:schemeClr>
+            </a:gs>
+            <a:gs pos="50000">
+              <a:schemeClr val="phClr">
+                <a:satMod val="110000"/>
+                <a:lumMod val="100000"/>
                 <a:shade val="100000"/>
-                <a:satMod val="130000"/>
               </a:schemeClr>
             </a:gs>
             <a:gs pos="100000">
               <a:schemeClr val="phClr">
-                <a:tint val="50000"/>
-                <a:shade val="100000"/>
-                <a:satMod val="350000"/>
+                <a:lumMod val="99000"/>
+                <a:satMod val="120000"/>
+                <a:shade val="78000"/>
               </a:schemeClr>
             </a:gs>
           </a:gsLst>
-          <a:lin ang="16200000" scaled="0"/>
+          <a:lin ang="5400000" scaled="0"/>
         </a:gradFill>
       </a:fillStyleLst>
       <a:lnStyleLst>
-        <a:ln w="9525" cap="flat" cmpd="sng" algn="ctr">
+        <a:ln w="12700" cap="flat" cmpd="sng" algn="ctr">
           <a:solidFill>
-            <a:schemeClr val="phClr">
-              <a:shade val="95000"/>
-              <a:satMod val="105000"/>
-            </a:schemeClr>
+            <a:schemeClr val="phClr"/>
           </a:solidFill>
           <a:prstDash val="solid"/>
+          <a:miter lim="800000"/>
+        </a:ln>
+        <a:ln w="19050" cap="flat" cmpd="sng" algn="ctr">
+          <a:solidFill>
+            <a:schemeClr val="phClr"/>
+          </a:solidFill>
+          <a:prstDash val="solid"/>
+          <a:miter lim="800000"/>
         </a:ln>
         <a:ln w="25400" cap="flat" cmpd="sng" algn="ctr">
           <a:solidFill>
             <a:schemeClr val="phClr"/>
           </a:solidFill>
           <a:prstDash val="solid"/>
-        </a:ln>
-        <a:ln w="38100" cap="flat" cmpd="sng" algn="ctr">
-          <a:solidFill>
-            <a:schemeClr val="phClr"/>
-          </a:solidFill>
-          <a:prstDash val="solid"/>
+          <a:miter lim="800000"/>
         </a:ln>
       </a:lnStyleLst>
       <a:effectStyleLst>
         <a:effectStyle>
+          <a:effectLst/>
+        </a:effectStyle>
+        <a:effectStyle>
+          <a:effectLst/>
+        </a:effectStyle>
+        <a:effectStyle>
           <a:effectLst>
-            <a:outerShdw blurRad="40000" dist="20000" dir="5400000" rotWithShape="0">
+            <a:outerShdw blurRad="57150" dist="19050" dir="5400000" algn="ctr" rotWithShape="0">
               <a:srgbClr val="000000">
-                <a:alpha val="38000"/>
+                <a:alpha val="63000"/>
               </a:srgbClr>
             </a:outerShdw>
           </a:effectLst>
-        </a:effectStyle>
-        <a:effectStyle>
-          <a:effectLst>
-            <a:outerShdw blurRad="40000" dist="23000" dir="5400000" rotWithShape="0">
-              <a:srgbClr val="000000">
-                <a:alpha val="35000"/>
-              </a:srgbClr>
-            </a:outerShdw>
-          </a:effectLst>
-        </a:effectStyle>
-        <a:effectStyle>
-          <a:effectLst>
-            <a:outerShdw blurRad="40000" dist="23000" dir="5400000" rotWithShape="0">
-              <a:srgbClr val="000000">
-                <a:alpha val="35000"/>
-              </a:srgbClr>
-            </a:outerShdw>
-          </a:effectLst>
-          <a:scene3d>
-            <a:camera prst="orthographicFront">
-              <a:rot lat="0" lon="0" rev="0"/>
-            </a:camera>
-            <a:lightRig rig="threePt" dir="t">
-              <a:rot lat="0" lon="0" rev="1200000"/>
-            </a:lightRig>
-          </a:scene3d>
-          <a:sp3d>
-            <a:bevelT w="63500" h="25400"/>
-          </a:sp3d>
         </a:effectStyle>
       </a:effectStyleLst>
       <a:bgFillStyleLst>
         <a:solidFill>
           <a:schemeClr val="phClr"/>
         </a:solidFill>
+        <a:solidFill>
+          <a:schemeClr val="phClr">
+            <a:tint val="95000"/>
+            <a:satMod val="170000"/>
+          </a:schemeClr>
+        </a:solidFill>
         <a:gradFill rotWithShape="1">
           <a:gsLst>
             <a:gs pos="0">
               <a:schemeClr val="phClr">
-                <a:tint val="40000"/>
-                <a:satMod val="350000"/>
+                <a:tint val="93000"/>
+                <a:satMod val="150000"/>
+                <a:shade val="98000"/>
+                <a:lumMod val="102000"/>
               </a:schemeClr>
             </a:gs>
-            <a:gs pos="40000">
+            <a:gs pos="50000">
               <a:schemeClr val="phClr">
-                <a:tint val="45000"/>
-                <a:shade val="99000"/>
-                <a:satMod val="350000"/>
+                <a:tint val="98000"/>
+                <a:satMod val="130000"/>
+                <a:shade val="90000"/>
+                <a:lumMod val="103000"/>
               </a:schemeClr>
             </a:gs>
             <a:gs pos="100000">
               <a:schemeClr val="phClr">
-                <a:shade val="20000"/>
-                <a:satMod val="255000"/>
+                <a:shade val="63000"/>
+                <a:satMod val="120000"/>
               </a:schemeClr>
             </a:gs>
           </a:gsLst>
-          <a:path path="circle">
-            <a:fillToRect l="50000" t="-80000" r="50000" b="180000"/>
-          </a:path>
-        </a:gradFill>
-        <a:gradFill rotWithShape="1">
-          <a:gsLst>
-            <a:gs pos="0">
-              <a:schemeClr val="phClr">
-                <a:tint val="80000"/>
-                <a:satMod val="300000"/>
-              </a:schemeClr>
-            </a:gs>
-            <a:gs pos="100000">
-              <a:schemeClr val="phClr">
-                <a:shade val="30000"/>
-                <a:satMod val="200000"/>
-              </a:schemeClr>
-            </a:gs>
-          </a:gsLst>
-          <a:path path="circle">
-            <a:fillToRect l="50000" t="50000" r="50000" b="50000"/>
-          </a:path>
+          <a:lin ang="5400000" scaled="0"/>
         </a:gradFill>
       </a:bgFillStyleLst>
     </a:fmtScheme>
   </a:themeElements>
   <a:objectDefaults>
-    <a:spDef>
-      <a:spPr/>
-      <a:bodyPr/>
-      <a:lstStyle/>
-      <a:style>
-        <a:lnRef idx="1">
-          <a:schemeClr val="accent1"/>
-        </a:lnRef>
-        <a:fillRef idx="3">
-          <a:schemeClr val="accent1"/>
-        </a:fillRef>
-        <a:effectRef idx="2">
-          <a:schemeClr val="accent1"/>
-        </a:effectRef>
-        <a:fontRef idx="minor">
-          <a:schemeClr val="lt1"/>
-        </a:fontRef>
-      </a:style>
-    </a:spDef>
     <a:lnDef>
       <a:spPr/>
       <a:bodyPr/>
@@ -25432,5 +25582,10 @@
     </a:lnDef>
   </a:objectDefaults>
   <a:extraClrSchemeLst/>
+  <a:extLst>
+    <a:ext uri="{05A4C25C-085E-4340-85A3-A5531E510DB2}">
+      <thm15:themeFamily xmlns:thm15="http://schemas.microsoft.com/office/thememl/2012/main" name="Office Theme" id="{2E142A2C-CD16-42D6-873A-C26D2A0506FA}" vid="{1BDDFF52-6CD6-40A5-AB3C-68EB2F1E4D0A}"/>
+    </a:ext>
+  </a:extLst>
 </a:theme>
 </file>